--- a/簡報/NKC202_期末專題_驗收簡報.pptx
+++ b/簡報/NKC202_期末專題_驗收簡報.pptx
@@ -5,23 +5,22 @@
     <p:sldMasterId id="2147483648" r:id="rId1"/>
   </p:sldMasterIdLst>
   <p:notesMasterIdLst>
-    <p:notesMasterId r:id="rId16"/>
+    <p:notesMasterId r:id="rId15"/>
   </p:notesMasterIdLst>
   <p:sldIdLst>
     <p:sldId id="256" r:id="rId2"/>
-    <p:sldId id="257" r:id="rId3"/>
-    <p:sldId id="258" r:id="rId4"/>
-    <p:sldId id="259" r:id="rId5"/>
-    <p:sldId id="260" r:id="rId6"/>
-    <p:sldId id="261" r:id="rId7"/>
-    <p:sldId id="262" r:id="rId8"/>
-    <p:sldId id="263" r:id="rId9"/>
-    <p:sldId id="264" r:id="rId10"/>
-    <p:sldId id="265" r:id="rId11"/>
-    <p:sldId id="266" r:id="rId12"/>
-    <p:sldId id="267" r:id="rId13"/>
-    <p:sldId id="268" r:id="rId14"/>
-    <p:sldId id="270" r:id="rId15"/>
+    <p:sldId id="258" r:id="rId3"/>
+    <p:sldId id="259" r:id="rId4"/>
+    <p:sldId id="260" r:id="rId5"/>
+    <p:sldId id="261" r:id="rId6"/>
+    <p:sldId id="262" r:id="rId7"/>
+    <p:sldId id="263" r:id="rId8"/>
+    <p:sldId id="264" r:id="rId9"/>
+    <p:sldId id="265" r:id="rId10"/>
+    <p:sldId id="268" r:id="rId11"/>
+    <p:sldId id="271" r:id="rId12"/>
+    <p:sldId id="272" r:id="rId13"/>
+    <p:sldId id="273" r:id="rId14"/>
   </p:sldIdLst>
   <p:sldSz cx="12192000" cy="6858000"/>
   <p:notesSz cx="6858000" cy="12192000"/>
@@ -1030,293 +1029,6 @@
           <a:p>
             <a:r>
               <a:rPr lang="en-US" dirty="0"/>
-              <a:t>這一頁講安全設計，我認為是這個專題最值得說明的部分。
-上面這個表是整條流水線的四個環節。每一個環節我都列出它怎麼認證、憑證活多久。
-四個環節，沒有任何一個存放長期金鑰。全部都是「用身分換取短期憑證，用完即失效」。
-最長的也只有 12 小時。就算某段日誌不小心外洩，隔天就沒用了。
-下面四點是其他措施，我挑兩個講。
-第二點的漏洞掃描。我把 ECR 設定成推送時自動掃描，結果實際掃出 4 個嚴重、8 個高風險漏洞——來源是基礎映像檔裡的作業系統套件，不是我寫的程式。
-這件事的意義是：你不會知道自己用的基底有什麼問題，除非有人幫你掃。2021 年 Log4j 事件的時候，很多金融機構最痛苦的問題就是「我們到底哪些系統用了它」，查了好幾天。這就是軟體供應鏈安全。
-第四點我想解釋一下。很多人以為「資料庫連不到外網」是靠防火牆擋的。其實不是。防火牆是門鎖，管的是誰可以進來；路由表是有沒有路，沒有路根本走不出去。
-我的私有子網路由表裡只有一條本地路由，沒有任何對外通道。這叫從根本上斷絕，比靠防火牆規則可靠得多。</a:t>
-            </a:r>
-          </a:p>
-        </p:txBody>
-      </p:sp>
-      <p:sp>
-        <p:nvSpPr>
-          <p:cNvPr id="4" name="Slide Number Placeholder 3"/>
-          <p:cNvSpPr>
-            <a:spLocks noGrp="1"/>
-          </p:cNvSpPr>
-          <p:nvPr>
-            <p:ph type="sldNum" sz="quarter" idx="10"/>
-          </p:nvPr>
-        </p:nvSpPr>
-        <p:spPr/>
-        <p:txBody>
-          <a:bodyPr/>
-          <a:lstStyle/>
-          <a:p>
-            <a:fld id="{F7021451-1387-4CA6-816F-3879F97B5CBC}" type="slidenum">
-              <a:rPr lang="en-US"/>
-              <a:t>10</a:t>
-            </a:fld>
-            <a:endParaRPr lang="en-US"/>
-          </a:p>
-        </p:txBody>
-      </p:sp>
-    </p:spTree>
-    <p:extLst>
-      <p:ext uri="{BB962C8B-B14F-4D97-AF65-F5344CB8AC3E}">
-        <p14:creationId xmlns:p14="http://schemas.microsoft.com/office/powerpoint/2010/main" val="1024086991"/>
-      </p:ext>
-    </p:extLst>
-  </p:cSld>
-  <p:clrMapOvr>
-    <a:masterClrMapping/>
-  </p:clrMapOvr>
-</p:notes>
-</file>
-
-<file path=ppt/notesSlides/notesSlide11.xml><?xml version="1.0" encoding="utf-8"?>
-<p:notes xmlns:a="http://schemas.openxmlformats.org/drawingml/2006/main" xmlns:r="http://schemas.openxmlformats.org/officeDocument/2006/relationships" xmlns:p="http://schemas.openxmlformats.org/presentationml/2006/main">
-  <p:cSld>
-    <p:spTree>
-      <p:nvGrpSpPr>
-        <p:cNvPr id="1" name=""/>
-        <p:cNvGrpSpPr/>
-        <p:nvPr/>
-      </p:nvGrpSpPr>
-      <p:grpSpPr>
-        <a:xfrm>
-          <a:off x="0" y="0"/>
-          <a:ext cx="0" cy="0"/>
-          <a:chOff x="0" y="0"/>
-          <a:chExt cx="0" cy="0"/>
-        </a:xfrm>
-      </p:grpSpPr>
-      <p:sp>
-        <p:nvSpPr>
-          <p:cNvPr id="2" name="Slide Image Placeholder 1"/>
-          <p:cNvSpPr>
-            <a:spLocks noGrp="1" noRot="1" noChangeAspect="1"/>
-          </p:cNvSpPr>
-          <p:nvPr>
-            <p:ph type="sldImg"/>
-          </p:nvPr>
-        </p:nvSpPr>
-        <p:spPr/>
-      </p:sp>
-      <p:sp>
-        <p:nvSpPr>
-          <p:cNvPr id="3" name="Notes Placeholder 2"/>
-          <p:cNvSpPr>
-            <a:spLocks noGrp="1"/>
-          </p:cNvSpPr>
-          <p:nvPr>
-            <p:ph type="body" idx="1"/>
-          </p:nvPr>
-        </p:nvSpPr>
-        <p:spPr/>
-        <p:txBody>
-          <a:bodyPr/>
-          <a:lstStyle/>
-          <a:p>
-            <a:r>
-              <a:rPr lang="en-US" dirty="0"/>
-              <a:t>這一頁我想花點時間講，因為它是這個專題我學到最多的地方。
-關 2 設定 OIDC 的時候，我卡了六次執行才成功。錯誤訊息從頭到尾都是上面這一句：「未被授權執行這個動作」。
-這句話的問題是——它只說「不被允許」，完全不說是哪一個條件不符。資訊量幾乎是零。
-中間這六行是我的完整過程，我沒有美化。
-第一次失敗。第二次我推測是 AWS 的設定傳播需要時間，重跑一次——錯了。第四次我推測是憑證指紋過期，我還特地去抓了 GitHub 目前真正的憑證來更新——也錯了。第五次我推測是大小寫不符——還是錯了。
-三次推測，全部都錯，總共花了大概 10 分鐘。
-轉折在第三次。我在流水線裡加了一個除錯步驟，把 GitHub 實際送出的身分內容整個印出來。當時那次還是失敗，但我拿到了關鍵資料。
-第六次，我讀了那個輸出，答案三秒鐘就出現了。
-真正的原因是：GitHub 已經改用一種新的格式，在身分內容裡面嵌入了帳號跟 repo 的數字編號。而我照著網路教學設定的是舊格式。兩邊格式根本不一樣，當然對不上。
-我想講的重點不是這個技術細節，而是這件事給我的啟示：
-當錯誤訊息的資訊量不足的時候，唯一有效的方法是把雙方實際的值印出來直接比對，而不是憑經驗猜測。
-三次推測 10 分鐘，一次量測 3 秒。這個對比我印象很深。</a:t>
-            </a:r>
-          </a:p>
-        </p:txBody>
-      </p:sp>
-      <p:sp>
-        <p:nvSpPr>
-          <p:cNvPr id="4" name="Slide Number Placeholder 3"/>
-          <p:cNvSpPr>
-            <a:spLocks noGrp="1"/>
-          </p:cNvSpPr>
-          <p:nvPr>
-            <p:ph type="sldNum" sz="quarter" idx="10"/>
-          </p:nvPr>
-        </p:nvSpPr>
-        <p:spPr/>
-        <p:txBody>
-          <a:bodyPr/>
-          <a:lstStyle/>
-          <a:p>
-            <a:fld id="{F7021451-1387-4CA6-816F-3879F97B5CBC}" type="slidenum">
-              <a:rPr lang="en-US"/>
-              <a:t>11</a:t>
-            </a:fld>
-            <a:endParaRPr lang="en-US"/>
-          </a:p>
-        </p:txBody>
-      </p:sp>
-    </p:spTree>
-    <p:extLst>
-      <p:ext uri="{BB962C8B-B14F-4D97-AF65-F5344CB8AC3E}">
-        <p14:creationId xmlns:p14="http://schemas.microsoft.com/office/powerpoint/2010/main" val="1024086991"/>
-      </p:ext>
-    </p:extLst>
-  </p:cSld>
-  <p:clrMapOvr>
-    <a:masterClrMapping/>
-  </p:clrMapOvr>
-</p:notes>
-</file>
-
-<file path=ppt/notesSlides/notesSlide12.xml><?xml version="1.0" encoding="utf-8"?>
-<p:notes xmlns:a="http://schemas.openxmlformats.org/drawingml/2006/main" xmlns:r="http://schemas.openxmlformats.org/officeDocument/2006/relationships" xmlns:p="http://schemas.openxmlformats.org/presentationml/2006/main">
-  <p:cSld>
-    <p:spTree>
-      <p:nvGrpSpPr>
-        <p:cNvPr id="1" name=""/>
-        <p:cNvGrpSpPr/>
-        <p:nvPr/>
-      </p:nvGrpSpPr>
-      <p:grpSpPr>
-        <a:xfrm>
-          <a:off x="0" y="0"/>
-          <a:ext cx="0" cy="0"/>
-          <a:chOff x="0" y="0"/>
-          <a:chExt cx="0" cy="0"/>
-        </a:xfrm>
-      </p:grpSpPr>
-      <p:sp>
-        <p:nvSpPr>
-          <p:cNvPr id="2" name="Slide Image Placeholder 1"/>
-          <p:cNvSpPr>
-            <a:spLocks noGrp="1" noRot="1" noChangeAspect="1"/>
-          </p:cNvSpPr>
-          <p:nvPr>
-            <p:ph type="sldImg"/>
-          </p:nvPr>
-        </p:nvSpPr>
-        <p:spPr/>
-      </p:sp>
-      <p:sp>
-        <p:nvSpPr>
-          <p:cNvPr id="3" name="Notes Placeholder 2"/>
-          <p:cNvSpPr>
-            <a:spLocks noGrp="1"/>
-          </p:cNvSpPr>
-          <p:nvPr>
-            <p:ph type="body" idx="1"/>
-          </p:nvPr>
-        </p:nvSpPr>
-        <p:spPr/>
-        <p:txBody>
-          <a:bodyPr/>
-          <a:lstStyle/>
-          <a:p>
-            <a:r>
-              <a:rPr lang="en-US" dirty="0"/>
-              <a:t>關 5 我沒有做，我想說明我是怎麼決定的。
-左邊是關 5 需要做的事：另外開一個 Google Cloud 帳號並綁信用卡、設定 GCP 版的身分聯邦、學 Cloud Run 的部署模型、然後維護第二套流水線。
-右邊是我的評估：大概要投入 5 到 8 小時，但這個題目的 Tier 認定不會因此提升，還是 3。
-同樣的 5 到 8 小時，我拿去做關 4 的滾動更新，加上把文件寫完整——我判斷這樣對專題品質的貢獻明顯更高。
-事實證明這個判斷是對的：關 4 那個「300 次請求零失敗」的數據，是整份報告最有力的證據之一。如果我拿那些時間去做跨雲，我會多一個關卡，但少一個能拿出來講的成果。
-下面這句話是我想強調的：「評估過、有理由地決定不做」跟「沒做完」，是完全不同的兩件事。
-架構設計的工作不只是把東西做出來，也包含判斷什麼不該做。我在文件裡把這個評估過程完整寫下來了，包括投入估計、Tier 影響、替代方案的比較。
-我覺得這比硬把六關做滿，更接近實務上的工作方式。</a:t>
-            </a:r>
-          </a:p>
-        </p:txBody>
-      </p:sp>
-      <p:sp>
-        <p:nvSpPr>
-          <p:cNvPr id="4" name="Slide Number Placeholder 3"/>
-          <p:cNvSpPr>
-            <a:spLocks noGrp="1"/>
-          </p:cNvSpPr>
-          <p:nvPr>
-            <p:ph type="sldNum" sz="quarter" idx="10"/>
-          </p:nvPr>
-        </p:nvSpPr>
-        <p:spPr/>
-        <p:txBody>
-          <a:bodyPr/>
-          <a:lstStyle/>
-          <a:p>
-            <a:fld id="{F7021451-1387-4CA6-816F-3879F97B5CBC}" type="slidenum">
-              <a:rPr lang="en-US"/>
-              <a:t>12</a:t>
-            </a:fld>
-            <a:endParaRPr lang="en-US"/>
-          </a:p>
-        </p:txBody>
-      </p:sp>
-    </p:spTree>
-    <p:extLst>
-      <p:ext uri="{BB962C8B-B14F-4D97-AF65-F5344CB8AC3E}">
-        <p14:creationId xmlns:p14="http://schemas.microsoft.com/office/powerpoint/2010/main" val="1024086991"/>
-      </p:ext>
-    </p:extLst>
-  </p:cSld>
-  <p:clrMapOvr>
-    <a:masterClrMapping/>
-  </p:clrMapOvr>
-</p:notes>
-</file>
-
-<file path=ppt/notesSlides/notesSlide13.xml><?xml version="1.0" encoding="utf-8"?>
-<p:notes xmlns:a="http://schemas.openxmlformats.org/drawingml/2006/main" xmlns:r="http://schemas.openxmlformats.org/officeDocument/2006/relationships" xmlns:p="http://schemas.openxmlformats.org/presentationml/2006/main">
-  <p:cSld>
-    <p:spTree>
-      <p:nvGrpSpPr>
-        <p:cNvPr id="1" name=""/>
-        <p:cNvGrpSpPr/>
-        <p:nvPr/>
-      </p:nvGrpSpPr>
-      <p:grpSpPr>
-        <a:xfrm>
-          <a:off x="0" y="0"/>
-          <a:ext cx="0" cy="0"/>
-          <a:chOff x="0" y="0"/>
-          <a:chExt cx="0" cy="0"/>
-        </a:xfrm>
-      </p:grpSpPr>
-      <p:sp>
-        <p:nvSpPr>
-          <p:cNvPr id="2" name="Slide Image Placeholder 1"/>
-          <p:cNvSpPr>
-            <a:spLocks noGrp="1" noRot="1" noChangeAspect="1"/>
-          </p:cNvSpPr>
-          <p:nvPr>
-            <p:ph type="sldImg"/>
-          </p:nvPr>
-        </p:nvSpPr>
-        <p:spPr/>
-      </p:sp>
-      <p:sp>
-        <p:nvSpPr>
-          <p:cNvPr id="3" name="Notes Placeholder 2"/>
-          <p:cNvSpPr>
-            <a:spLocks noGrp="1"/>
-          </p:cNvSpPr>
-          <p:nvPr>
-            <p:ph type="body" idx="1"/>
-          </p:nvPr>
-        </p:nvSpPr>
-        <p:spPr/>
-        <p:txBody>
-          <a:bodyPr/>
-          <a:lstStyle/>
-          <a:p>
-            <a:r>
-              <a:rPr lang="en-US" dirty="0"/>
               <a:t>最後一個部分，我想講這套流程實際上解決什麼問題。
 我目前在金融業擔任商業分析的工作，所以我會特別從這個角度看。
 在金融業，「系統上線」從來不是純技術問題，它是風險與法遵問題。
@@ -1351,101 +1063,7 @@
           <a:p>
             <a:fld id="{F7021451-1387-4CA6-816F-3879F97B5CBC}" type="slidenum">
               <a:rPr lang="en-US"/>
-              <a:t>13</a:t>
-            </a:fld>
-            <a:endParaRPr lang="en-US"/>
-          </a:p>
-        </p:txBody>
-      </p:sp>
-    </p:spTree>
-    <p:extLst>
-      <p:ext uri="{BB962C8B-B14F-4D97-AF65-F5344CB8AC3E}">
-        <p14:creationId xmlns:p14="http://schemas.microsoft.com/office/powerpoint/2010/main" val="1024086991"/>
-      </p:ext>
-    </p:extLst>
-  </p:cSld>
-  <p:clrMapOvr>
-    <a:masterClrMapping/>
-  </p:clrMapOvr>
-</p:notes>
-</file>
-
-<file path=ppt/notesSlides/notesSlide14.xml><?xml version="1.0" encoding="utf-8"?>
-<p:notes xmlns:a="http://schemas.openxmlformats.org/drawingml/2006/main" xmlns:r="http://schemas.openxmlformats.org/officeDocument/2006/relationships" xmlns:p="http://schemas.openxmlformats.org/presentationml/2006/main">
-  <p:cSld>
-    <p:spTree>
-      <p:nvGrpSpPr>
-        <p:cNvPr id="1" name=""/>
-        <p:cNvGrpSpPr/>
-        <p:nvPr/>
-      </p:nvGrpSpPr>
-      <p:grpSpPr>
-        <a:xfrm>
-          <a:off x="0" y="0"/>
-          <a:ext cx="0" cy="0"/>
-          <a:chOff x="0" y="0"/>
-          <a:chExt cx="0" cy="0"/>
-        </a:xfrm>
-      </p:grpSpPr>
-      <p:sp>
-        <p:nvSpPr>
-          <p:cNvPr id="2" name="Slide Image Placeholder 1"/>
-          <p:cNvSpPr>
-            <a:spLocks noGrp="1" noRot="1" noChangeAspect="1"/>
-          </p:cNvSpPr>
-          <p:nvPr>
-            <p:ph type="sldImg"/>
-          </p:nvPr>
-        </p:nvSpPr>
-        <p:spPr/>
-      </p:sp>
-      <p:sp>
-        <p:nvSpPr>
-          <p:cNvPr id="3" name="Notes Placeholder 2"/>
-          <p:cNvSpPr>
-            <a:spLocks noGrp="1"/>
-          </p:cNvSpPr>
-          <p:nvPr>
-            <p:ph type="body" idx="1"/>
-          </p:nvPr>
-        </p:nvSpPr>
-        <p:spPr/>
-        <p:txBody>
-          <a:bodyPr/>
-          <a:lstStyle/>
-          <a:p>
-            <a:r>
-              <a:rPr lang="en-US" dirty="0"/>
-              <a:t>最後做個總結。
-我覺得這個專題真正的產出，不是我做完了四個關卡，而是兩份紀錄。
-第一份是關 0 的基準線：18 步、16 分鐘、2 次失敗、版本完全無法追溯。
-如果沒有這四個數字，我後面做的四關就只是四個工具——「我學會了 Docker」、「我學會了 GitHub Actions」。有了這四個數字，它們才變成「我解決了四個具體的問題，而且改善幅度是可以量化的」。
-第二份是關 2 那六次失敗的除錯歷程。三次推測全錯、一次量測命中。
-我特別把這段完整寫進報告，包括我猜錯的那三次。因為我覺得它證明的不是我會用工具——照著教學抄也會用工具——而是我會在沒有現成答案的時候，找出問題在哪裡。
-這兩件事是我這次最大的收穫。
-以上是我的報告，謝謝大家。</a:t>
-            </a:r>
-          </a:p>
-        </p:txBody>
-      </p:sp>
-      <p:sp>
-        <p:nvSpPr>
-          <p:cNvPr id="4" name="Slide Number Placeholder 3"/>
-          <p:cNvSpPr>
-            <a:spLocks noGrp="1"/>
-          </p:cNvSpPr>
-          <p:nvPr>
-            <p:ph type="sldNum" sz="quarter" idx="10"/>
-          </p:nvPr>
-        </p:nvSpPr>
-        <p:spPr/>
-        <p:txBody>
-          <a:bodyPr/>
-          <a:lstStyle/>
-          <a:p>
-            <a:fld id="{F7021451-1387-4CA6-816F-3879F97B5CBC}" type="slidenum">
-              <a:rPr lang="en-US"/>
-              <a:t>14</a:t>
+              <a:t>10</a:t>
             </a:fld>
             <a:endParaRPr lang="en-US"/>
           </a:p>
@@ -1510,11 +1128,12 @@
           <a:p>
             <a:r>
               <a:rPr lang="en-US" dirty="0"/>
-              <a:t>先講清楚這個專題的命題是什麼。
-它不是「我學會了 GitHub Actions」，也不是「我會用 Docker」。它在回答一個很具體的問題：工程師改了一行程式碼，這行程式碼要怎麼變成線上正在跑的網站？
-這個問題聽起來很簡單，但它有六種不同層次的答案。從最原始的「自己登入伺服器手動複製檔案」，一路到「完全自動、而且換版時使用者完全不會斷線」。
-我這次的做法是：六種我全部做過一遍，而且每一種我都記錄了四個數字——需要幾個步驟、花多少時間、失敗幾次、事後查不查得到線上跑的是哪一版。
-所以等一下我講的每一個改善幅度，背後都有實際量測的數字，不是我估的。</a:t>
+              <a:t>這是整個專題的地圖。
+六個關卡，我做到關 4，關 5 評估後決定不做——這個決定的理由我後面會說明。
+我想強調的是這張圖右邊那句話：關卡與關卡之間，不是「我又學了一個新工具」，而是「我解決了上一關記錄下來的一個具體問題」。
+舉例來說。關 0 我手動部署的時候，程式碼是用貼的貼進伺服器，貼壞了兩次。這個痛點我記錄下來了。所以關 1 我做容器化，用 docker pull 傳輸，這個問題就消失了。
+再例如，關 1 做完之後，映像檔還是要我自己打指令建置、自己推上去。這個痛點也記錄下來了。所以關 2 我做自動建置。
+這樣一關一關推進，每一關都有明確要解決的東西。這也是為什麼關 0 那份「手動部署有多痛」的紀錄非做不可——沒有它，後面四關就只是四個工具，沒有故事。</a:t>
             </a:r>
           </a:p>
         </p:txBody>
@@ -1601,12 +1220,14 @@
           <a:p>
             <a:r>
               <a:rPr lang="en-US" dirty="0"/>
-              <a:t>這是整個專題的地圖。
-六個關卡，我做到關 4，關 5 評估後決定不做——這個決定的理由我後面會說明。
-我想強調的是這張圖右邊那句話：關卡與關卡之間，不是「我又學了一個新工具」，而是「我解決了上一關記錄下來的一個具體問題」。
-舉例來說。關 0 我手動部署的時候，程式碼是用貼的貼進伺服器，貼壞了兩次。這個痛點我記錄下來了。所以關 1 我做容器化，用 docker pull 傳輸，這個問題就消失了。
-再例如，關 1 做完之後，映像檔還是要我自己打指令建置、自己推上去。這個痛點也記錄下來了。所以關 2 我做自動建置。
-這樣一關一關推進，每一關都有明確要解決的東西。這也是為什麼關 0 那份「手動部署有多痛」的紀錄非做不可——沒有它，後面四關就只是四個工具，沒有故事。</a:t>
+              <a:t>關 0 是手動部署。
+這一關我要特別說明一下，因為它跟大家想的可能不一樣：這一關的目標「不是」部署成功。手動部署本來就一定會成功，只是花時間而已。
+這一關真正的產出，是右邊這四個數字：18 個步驟、16 分鐘、失敗 2 次、版本完全無法追溯。
+這四個數字是整個專題的基準線。後面每一關的價值，都是靠跟這四個數字對照才顯現出來的。
+時間是怎麼算的？我不是用回憶估的，是用截圖檔案的時間戳回推——連線成功那張是 11 點 40 分 12 秒，驗證成功那張是 11 點 56 分 15 秒，中間 16 分鐘。
+左下角這兩個失敗也值得一提。第一個是 sudo -i 之後用 &amp;&amp; 串指令不會執行，第二個是 Session Manager 一次貼 58 行程式碼會掉字。這兩個都是真實踩到的坑，我把錯誤訊息和根本原因都記錄下來了。
+右下角是我記錄的七個痛點，我挑三個唸：版本號是我人工填的、完全不知道線上跑的是哪一版、每改一行程式碼這 18 步要重來一次。
+這七個痛點，就是後面四關要一個一個解決的東西。</a:t>
             </a:r>
           </a:p>
         </p:txBody>
@@ -1693,14 +1314,15 @@
           <a:p>
             <a:r>
               <a:rPr lang="en-US" dirty="0"/>
-              <a:t>關 0 是手動部署。
-這一關我要特別說明一下，因為它跟大家想的可能不一樣：這一關的目標「不是」部署成功。手動部署本來就一定會成功，只是花時間而已。
-這一關真正的產出，是右邊這四個數字：18 個步驟、16 分鐘、失敗 2 次、版本完全無法追溯。
-這四個數字是整個專題的基準線。後面每一關的價值，都是靠跟這四個數字對照才顯現出來的。
-時間是怎麼算的？我不是用回憶估的，是用截圖檔案的時間戳回推——連線成功那張是 11 點 40 分 12 秒，驗證成功那張是 11 點 56 分 15 秒，中間 16 分鐘。
-左下角這兩個失敗也值得一提。第一個是 sudo -i 之後用 &amp;&amp; 串指令不會執行，第二個是 Session Manager 一次貼 58 行程式碼會掉字。這兩個都是真實踩到的坑，我把錯誤訊息和根本原因都記錄下來了。
-右下角是我記錄的七個痛點，我挑三個唸：版本號是我人工填的、完全不知道線上跑的是哪一版、每改一行程式碼這 18 步要重來一次。
-這七個痛點，就是後面四關要一個一個解決的東西。</a:t>
+              <a:t>關 1 是容器化。
+左邊是關 0 的做法，右邊是關 1 的做法，我用同樣四個面向對照。
+程式碼傳輸：以前是用貼的，會貼壞；現在是 docker pull，完整傳輸不會壞。
+執行環境：以前目標機器要先裝 Python、要自己建虛擬環境、自己裝套件；現在這些全部封裝在映像檔裡面。
+換機器：以前全部重來；現在同一個映像檔丟到哪台機器，行為都一模一樣。
+這裡我想多解釋一個觀念，叫「不可變基礎設施」。映像檔一旦建好就不再修改，要改就重新建一個新的。所以線上跑的東西永遠是確定的，不會有「這台機器上次有人手動改過什麼」這種問題。
+下面的數字：步驟從 18 降到 7，時間從 16 分鐘降到 37 秒，傳輸失敗歸零。
+最右邊那格特別重要。關 0 的時候，版本這一格我只能填「none-manual-deploy」，因為手動部署根本不知道自己在部署哪一版。關 1 開始，我把 git commit 的編號烤進映像檔裡，所以線上跑的是哪一版，第一次變成查得到的事情。
+不過關 1 還有沒解決的問題：建置跟推送還是我自己打指令，版本號也還是我自己決定的。這兩件事留給關 2。</a:t>
             </a:r>
           </a:p>
         </p:txBody>
@@ -1787,15 +1409,16 @@
           <a:p>
             <a:r>
               <a:rPr lang="en-US" dirty="0"/>
-              <a:t>關 1 是容器化。
-左邊是關 0 的做法，右邊是關 1 的做法，我用同樣四個面向對照。
-程式碼傳輸：以前是用貼的，會貼壞；現在是 docker pull，完整傳輸不會壞。
-執行環境：以前目標機器要先裝 Python、要自己建虛擬環境、自己裝套件；現在這些全部封裝在映像檔裡面。
-換機器：以前全部重來；現在同一個映像檔丟到哪台機器，行為都一模一樣。
-這裡我想多解釋一個觀念，叫「不可變基礎設施」。映像檔一旦建好就不再修改，要改就重新建一個新的。所以線上跑的東西永遠是確定的，不會有「這台機器上次有人手動改過什麼」這種問題。
-下面的數字：步驟從 18 降到 7，時間從 16 分鐘降到 37 秒，傳輸失敗歸零。
-最右邊那格特別重要。關 0 的時候，版本這一格我只能填「none-manual-deploy」，因為手動部署根本不知道自己在部署哪一版。關 1 開始，我把 git commit 的編號烤進映像檔裡，所以線上跑的是哪一版，第一次變成查得到的事情。
-不過關 1 還有沒解決的問題：建置跟推送還是我自己打指令，版本號也還是我自己決定的。這兩件事留給關 2。</a:t>
+              <a:t>關 2 是自動建置。
+上面這四格是流水線的流程。第一步 git push 是我唯一要做的動作，後面三步全部是機器自己做。
+第二步我想特別提。測試被我獨立成一個關卡，而且設定成「測試沒過，後面的建置和部署完全不會執行」。
+這件事在技術上叫 CI，但如果用金融業的語言來說，這叫「自動化的內控關卡」。以前的變更管理是靠人簽核、靠人記得檢查；現在是機器強制執行，繞不過去。這對稽核來說比一疊簽核單有力得多。
+第三步的版本號，現在是機器用 commit 編號跟流水線執行次數自動產生的。關 0 的時候那個版本號是我自己隨手打的，我可以打錯、可以忘記改。現在我連想填錯都沒機會。
+下面這一塊是關 2 最重要的設計，我要多花點時間講。
+一般人的做法是：去 AWS 開一組 access key，存進 GitHub 的 Secrets。但這等於把你 AWS 帳號的鑰匙，永久交給第三方平台保管。
+我用的是 OIDC。運作方式是：GitHub 在每次執行流水線的時候，幫這次執行簽發一張身分證明，這張證明只有幾分鐘有效。拿這張證明去跟 AWS 說「我是這個 repo 的 main 分支」，AWS 驗證通過之後，才發給一組一小時後就失效的臨時憑證。
+結果是：GitHub 那邊沒有金鑰，AWS 這邊也沒有金鑰。整條流水線裡找不到任何一組長期密碼。
+這一關的設定我卡了很久，後面有一頁專門講那個過程。</a:t>
             </a:r>
           </a:p>
         </p:txBody>
@@ -1882,16 +1505,15 @@
           <a:p>
             <a:r>
               <a:rPr lang="en-US" dirty="0"/>
-              <a:t>關 2 是自動建置。
-上面這四格是流水線的流程。第一步 git push 是我唯一要做的動作，後面三步全部是機器自己做。
-第二步我想特別提。測試被我獨立成一個關卡，而且設定成「測試沒過，後面的建置和部署完全不會執行」。
-這件事在技術上叫 CI，但如果用金融業的語言來說，這叫「自動化的內控關卡」。以前的變更管理是靠人簽核、靠人記得檢查；現在是機器強制執行，繞不過去。這對稽核來說比一疊簽核單有力得多。
-第三步的版本號，現在是機器用 commit 編號跟流水線執行次數自動產生的。關 0 的時候那個版本號是我自己隨手打的，我可以打錯、可以忘記改。現在我連想填錯都沒機會。
-下面這一塊是關 2 最重要的設計，我要多花點時間講。
-一般人的做法是：去 AWS 開一組 access key，存進 GitHub 的 Secrets。但這等於把你 AWS 帳號的鑰匙，永久交給第三方平台保管。
-我用的是 OIDC。運作方式是：GitHub 在每次執行流水線的時候，幫這次執行簽發一張身分證明，這張證明只有幾分鐘有效。拿這張證明去跟 AWS 說「我是這個 repo 的 main 分支」，AWS 驗證通過之後，才發給一組一小時後就失效的臨時憑證。
-結果是：GitHub 那邊沒有金鑰，AWS 這邊也沒有金鑰。整條流水線裡找不到任何一組長期密碼。
-這一關的設定我卡了很久，後面有一頁專門講那個過程。</a:t>
+              <a:t>關 3 是這個專題的主軸，做到這裡 Tier 3 就成立了。
+左上角是我實際做的驗證。我在 app.py 裡加了一行程式碼，git push 出去，然後什麼都不做，就在旁邊等。
+14 點 22 分 49 秒 push，14 點 24 分 09 秒線上版本自己變了。總共 80 秒。中間我沒有登入任何機器、沒有下任何指令。
+右上角這個我覺得是關 3 最漂亮的地方。線上網頁顯示的 Git Commit 是 dc4758f，我本機 git log 最新一筆也是 dc4758f。這兩個對得起來。
+回到關 0 那一格「none-manual-deploy」——從那個什麼都查不到的狀態，到現在線上跑的是哪一版是百分之百確定的事。這中間的差距，就是「可追溯性」。
+下面這塊講部署方式。
+我沒有用 SSH。EC2 完全不開 22 port，連主機裡面的 sshd 服務我都停掉了。
+為什麼可以不開 port？因為 SSM 的運作方式是反過來的——不是我從外面連進去，是主機上的代理程式主動打電話出來問「有沒有我的工作」。所以完全不需要任何對外開放的連接埠。
+這對資安稽核的意義是：如果被問「誰有權限登入生產主機」，我的答案是「沒有人能 SSH，因為根本沒有這個服務」。而且每一次操作都綁定到具體身分，全部記錄在 CloudTrail。</a:t>
             </a:r>
           </a:p>
         </p:txBody>
@@ -1978,15 +1600,16 @@
           <a:p>
             <a:r>
               <a:rPr lang="en-US" dirty="0"/>
-              <a:t>關 3 是這個專題的主軸，做到這裡 Tier 3 就成立了。
-左上角是我實際做的驗證。我在 app.py 裡加了一行程式碼，git push 出去，然後什麼都不做，就在旁邊等。
-14 點 22 分 49 秒 push，14 點 24 分 09 秒線上版本自己變了。總共 80 秒。中間我沒有登入任何機器、沒有下任何指令。
-右上角這個我覺得是關 3 最漂亮的地方。線上網頁顯示的 Git Commit 是 dc4758f，我本機 git log 最新一筆也是 dc4758f。這兩個對得起來。
-回到關 0 那一格「none-manual-deploy」——從那個什麼都查不到的狀態，到現在線上跑的是哪一版是百分之百確定的事。這中間的差距，就是「可追溯性」。
-下面這塊講部署方式。
-我沒有用 SSH。EC2 完全不開 22 port，連主機裡面的 sshd 服務我都停掉了。
-為什麼可以不開 port？因為 SSM 的運作方式是反過來的——不是我從外面連進去，是主機上的代理程式主動打電話出來問「有沒有我的工作」。所以完全不需要任何對外開放的連接埠。
-這對資安稽核的意義是：如果被問「誰有權限登入生產主機」，我的答案是「沒有人能 SSH，因為根本沒有這個服務」。而且每一次操作都綁定到具體身分，全部記錄在 CloudTrail。</a:t>
+              <a:t>關 4 是我最後做的一關，解決的是關 3 剩下的最後一個問題。
+左上角：關 3 的部署動作是先 docker rm 殺掉舊容器，再 docker run 啟動新的。中間那幾秒，那台機器上是完全沒有服務的。這在單機上無法避免，因為只有一個容器，殺掉就沒了。
+在金融業，這對應到「上線需要停機窗口」——必須排在收盤後或週末，還要動員人力待命。
+右上角是關 4 的解法。我把部署目標換成 ECS Fargate，設定成滾動更新：先啟動新任務，等它通過負載平衡器的健康檢查，才逐一終止舊任務。全程至少維持原有數量的健康任務。
+中間這三個數字是這一關唯一要證明的事，也是我覺得整個專題最硬的證據。
+我在部署的同時，開了一支程式每 0.5 秒打一次網站，持續四分鐘。結果是 300 次請求、300 次成功、0 次失敗，可用率百分之百。
+最下面這行是換版瞬間的明細，我覺得很有意思。
+26 秒的時候是舊版，27 秒變新版，28 秒又回到舊版，31 秒又是新版……新舊版本交錯出現了大概 15 秒。
+這個交錯就是滾動更新的指紋。它證明系統不是「先殺再起」，而是新舊任務同時活著、流量逐步轉移。而在這 15 秒裡面，沒有任何一個使用者的請求失敗。
+對照關 3：那幾秒是真的斷線。對照關 4：使用者完全無感。</a:t>
             </a:r>
           </a:p>
         </p:txBody>
@@ -2073,16 +1696,17 @@
           <a:p>
             <a:r>
               <a:rPr lang="en-US" dirty="0"/>
-              <a:t>關 4 是我最後做的一關，解決的是關 3 剩下的最後一個問題。
-左上角：關 3 的部署動作是先 docker rm 殺掉舊容器，再 docker run 啟動新的。中間那幾秒，那台機器上是完全沒有服務的。這在單機上無法避免，因為只有一個容器，殺掉就沒了。
-在金融業，這對應到「上線需要停機窗口」——必須排在收盤後或週末，還要動員人力待命。
-右上角是關 4 的解法。我把部署目標換成 ECS Fargate，設定成滾動更新：先啟動新任務，等它通過負載平衡器的健康檢查，才逐一終止舊任務。全程至少維持原有數量的健康任務。
-中間這三個數字是這一關唯一要證明的事，也是我覺得整個專題最硬的證據。
-我在部署的同時，開了一支程式每 0.5 秒打一次網站，持續四分鐘。結果是 300 次請求、300 次成功、0 次失敗，可用率百分之百。
-最下面這行是換版瞬間的明細，我覺得很有意思。
-26 秒的時候是舊版，27 秒變新版，28 秒又回到舊版，31 秒又是新版……新舊版本交錯出現了大概 15 秒。
-這個交錯就是滾動更新的指紋。它證明系統不是「先殺再起」，而是新舊任務同時活著、流量逐步轉移。而在這 15 秒裡面，沒有任何一個使用者的請求失敗。
-對照關 3：那幾秒是真的斷線。對照關 4：使用者完全無感。</a:t>
+              <a:t>這一頁是整個專題的結論。
+左邊這張圖是人工步驟數。關 0 是 18 步，關 1 降到 7 步，關 2 之後就只剩 1 步，就是 git push。減少 94%。
+右邊是端到端耗時。關 0 是 960 秒，也就是 16 分鐘。關 3 是 80 秒。減少 92%。
+這裡我想誠實說明一件事：關 1 的 37 秒看起來比關 3 的 80 秒快，但那不是退步。關 1 的 37 秒是「機器執行的時間」，人還要自己去打指令、自己去部署。關 3 的 80 秒是「從我按下 push，到使用者看得到新版」的完整時間，中間完全沒有人。
+下面這五欄是不能用圖表呈現、但同樣重要的改善。
+人工介入：從每次都要，變成零。
+失敗次數：從 2 次變成 0 次。
+測試關卡：從沒有，變成機器自動阻擋。
+版本可追溯：從查不到，變成精確對應到某一次 commit。
+換版中斷：從有，變成沒有。
+我想強調最後三欄。前面兩欄是「快多少」，後面三欄是「安不安全、查不查得到、會不會影響使用者」——在金融業，後面三欄其實比前面兩欄重要。</a:t>
             </a:r>
           </a:p>
         </p:txBody>
@@ -2169,17 +1793,15 @@
           <a:p>
             <a:r>
               <a:rPr lang="en-US" dirty="0"/>
-              <a:t>這一頁是整個專題的結論。
-左邊這張圖是人工步驟數。關 0 是 18 步，關 1 降到 7 步，關 2 之後就只剩 1 步，就是 git push。減少 94%。
-右邊是端到端耗時。關 0 是 960 秒，也就是 16 分鐘。關 3 是 80 秒。減少 92%。
-這裡我想誠實說明一件事：關 1 的 37 秒看起來比關 3 的 80 秒快，但那不是退步。關 1 的 37 秒是「機器執行的時間」，人還要自己去打指令、自己去部署。關 3 的 80 秒是「從我按下 push，到使用者看得到新版」的完整時間，中間完全沒有人。
-下面這五欄是不能用圖表呈現、但同樣重要的改善。
-人工介入：從每次都要，變成零。
-失敗次數：從 2 次變成 0 次。
-測試關卡：從沒有，變成機器自動阻擋。
-版本可追溯：從查不到，變成精確對應到某一次 commit。
-換版中斷：從有，變成沒有。
-我想強調最後三欄。前面兩欄是「快多少」，後面三欄是「安不安全、查不查得到、會不會影響使用者」——在金融業，後面三欄其實比前面兩欄重要。</a:t>
+              <a:t>這一頁講安全設計，我認為是這個專題最值得說明的部分。
+上面這個表是整條流水線的四個環節。每一個環節我都列出它怎麼認證、憑證活多久。
+四個環節，沒有任何一個存放長期金鑰。全部都是「用身分換取短期憑證，用完即失效」。
+最長的也只有 12 小時。就算某段日誌不小心外洩，隔天就沒用了。
+下面四點是其他措施，我挑兩個講。
+第二點的漏洞掃描。我把 ECR 設定成推送時自動掃描，結果實際掃出 4 個嚴重、8 個高風險漏洞——來源是基礎映像檔裡的作業系統套件，不是我寫的程式。
+這件事的意義是：你不會知道自己用的基底有什麼問題，除非有人幫你掃。2021 年 Log4j 事件的時候，很多金融機構最痛苦的問題就是「我們到底哪些系統用了它」，查了好幾天。這就是軟體供應鏈安全。
+第四點我想解釋一下。很多人以為「資料庫連不到外網」是靠防火牆擋的。其實不是。防火牆是門鎖，管的是誰可以進來；路由表是有沒有路，沒有路根本走不出去。
+我的私有子網路由表裡只有一條本地路由，沒有任何對外通道。這叫從根本上斷絕，比靠防火牆規則可靠得多。</a:t>
             </a:r>
           </a:p>
         </p:txBody>
@@ -2819,2636 +2441,6 @@
 
 <file path=ppt/slides/slide10.xml><?xml version="1.0" encoding="utf-8"?>
 <p:sld xmlns:a="http://schemas.openxmlformats.org/drawingml/2006/main" xmlns:r="http://schemas.openxmlformats.org/officeDocument/2006/relationships" xmlns:p="http://schemas.openxmlformats.org/presentationml/2006/main">
-  <p:cSld name="Slide 10">
-    <p:bg>
-      <p:bgPr>
-        <a:solidFill>
-          <a:srgbClr val="FFFFFF"/>
-        </a:solidFill>
-        <a:effectLst/>
-      </p:bgPr>
-    </p:bg>
-    <p:spTree>
-      <p:nvGrpSpPr>
-        <p:cNvPr id="1" name=""/>
-        <p:cNvGrpSpPr/>
-        <p:nvPr/>
-      </p:nvGrpSpPr>
-      <p:grpSpPr>
-        <a:xfrm>
-          <a:off x="0" y="0"/>
-          <a:ext cx="0" cy="0"/>
-          <a:chOff x="0" y="0"/>
-          <a:chExt cx="0" cy="0"/>
-        </a:xfrm>
-      </p:grpSpPr>
-      <p:sp>
-        <p:nvSpPr>
-          <p:cNvPr id="2" name="Text 0"/>
-          <p:cNvSpPr/>
-          <p:nvPr/>
-        </p:nvSpPr>
-        <p:spPr>
-          <a:xfrm>
-            <a:off x="548640" y="384048"/>
-            <a:ext cx="7315200" cy="274320"/>
-          </a:xfrm>
-          <a:prstGeom prst="rect">
-            <a:avLst/>
-          </a:prstGeom>
-          <a:noFill/>
-          <a:ln/>
-        </p:spPr>
-        <p:txBody>
-          <a:bodyPr wrap="square" lIns="0" tIns="0" rIns="0" bIns="0" rtlCol="0" anchor="ctr"/>
-          <a:lstStyle/>
-          <a:p>
-            <a:pPr marL="0" indent="0">
-              <a:buNone/>
-            </a:pPr>
-            <a:r>
-              <a:rPr lang="en-US" sz="1200" b="1" kern="0" spc="150" dirty="0">
-                <a:solidFill>
-                  <a:srgbClr val="38BDF8"/>
-                </a:solidFill>
-                <a:latin typeface="Calibri" pitchFamily="34" charset="0"/>
-                <a:ea typeface="Calibri" pitchFamily="34" charset="-122"/>
-                <a:cs typeface="Calibri" pitchFamily="34" charset="-120"/>
-              </a:rPr>
-              <a:t>評分維度③</a:t>
-            </a:r>
-            <a:endParaRPr lang="en-US" sz="1200" dirty="0"/>
-          </a:p>
-        </p:txBody>
-      </p:sp>
-      <p:sp>
-        <p:nvSpPr>
-          <p:cNvPr id="3" name="Text 1"/>
-          <p:cNvSpPr/>
-          <p:nvPr/>
-        </p:nvSpPr>
-        <p:spPr>
-          <a:xfrm>
-            <a:off x="548640" y="658368"/>
-            <a:ext cx="11064240" cy="640080"/>
-          </a:xfrm>
-          <a:prstGeom prst="rect">
-            <a:avLst/>
-          </a:prstGeom>
-          <a:noFill/>
-          <a:ln/>
-        </p:spPr>
-        <p:txBody>
-          <a:bodyPr wrap="square" lIns="0" tIns="0" rIns="0" bIns="0" rtlCol="0" anchor="ctr"/>
-          <a:lstStyle/>
-          <a:p>
-            <a:pPr marL="0" indent="0">
-              <a:buNone/>
-            </a:pPr>
-            <a:r>
-              <a:rPr lang="en-US" sz="3400" b="1" dirty="0">
-                <a:solidFill>
-                  <a:srgbClr val="1E293B"/>
-                </a:solidFill>
-                <a:latin typeface="Calibri" pitchFamily="34" charset="0"/>
-                <a:ea typeface="Calibri" pitchFamily="34" charset="-122"/>
-                <a:cs typeface="Calibri" pitchFamily="34" charset="-120"/>
-              </a:rPr>
-              <a:t>安全設計：整條流水線零長期憑證</a:t>
-            </a:r>
-            <a:endParaRPr lang="en-US" sz="3400" dirty="0"/>
-          </a:p>
-        </p:txBody>
-      </p:sp>
-      <p:sp>
-        <p:nvSpPr>
-          <p:cNvPr id="4" name="Shape 2"/>
-          <p:cNvSpPr/>
-          <p:nvPr/>
-        </p:nvSpPr>
-        <p:spPr>
-          <a:xfrm>
-            <a:off x="548640" y="1645920"/>
-            <a:ext cx="11064240" cy="2331720"/>
-          </a:xfrm>
-          <a:prstGeom prst="roundRect">
-            <a:avLst>
-              <a:gd name="adj" fmla="val 3137"/>
-            </a:avLst>
-          </a:prstGeom>
-          <a:solidFill>
-            <a:srgbClr val="F8FAFC"/>
-          </a:solidFill>
-          <a:ln w="12700">
-            <a:solidFill>
-              <a:srgbClr val="E2E8F0"/>
-            </a:solidFill>
-            <a:prstDash val="solid"/>
-          </a:ln>
-        </p:spPr>
-        <p:txBody>
-          <a:bodyPr/>
-          <a:lstStyle/>
-          <a:p>
-            <a:endParaRPr lang="en-US"/>
-          </a:p>
-        </p:txBody>
-      </p:sp>
-      <p:sp>
-        <p:nvSpPr>
-          <p:cNvPr id="5" name="Text 3"/>
-          <p:cNvSpPr/>
-          <p:nvPr/>
-        </p:nvSpPr>
-        <p:spPr>
-          <a:xfrm>
-            <a:off x="914400" y="1828800"/>
-            <a:ext cx="3291840" cy="274320"/>
-          </a:xfrm>
-          <a:prstGeom prst="rect">
-            <a:avLst/>
-          </a:prstGeom>
-          <a:noFill/>
-          <a:ln/>
-        </p:spPr>
-        <p:txBody>
-          <a:bodyPr wrap="square" lIns="0" tIns="0" rIns="0" bIns="0" rtlCol="0" anchor="ctr"/>
-          <a:lstStyle/>
-          <a:p>
-            <a:pPr marL="0" indent="0">
-              <a:buNone/>
-            </a:pPr>
-            <a:r>
-              <a:rPr lang="en-US" sz="1100" b="1" dirty="0">
-                <a:solidFill>
-                  <a:srgbClr val="94A3B8"/>
-                </a:solidFill>
-                <a:latin typeface="Calibri" pitchFamily="34" charset="0"/>
-                <a:ea typeface="Calibri" pitchFamily="34" charset="-122"/>
-                <a:cs typeface="Calibri" pitchFamily="34" charset="-120"/>
-              </a:rPr>
-              <a:t>環節</a:t>
-            </a:r>
-            <a:endParaRPr lang="en-US" sz="1100" dirty="0"/>
-          </a:p>
-        </p:txBody>
-      </p:sp>
-      <p:sp>
-        <p:nvSpPr>
-          <p:cNvPr id="6" name="Text 4"/>
-          <p:cNvSpPr/>
-          <p:nvPr/>
-        </p:nvSpPr>
-        <p:spPr>
-          <a:xfrm>
-            <a:off x="4389120" y="1828800"/>
-            <a:ext cx="4754880" cy="274320"/>
-          </a:xfrm>
-          <a:prstGeom prst="rect">
-            <a:avLst/>
-          </a:prstGeom>
-          <a:noFill/>
-          <a:ln/>
-        </p:spPr>
-        <p:txBody>
-          <a:bodyPr wrap="square" lIns="0" tIns="0" rIns="0" bIns="0" rtlCol="0" anchor="ctr"/>
-          <a:lstStyle/>
-          <a:p>
-            <a:pPr marL="0" indent="0">
-              <a:buNone/>
-            </a:pPr>
-            <a:r>
-              <a:rPr lang="en-US" sz="1100" b="1" dirty="0">
-                <a:solidFill>
-                  <a:srgbClr val="94A3B8"/>
-                </a:solidFill>
-                <a:latin typeface="Calibri" pitchFamily="34" charset="0"/>
-                <a:ea typeface="Calibri" pitchFamily="34" charset="-122"/>
-                <a:cs typeface="Calibri" pitchFamily="34" charset="-120"/>
-              </a:rPr>
-              <a:t>認證方式</a:t>
-            </a:r>
-            <a:endParaRPr lang="en-US" sz="1100" dirty="0"/>
-          </a:p>
-        </p:txBody>
-      </p:sp>
-      <p:sp>
-        <p:nvSpPr>
-          <p:cNvPr id="7" name="Text 5"/>
-          <p:cNvSpPr/>
-          <p:nvPr/>
-        </p:nvSpPr>
-        <p:spPr>
-          <a:xfrm>
-            <a:off x="9326880" y="1828800"/>
-            <a:ext cx="2011680" cy="274320"/>
-          </a:xfrm>
-          <a:prstGeom prst="rect">
-            <a:avLst/>
-          </a:prstGeom>
-          <a:noFill/>
-          <a:ln/>
-        </p:spPr>
-        <p:txBody>
-          <a:bodyPr wrap="square" lIns="0" tIns="0" rIns="0" bIns="0" rtlCol="0" anchor="ctr"/>
-          <a:lstStyle/>
-          <a:p>
-            <a:pPr marL="0" indent="0">
-              <a:buNone/>
-            </a:pPr>
-            <a:r>
-              <a:rPr lang="en-US" sz="1100" b="1" dirty="0">
-                <a:solidFill>
-                  <a:srgbClr val="94A3B8"/>
-                </a:solidFill>
-                <a:latin typeface="Calibri" pitchFamily="34" charset="0"/>
-                <a:ea typeface="Calibri" pitchFamily="34" charset="-122"/>
-                <a:cs typeface="Calibri" pitchFamily="34" charset="-120"/>
-              </a:rPr>
-              <a:t>有效期</a:t>
-            </a:r>
-            <a:endParaRPr lang="en-US" sz="1100" dirty="0"/>
-          </a:p>
-        </p:txBody>
-      </p:sp>
-      <p:sp>
-        <p:nvSpPr>
-          <p:cNvPr id="8" name="Text 6"/>
-          <p:cNvSpPr/>
-          <p:nvPr/>
-        </p:nvSpPr>
-        <p:spPr>
-          <a:xfrm>
-            <a:off x="914400" y="2176272"/>
-            <a:ext cx="3291840" cy="320040"/>
-          </a:xfrm>
-          <a:prstGeom prst="rect">
-            <a:avLst/>
-          </a:prstGeom>
-          <a:noFill/>
-          <a:ln/>
-        </p:spPr>
-        <p:txBody>
-          <a:bodyPr wrap="square" lIns="0" tIns="0" rIns="0" bIns="0" rtlCol="0" anchor="ctr"/>
-          <a:lstStyle/>
-          <a:p>
-            <a:pPr marL="0" indent="0">
-              <a:buNone/>
-            </a:pPr>
-            <a:r>
-              <a:rPr lang="en-US" sz="1250" b="1" dirty="0">
-                <a:solidFill>
-                  <a:srgbClr val="1E293B"/>
-                </a:solidFill>
-                <a:latin typeface="Calibri" pitchFamily="34" charset="0"/>
-                <a:ea typeface="Calibri" pitchFamily="34" charset="-122"/>
-                <a:cs typeface="Calibri" pitchFamily="34" charset="-120"/>
-              </a:rPr>
-              <a:t>GitHub Actions → AWS</a:t>
-            </a:r>
-            <a:endParaRPr lang="en-US" sz="1250" dirty="0"/>
-          </a:p>
-        </p:txBody>
-      </p:sp>
-      <p:sp>
-        <p:nvSpPr>
-          <p:cNvPr id="9" name="Text 7"/>
-          <p:cNvSpPr/>
-          <p:nvPr/>
-        </p:nvSpPr>
-        <p:spPr>
-          <a:xfrm>
-            <a:off x="4389120" y="2176272"/>
-            <a:ext cx="4754880" cy="320040"/>
-          </a:xfrm>
-          <a:prstGeom prst="rect">
-            <a:avLst/>
-          </a:prstGeom>
-          <a:noFill/>
-          <a:ln/>
-        </p:spPr>
-        <p:txBody>
-          <a:bodyPr wrap="square" lIns="0" tIns="0" rIns="0" bIns="0" rtlCol="0" anchor="ctr"/>
-          <a:lstStyle/>
-          <a:p>
-            <a:pPr marL="0" indent="0">
-              <a:buNone/>
-            </a:pPr>
-            <a:r>
-              <a:rPr lang="en-US" sz="1250" dirty="0">
-                <a:solidFill>
-                  <a:srgbClr val="1E293B"/>
-                </a:solidFill>
-                <a:latin typeface="Calibri" pitchFamily="34" charset="0"/>
-                <a:ea typeface="Calibri" pitchFamily="34" charset="-122"/>
-                <a:cs typeface="Calibri" pitchFamily="34" charset="-120"/>
-              </a:rPr>
-              <a:t>OIDC 換取臨時憑證</a:t>
-            </a:r>
-            <a:endParaRPr lang="en-US" sz="1250" dirty="0"/>
-          </a:p>
-        </p:txBody>
-      </p:sp>
-      <p:sp>
-        <p:nvSpPr>
-          <p:cNvPr id="10" name="Text 8"/>
-          <p:cNvSpPr/>
-          <p:nvPr/>
-        </p:nvSpPr>
-        <p:spPr>
-          <a:xfrm>
-            <a:off x="9326880" y="2176272"/>
-            <a:ext cx="2011680" cy="320040"/>
-          </a:xfrm>
-          <a:prstGeom prst="rect">
-            <a:avLst/>
-          </a:prstGeom>
-          <a:noFill/>
-          <a:ln/>
-        </p:spPr>
-        <p:txBody>
-          <a:bodyPr wrap="square" lIns="0" tIns="0" rIns="0" bIns="0" rtlCol="0" anchor="ctr"/>
-          <a:lstStyle/>
-          <a:p>
-            <a:pPr marL="0" indent="0">
-              <a:buNone/>
-            </a:pPr>
-            <a:r>
-              <a:rPr lang="en-US" sz="1250" b="1" dirty="0">
-                <a:solidFill>
-                  <a:srgbClr val="38BDF8"/>
-                </a:solidFill>
-                <a:latin typeface="Calibri" pitchFamily="34" charset="0"/>
-                <a:ea typeface="Calibri" pitchFamily="34" charset="-122"/>
-                <a:cs typeface="Calibri" pitchFamily="34" charset="-120"/>
-              </a:rPr>
-              <a:t>1 小時</a:t>
-            </a:r>
-            <a:endParaRPr lang="en-US" sz="1250" dirty="0"/>
-          </a:p>
-        </p:txBody>
-      </p:sp>
-      <p:sp>
-        <p:nvSpPr>
-          <p:cNvPr id="11" name="Text 9"/>
-          <p:cNvSpPr/>
-          <p:nvPr/>
-        </p:nvSpPr>
-        <p:spPr>
-          <a:xfrm>
-            <a:off x="914400" y="2606040"/>
-            <a:ext cx="3291840" cy="320040"/>
-          </a:xfrm>
-          <a:prstGeom prst="rect">
-            <a:avLst/>
-          </a:prstGeom>
-          <a:noFill/>
-          <a:ln/>
-        </p:spPr>
-        <p:txBody>
-          <a:bodyPr wrap="square" lIns="0" tIns="0" rIns="0" bIns="0" rtlCol="0" anchor="ctr"/>
-          <a:lstStyle/>
-          <a:p>
-            <a:pPr marL="0" indent="0">
-              <a:buNone/>
-            </a:pPr>
-            <a:r>
-              <a:rPr lang="en-US" sz="1250" b="1" dirty="0">
-                <a:solidFill>
-                  <a:srgbClr val="1E293B"/>
-                </a:solidFill>
-                <a:latin typeface="Calibri" pitchFamily="34" charset="0"/>
-                <a:ea typeface="Calibri" pitchFamily="34" charset="-122"/>
-                <a:cs typeface="Calibri" pitchFamily="34" charset="-120"/>
-              </a:rPr>
-              <a:t>Actions → ECR</a:t>
-            </a:r>
-            <a:endParaRPr lang="en-US" sz="1250" dirty="0"/>
-          </a:p>
-        </p:txBody>
-      </p:sp>
-      <p:sp>
-        <p:nvSpPr>
-          <p:cNvPr id="12" name="Text 10"/>
-          <p:cNvSpPr/>
-          <p:nvPr/>
-        </p:nvSpPr>
-        <p:spPr>
-          <a:xfrm>
-            <a:off x="4389120" y="2606040"/>
-            <a:ext cx="4754880" cy="320040"/>
-          </a:xfrm>
-          <a:prstGeom prst="rect">
-            <a:avLst/>
-          </a:prstGeom>
-          <a:noFill/>
-          <a:ln/>
-        </p:spPr>
-        <p:txBody>
-          <a:bodyPr wrap="square" lIns="0" tIns="0" rIns="0" bIns="0" rtlCol="0" anchor="ctr"/>
-          <a:lstStyle/>
-          <a:p>
-            <a:pPr marL="0" indent="0">
-              <a:buNone/>
-            </a:pPr>
-            <a:r>
-              <a:rPr lang="en-US" sz="1250" dirty="0">
-                <a:solidFill>
-                  <a:srgbClr val="1E293B"/>
-                </a:solidFill>
-                <a:latin typeface="Calibri" pitchFamily="34" charset="0"/>
-                <a:ea typeface="Calibri" pitchFamily="34" charset="-122"/>
-                <a:cs typeface="Calibri" pitchFamily="34" charset="-120"/>
-              </a:rPr>
-              <a:t>以臨時憑證換取推送權杖</a:t>
-            </a:r>
-            <a:endParaRPr lang="en-US" sz="1250" dirty="0"/>
-          </a:p>
-        </p:txBody>
-      </p:sp>
-      <p:sp>
-        <p:nvSpPr>
-          <p:cNvPr id="13" name="Text 11"/>
-          <p:cNvSpPr/>
-          <p:nvPr/>
-        </p:nvSpPr>
-        <p:spPr>
-          <a:xfrm>
-            <a:off x="9326880" y="2606040"/>
-            <a:ext cx="2011680" cy="320040"/>
-          </a:xfrm>
-          <a:prstGeom prst="rect">
-            <a:avLst/>
-          </a:prstGeom>
-          <a:noFill/>
-          <a:ln/>
-        </p:spPr>
-        <p:txBody>
-          <a:bodyPr wrap="square" lIns="0" tIns="0" rIns="0" bIns="0" rtlCol="0" anchor="ctr"/>
-          <a:lstStyle/>
-          <a:p>
-            <a:pPr marL="0" indent="0">
-              <a:buNone/>
-            </a:pPr>
-            <a:r>
-              <a:rPr lang="en-US" sz="1250" b="1" dirty="0">
-                <a:solidFill>
-                  <a:srgbClr val="38BDF8"/>
-                </a:solidFill>
-                <a:latin typeface="Calibri" pitchFamily="34" charset="0"/>
-                <a:ea typeface="Calibri" pitchFamily="34" charset="-122"/>
-                <a:cs typeface="Calibri" pitchFamily="34" charset="-120"/>
-              </a:rPr>
-              <a:t>12 小時</a:t>
-            </a:r>
-            <a:endParaRPr lang="en-US" sz="1250" dirty="0"/>
-          </a:p>
-        </p:txBody>
-      </p:sp>
-      <p:sp>
-        <p:nvSpPr>
-          <p:cNvPr id="14" name="Text 12"/>
-          <p:cNvSpPr/>
-          <p:nvPr/>
-        </p:nvSpPr>
-        <p:spPr>
-          <a:xfrm>
-            <a:off x="914400" y="3035808"/>
-            <a:ext cx="3291840" cy="320040"/>
-          </a:xfrm>
-          <a:prstGeom prst="rect">
-            <a:avLst/>
-          </a:prstGeom>
-          <a:noFill/>
-          <a:ln/>
-        </p:spPr>
-        <p:txBody>
-          <a:bodyPr wrap="square" lIns="0" tIns="0" rIns="0" bIns="0" rtlCol="0" anchor="ctr"/>
-          <a:lstStyle/>
-          <a:p>
-            <a:pPr marL="0" indent="0">
-              <a:buNone/>
-            </a:pPr>
-            <a:r>
-              <a:rPr lang="en-US" sz="1250" b="1" dirty="0">
-                <a:solidFill>
-                  <a:srgbClr val="1E293B"/>
-                </a:solidFill>
-                <a:latin typeface="Calibri" pitchFamily="34" charset="0"/>
-                <a:ea typeface="Calibri" pitchFamily="34" charset="-122"/>
-                <a:cs typeface="Calibri" pitchFamily="34" charset="-120"/>
-              </a:rPr>
-              <a:t>Actions → EC2</a:t>
-            </a:r>
-            <a:endParaRPr lang="en-US" sz="1250" dirty="0"/>
-          </a:p>
-        </p:txBody>
-      </p:sp>
-      <p:sp>
-        <p:nvSpPr>
-          <p:cNvPr id="15" name="Text 13"/>
-          <p:cNvSpPr/>
-          <p:nvPr/>
-        </p:nvSpPr>
-        <p:spPr>
-          <a:xfrm>
-            <a:off x="4389120" y="3035808"/>
-            <a:ext cx="4754880" cy="320040"/>
-          </a:xfrm>
-          <a:prstGeom prst="rect">
-            <a:avLst/>
-          </a:prstGeom>
-          <a:noFill/>
-          <a:ln/>
-        </p:spPr>
-        <p:txBody>
-          <a:bodyPr wrap="square" lIns="0" tIns="0" rIns="0" bIns="0" rtlCol="0" anchor="ctr"/>
-          <a:lstStyle/>
-          <a:p>
-            <a:pPr marL="0" indent="0">
-              <a:buNone/>
-            </a:pPr>
-            <a:r>
-              <a:rPr lang="en-US" sz="1250" dirty="0">
-                <a:solidFill>
-                  <a:srgbClr val="1E293B"/>
-                </a:solidFill>
-                <a:latin typeface="Calibri" pitchFamily="34" charset="0"/>
-                <a:ea typeface="Calibri" pitchFamily="34" charset="-122"/>
-                <a:cs typeface="Calibri" pitchFamily="34" charset="-120"/>
-              </a:rPr>
-              <a:t>SSM Run Command（不經 SSH）</a:t>
-            </a:r>
-            <a:endParaRPr lang="en-US" sz="1250" dirty="0"/>
-          </a:p>
-        </p:txBody>
-      </p:sp>
-      <p:sp>
-        <p:nvSpPr>
-          <p:cNvPr id="16" name="Text 14"/>
-          <p:cNvSpPr/>
-          <p:nvPr/>
-        </p:nvSpPr>
-        <p:spPr>
-          <a:xfrm>
-            <a:off x="9326880" y="3035808"/>
-            <a:ext cx="2011680" cy="320040"/>
-          </a:xfrm>
-          <a:prstGeom prst="rect">
-            <a:avLst/>
-          </a:prstGeom>
-          <a:noFill/>
-          <a:ln/>
-        </p:spPr>
-        <p:txBody>
-          <a:bodyPr wrap="square" lIns="0" tIns="0" rIns="0" bIns="0" rtlCol="0" anchor="ctr"/>
-          <a:lstStyle/>
-          <a:p>
-            <a:pPr marL="0" indent="0">
-              <a:buNone/>
-            </a:pPr>
-            <a:r>
-              <a:rPr lang="en-US" sz="1250" b="1" dirty="0">
-                <a:solidFill>
-                  <a:srgbClr val="38BDF8"/>
-                </a:solidFill>
-                <a:latin typeface="Calibri" pitchFamily="34" charset="0"/>
-                <a:ea typeface="Calibri" pitchFamily="34" charset="-122"/>
-                <a:cs typeface="Calibri" pitchFamily="34" charset="-120"/>
-              </a:rPr>
-              <a:t>單次</a:t>
-            </a:r>
-            <a:endParaRPr lang="en-US" sz="1250" dirty="0"/>
-          </a:p>
-        </p:txBody>
-      </p:sp>
-      <p:sp>
-        <p:nvSpPr>
-          <p:cNvPr id="17" name="Text 15"/>
-          <p:cNvSpPr/>
-          <p:nvPr/>
-        </p:nvSpPr>
-        <p:spPr>
-          <a:xfrm>
-            <a:off x="914400" y="3465576"/>
-            <a:ext cx="3291840" cy="320040"/>
-          </a:xfrm>
-          <a:prstGeom prst="rect">
-            <a:avLst/>
-          </a:prstGeom>
-          <a:noFill/>
-          <a:ln/>
-        </p:spPr>
-        <p:txBody>
-          <a:bodyPr wrap="square" lIns="0" tIns="0" rIns="0" bIns="0" rtlCol="0" anchor="ctr"/>
-          <a:lstStyle/>
-          <a:p>
-            <a:pPr marL="0" indent="0">
-              <a:buNone/>
-            </a:pPr>
-            <a:r>
-              <a:rPr lang="en-US" sz="1250" b="1" dirty="0">
-                <a:solidFill>
-                  <a:srgbClr val="1E293B"/>
-                </a:solidFill>
-                <a:latin typeface="Calibri" pitchFamily="34" charset="0"/>
-                <a:ea typeface="Calibri" pitchFamily="34" charset="-122"/>
-                <a:cs typeface="Calibri" pitchFamily="34" charset="-120"/>
-              </a:rPr>
-              <a:t>EC2 → ECR</a:t>
-            </a:r>
-            <a:endParaRPr lang="en-US" sz="1250" dirty="0"/>
-          </a:p>
-        </p:txBody>
-      </p:sp>
-      <p:sp>
-        <p:nvSpPr>
-          <p:cNvPr id="18" name="Text 16"/>
-          <p:cNvSpPr/>
-          <p:nvPr/>
-        </p:nvSpPr>
-        <p:spPr>
-          <a:xfrm>
-            <a:off x="4389120" y="3465576"/>
-            <a:ext cx="4754880" cy="320040"/>
-          </a:xfrm>
-          <a:prstGeom prst="rect">
-            <a:avLst/>
-          </a:prstGeom>
-          <a:noFill/>
-          <a:ln/>
-        </p:spPr>
-        <p:txBody>
-          <a:bodyPr wrap="square" lIns="0" tIns="0" rIns="0" bIns="0" rtlCol="0" anchor="ctr"/>
-          <a:lstStyle/>
-          <a:p>
-            <a:pPr marL="0" indent="0">
-              <a:buNone/>
-            </a:pPr>
-            <a:r>
-              <a:rPr lang="en-US" sz="1250" dirty="0">
-                <a:solidFill>
-                  <a:srgbClr val="1E293B"/>
-                </a:solidFill>
-                <a:latin typeface="Calibri" pitchFamily="34" charset="0"/>
-                <a:ea typeface="Calibri" pitchFamily="34" charset="-122"/>
-                <a:cs typeface="Calibri" pitchFamily="34" charset="-120"/>
-              </a:rPr>
-              <a:t>EC2 IAM Role 換取權杖</a:t>
-            </a:r>
-            <a:endParaRPr lang="en-US" sz="1250" dirty="0"/>
-          </a:p>
-        </p:txBody>
-      </p:sp>
-      <p:sp>
-        <p:nvSpPr>
-          <p:cNvPr id="19" name="Text 17"/>
-          <p:cNvSpPr/>
-          <p:nvPr/>
-        </p:nvSpPr>
-        <p:spPr>
-          <a:xfrm>
-            <a:off x="9326880" y="3465576"/>
-            <a:ext cx="2011680" cy="320040"/>
-          </a:xfrm>
-          <a:prstGeom prst="rect">
-            <a:avLst/>
-          </a:prstGeom>
-          <a:noFill/>
-          <a:ln/>
-        </p:spPr>
-        <p:txBody>
-          <a:bodyPr wrap="square" lIns="0" tIns="0" rIns="0" bIns="0" rtlCol="0" anchor="ctr"/>
-          <a:lstStyle/>
-          <a:p>
-            <a:pPr marL="0" indent="0">
-              <a:buNone/>
-            </a:pPr>
-            <a:r>
-              <a:rPr lang="en-US" sz="1250" b="1" dirty="0">
-                <a:solidFill>
-                  <a:srgbClr val="38BDF8"/>
-                </a:solidFill>
-                <a:latin typeface="Calibri" pitchFamily="34" charset="0"/>
-                <a:ea typeface="Calibri" pitchFamily="34" charset="-122"/>
-                <a:cs typeface="Calibri" pitchFamily="34" charset="-120"/>
-              </a:rPr>
-              <a:t>12 小時</a:t>
-            </a:r>
-            <a:endParaRPr lang="en-US" sz="1250" dirty="0"/>
-          </a:p>
-        </p:txBody>
-      </p:sp>
-      <p:sp>
-        <p:nvSpPr>
-          <p:cNvPr id="20" name="Shape 18"/>
-          <p:cNvSpPr/>
-          <p:nvPr/>
-        </p:nvSpPr>
-        <p:spPr>
-          <a:xfrm>
-            <a:off x="548640" y="4206240"/>
-            <a:ext cx="11064240" cy="1965960"/>
-          </a:xfrm>
-          <a:prstGeom prst="roundRect">
-            <a:avLst>
-              <a:gd name="adj" fmla="val 3721"/>
-            </a:avLst>
-          </a:prstGeom>
-          <a:solidFill>
-            <a:srgbClr val="F0F9FF"/>
-          </a:solidFill>
-          <a:ln w="12700">
-            <a:solidFill>
-              <a:srgbClr val="E2E8F0"/>
-            </a:solidFill>
-            <a:prstDash val="solid"/>
-          </a:ln>
-        </p:spPr>
-        <p:txBody>
-          <a:bodyPr/>
-          <a:lstStyle/>
-          <a:p>
-            <a:endParaRPr lang="en-US"/>
-          </a:p>
-        </p:txBody>
-      </p:sp>
-      <p:sp>
-        <p:nvSpPr>
-          <p:cNvPr id="21" name="Text 19"/>
-          <p:cNvSpPr/>
-          <p:nvPr/>
-        </p:nvSpPr>
-        <p:spPr>
-          <a:xfrm>
-            <a:off x="914400" y="4389120"/>
-            <a:ext cx="10332720" cy="274320"/>
-          </a:xfrm>
-          <a:prstGeom prst="rect">
-            <a:avLst/>
-          </a:prstGeom>
-          <a:noFill/>
-          <a:ln/>
-        </p:spPr>
-        <p:txBody>
-          <a:bodyPr wrap="square" lIns="0" tIns="0" rIns="0" bIns="0" rtlCol="0" anchor="ctr"/>
-          <a:lstStyle/>
-          <a:p>
-            <a:pPr marL="0" indent="0">
-              <a:buNone/>
-            </a:pPr>
-            <a:r>
-              <a:rPr lang="en-US" sz="1400" b="1" dirty="0">
-                <a:solidFill>
-                  <a:srgbClr val="0369A1"/>
-                </a:solidFill>
-                <a:latin typeface="Calibri" pitchFamily="34" charset="0"/>
-                <a:ea typeface="Calibri" pitchFamily="34" charset="-122"/>
-                <a:cs typeface="Calibri" pitchFamily="34" charset="-120"/>
-              </a:rPr>
-              <a:t>其他措施</a:t>
-            </a:r>
-            <a:endParaRPr lang="en-US" sz="1400" dirty="0"/>
-          </a:p>
-        </p:txBody>
-      </p:sp>
-      <p:sp>
-        <p:nvSpPr>
-          <p:cNvPr id="22" name="Text 20"/>
-          <p:cNvSpPr/>
-          <p:nvPr/>
-        </p:nvSpPr>
-        <p:spPr>
-          <a:xfrm>
-            <a:off x="914400" y="4736592"/>
-            <a:ext cx="10332720" cy="1280160"/>
-          </a:xfrm>
-          <a:prstGeom prst="rect">
-            <a:avLst/>
-          </a:prstGeom>
-          <a:noFill/>
-          <a:ln/>
-        </p:spPr>
-        <p:txBody>
-          <a:bodyPr wrap="square" lIns="0" tIns="0" rIns="0" bIns="0" rtlCol="0" anchor="ctr"/>
-          <a:lstStyle/>
-          <a:p>
-            <a:pPr marL="342900" indent="-342900">
-              <a:lnSpc>
-                <a:spcPts val="1800"/>
-              </a:lnSpc>
-              <a:spcAft>
-                <a:spcPts val="600"/>
-              </a:spcAft>
-              <a:buSzPct val="100000"/>
-              <a:buChar char="•"/>
-            </a:pPr>
-            <a:r>
-              <a:rPr lang="en-US" sz="1250" dirty="0">
-                <a:solidFill>
-                  <a:srgbClr val="1E293B"/>
-                </a:solidFill>
-                <a:latin typeface="Calibri" pitchFamily="34" charset="0"/>
-                <a:ea typeface="Calibri" pitchFamily="34" charset="-122"/>
-                <a:cs typeface="Calibri" pitchFamily="34" charset="-120"/>
-              </a:rPr>
-              <a:t>不開 22 port，且主機內 sshd 已停用（縱深防禦，不依賴單一控制點）</a:t>
-            </a:r>
-            <a:endParaRPr lang="en-US" sz="1250" dirty="0"/>
-          </a:p>
-          <a:p>
-            <a:pPr marL="342900" indent="-342900">
-              <a:lnSpc>
-                <a:spcPts val="1800"/>
-              </a:lnSpc>
-              <a:spcAft>
-                <a:spcPts val="600"/>
-              </a:spcAft>
-              <a:buSzPct val="100000"/>
-              <a:buChar char="•"/>
-            </a:pPr>
-            <a:r>
-              <a:rPr lang="en-US" sz="1250" dirty="0">
-                <a:solidFill>
-                  <a:srgbClr val="1E293B"/>
-                </a:solidFill>
-                <a:latin typeface="Calibri" pitchFamily="34" charset="0"/>
-                <a:ea typeface="Calibri" pitchFamily="34" charset="-122"/>
-                <a:cs typeface="Calibri" pitchFamily="34" charset="-120"/>
-              </a:rPr>
-              <a:t>容器以非 root 使用者執行；ECR 私有倉庫並啟用推送掃描，實際掃出 CRITICAL 4 / HIGH 8</a:t>
-            </a:r>
-            <a:endParaRPr lang="en-US" sz="1250" dirty="0"/>
-          </a:p>
-          <a:p>
-            <a:pPr marL="342900" indent="-342900">
-              <a:lnSpc>
-                <a:spcPts val="1800"/>
-              </a:lnSpc>
-              <a:spcAft>
-                <a:spcPts val="600"/>
-              </a:spcAft>
-              <a:buSzPct val="100000"/>
-              <a:buChar char="•"/>
-            </a:pPr>
-            <a:r>
-              <a:rPr lang="en-US" sz="1250" dirty="0">
-                <a:solidFill>
-                  <a:srgbClr val="1E293B"/>
-                </a:solidFill>
-                <a:latin typeface="Calibri" pitchFamily="34" charset="0"/>
-                <a:ea typeface="Calibri" pitchFamily="34" charset="-122"/>
-                <a:cs typeface="Calibri" pitchFamily="34" charset="-120"/>
-              </a:rPr>
-              <a:t>IAM 權限精確到單一資源：只能推特定倉庫、只能對特定主機下指令、只能更新特定服務</a:t>
-            </a:r>
-            <a:endParaRPr lang="en-US" sz="1250" dirty="0"/>
-          </a:p>
-          <a:p>
-            <a:pPr marL="342900" indent="-342900">
-              <a:lnSpc>
-                <a:spcPts val="1800"/>
-              </a:lnSpc>
-              <a:spcAft>
-                <a:spcPts val="600"/>
-              </a:spcAft>
-              <a:buSzPct val="100000"/>
-              <a:buChar char="•"/>
-            </a:pPr>
-            <a:r>
-              <a:rPr lang="en-US" sz="1250" dirty="0">
-                <a:solidFill>
-                  <a:srgbClr val="1E293B"/>
-                </a:solidFill>
-                <a:latin typeface="Calibri" pitchFamily="34" charset="0"/>
-                <a:ea typeface="Calibri" pitchFamily="34" charset="-122"/>
-                <a:cs typeface="Calibri" pitchFamily="34" charset="-120"/>
-              </a:rPr>
-              <a:t>私有子網使用獨立路由表且無對外路由——「出不去」由路由層保證，非倚賴防火牆規則</a:t>
-            </a:r>
-            <a:endParaRPr lang="en-US" sz="1250" dirty="0"/>
-          </a:p>
-        </p:txBody>
-      </p:sp>
-    </p:spTree>
-  </p:cSld>
-  <p:clrMapOvr>
-    <a:masterClrMapping/>
-  </p:clrMapOvr>
-</p:sld>
-</file>
-
-<file path=ppt/slides/slide11.xml><?xml version="1.0" encoding="utf-8"?>
-<p:sld xmlns:a="http://schemas.openxmlformats.org/drawingml/2006/main" xmlns:r="http://schemas.openxmlformats.org/officeDocument/2006/relationships" xmlns:p="http://schemas.openxmlformats.org/presentationml/2006/main">
-  <p:cSld name="Slide 11">
-    <p:bg>
-      <p:bgPr>
-        <a:solidFill>
-          <a:srgbClr val="FFFFFF"/>
-        </a:solidFill>
-        <a:effectLst/>
-      </p:bgPr>
-    </p:bg>
-    <p:spTree>
-      <p:nvGrpSpPr>
-        <p:cNvPr id="1" name=""/>
-        <p:cNvGrpSpPr/>
-        <p:nvPr/>
-      </p:nvGrpSpPr>
-      <p:grpSpPr>
-        <a:xfrm>
-          <a:off x="0" y="0"/>
-          <a:ext cx="0" cy="0"/>
-          <a:chOff x="0" y="0"/>
-          <a:chExt cx="0" cy="0"/>
-        </a:xfrm>
-      </p:grpSpPr>
-      <p:sp>
-        <p:nvSpPr>
-          <p:cNvPr id="2" name="Text 0"/>
-          <p:cNvSpPr/>
-          <p:nvPr/>
-        </p:nvSpPr>
-        <p:spPr>
-          <a:xfrm>
-            <a:off x="548640" y="384048"/>
-            <a:ext cx="7315200" cy="274320"/>
-          </a:xfrm>
-          <a:prstGeom prst="rect">
-            <a:avLst/>
-          </a:prstGeom>
-          <a:noFill/>
-          <a:ln/>
-        </p:spPr>
-        <p:txBody>
-          <a:bodyPr wrap="square" lIns="0" tIns="0" rIns="0" bIns="0" rtlCol="0" anchor="ctr"/>
-          <a:lstStyle/>
-          <a:p>
-            <a:pPr marL="0" indent="0">
-              <a:buNone/>
-            </a:pPr>
-            <a:r>
-              <a:rPr lang="en-US" sz="1200" b="1" kern="0" spc="150" dirty="0">
-                <a:solidFill>
-                  <a:srgbClr val="38BDF8"/>
-                </a:solidFill>
-                <a:latin typeface="Calibri" pitchFamily="34" charset="0"/>
-                <a:ea typeface="Calibri" pitchFamily="34" charset="-122"/>
-                <a:cs typeface="Calibri" pitchFamily="34" charset="-120"/>
-              </a:rPr>
-              <a:t>問題排除</a:t>
-            </a:r>
-            <a:endParaRPr lang="en-US" sz="1200" dirty="0"/>
-          </a:p>
-        </p:txBody>
-      </p:sp>
-      <p:sp>
-        <p:nvSpPr>
-          <p:cNvPr id="3" name="Text 1"/>
-          <p:cNvSpPr/>
-          <p:nvPr/>
-        </p:nvSpPr>
-        <p:spPr>
-          <a:xfrm>
-            <a:off x="548640" y="658368"/>
-            <a:ext cx="11064240" cy="640080"/>
-          </a:xfrm>
-          <a:prstGeom prst="rect">
-            <a:avLst/>
-          </a:prstGeom>
-          <a:noFill/>
-          <a:ln/>
-        </p:spPr>
-        <p:txBody>
-          <a:bodyPr wrap="square" lIns="0" tIns="0" rIns="0" bIns="0" rtlCol="0" anchor="ctr"/>
-          <a:lstStyle/>
-          <a:p>
-            <a:pPr marL="0" indent="0">
-              <a:buNone/>
-            </a:pPr>
-            <a:r>
-              <a:rPr lang="en-US" sz="3400" b="1" dirty="0">
-                <a:solidFill>
-                  <a:srgbClr val="1E293B"/>
-                </a:solidFill>
-                <a:latin typeface="Calibri" pitchFamily="34" charset="0"/>
-                <a:ea typeface="Calibri" pitchFamily="34" charset="-122"/>
-                <a:cs typeface="Calibri" pitchFamily="34" charset="-120"/>
-              </a:rPr>
-              <a:t>最難的一關：一句話的錯誤訊息，卡了 6 次執行</a:t>
-            </a:r>
-            <a:endParaRPr lang="en-US" sz="3400" dirty="0"/>
-          </a:p>
-        </p:txBody>
-      </p:sp>
-      <p:sp>
-        <p:nvSpPr>
-          <p:cNvPr id="4" name="Shape 2"/>
-          <p:cNvSpPr/>
-          <p:nvPr/>
-        </p:nvSpPr>
-        <p:spPr>
-          <a:xfrm>
-            <a:off x="548640" y="1600200"/>
-            <a:ext cx="11064240" cy="777240"/>
-          </a:xfrm>
-          <a:prstGeom prst="roundRect">
-            <a:avLst>
-              <a:gd name="adj" fmla="val 9412"/>
-            </a:avLst>
-          </a:prstGeom>
-          <a:solidFill>
-            <a:srgbClr val="FEF2F2"/>
-          </a:solidFill>
-          <a:ln w="12700">
-            <a:solidFill>
-              <a:srgbClr val="E2E8F0"/>
-            </a:solidFill>
-            <a:prstDash val="solid"/>
-          </a:ln>
-        </p:spPr>
-        <p:txBody>
-          <a:bodyPr/>
-          <a:lstStyle/>
-          <a:p>
-            <a:endParaRPr lang="en-US"/>
-          </a:p>
-        </p:txBody>
-      </p:sp>
-      <p:sp>
-        <p:nvSpPr>
-          <p:cNvPr id="5" name="Text 3"/>
-          <p:cNvSpPr/>
-          <p:nvPr/>
-        </p:nvSpPr>
-        <p:spPr>
-          <a:xfrm>
-            <a:off x="914400" y="1810512"/>
-            <a:ext cx="10332720" cy="365760"/>
-          </a:xfrm>
-          <a:prstGeom prst="rect">
-            <a:avLst/>
-          </a:prstGeom>
-          <a:noFill/>
-          <a:ln/>
-        </p:spPr>
-        <p:txBody>
-          <a:bodyPr wrap="square" lIns="0" tIns="0" rIns="0" bIns="0" rtlCol="0" anchor="ctr"/>
-          <a:lstStyle/>
-          <a:p>
-            <a:pPr marL="0" indent="0">
-              <a:buNone/>
-            </a:pPr>
-            <a:r>
-              <a:rPr lang="en-US" sz="1400" b="1" dirty="0">
-                <a:solidFill>
-                  <a:srgbClr val="991B1B"/>
-                </a:solidFill>
-                <a:latin typeface="Calibri" pitchFamily="34" charset="0"/>
-                <a:ea typeface="Calibri" pitchFamily="34" charset="-122"/>
-                <a:cs typeface="Calibri" pitchFamily="34" charset="-120"/>
-              </a:rPr>
-              <a:t>Error: Could not assume role with OIDC: Not authorized to perform sts:AssumeRoleWithWebIdentity</a:t>
-            </a:r>
-            <a:endParaRPr lang="en-US" sz="1400" dirty="0"/>
-          </a:p>
-        </p:txBody>
-      </p:sp>
-      <p:sp>
-        <p:nvSpPr>
-          <p:cNvPr id="6" name="Text 4"/>
-          <p:cNvSpPr/>
-          <p:nvPr/>
-        </p:nvSpPr>
-        <p:spPr>
-          <a:xfrm>
-            <a:off x="822960" y="2560320"/>
-            <a:ext cx="1097280" cy="292608"/>
-          </a:xfrm>
-          <a:prstGeom prst="rect">
-            <a:avLst/>
-          </a:prstGeom>
-          <a:noFill/>
-          <a:ln/>
-        </p:spPr>
-        <p:txBody>
-          <a:bodyPr wrap="square" lIns="0" tIns="0" rIns="0" bIns="0" rtlCol="0" anchor="ctr"/>
-          <a:lstStyle/>
-          <a:p>
-            <a:pPr marL="0" indent="0">
-              <a:buNone/>
-            </a:pPr>
-            <a:r>
-              <a:rPr lang="en-US" sz="1200" b="1" dirty="0">
-                <a:solidFill>
-                  <a:srgbClr val="94A3B8"/>
-                </a:solidFill>
-                <a:latin typeface="Calibri" pitchFamily="34" charset="0"/>
-                <a:ea typeface="Calibri" pitchFamily="34" charset="-122"/>
-                <a:cs typeface="Calibri" pitchFamily="34" charset="-120"/>
-              </a:rPr>
-              <a:t>第 1 次</a:t>
-            </a:r>
-            <a:endParaRPr lang="en-US" sz="1200" dirty="0"/>
-          </a:p>
-        </p:txBody>
-      </p:sp>
-      <p:sp>
-        <p:nvSpPr>
-          <p:cNvPr id="7" name="Text 5"/>
-          <p:cNvSpPr/>
-          <p:nvPr/>
-        </p:nvSpPr>
-        <p:spPr>
-          <a:xfrm>
-            <a:off x="2011680" y="2560320"/>
-            <a:ext cx="6583680" cy="292608"/>
-          </a:xfrm>
-          <a:prstGeom prst="rect">
-            <a:avLst/>
-          </a:prstGeom>
-          <a:noFill/>
-          <a:ln/>
-        </p:spPr>
-        <p:txBody>
-          <a:bodyPr wrap="square" lIns="0" tIns="0" rIns="0" bIns="0" rtlCol="0" anchor="ctr"/>
-          <a:lstStyle/>
-          <a:p>
-            <a:pPr marL="0" indent="0">
-              <a:buNone/>
-            </a:pPr>
-            <a:r>
-              <a:rPr lang="en-US" sz="1250" dirty="0">
-                <a:solidFill>
-                  <a:srgbClr val="1E293B"/>
-                </a:solidFill>
-                <a:latin typeface="Calibri" pitchFamily="34" charset="0"/>
-                <a:ea typeface="Calibri" pitchFamily="34" charset="-122"/>
-                <a:cs typeface="Calibri" pitchFamily="34" charset="-120"/>
-              </a:rPr>
-              <a:t>首次執行</a:t>
-            </a:r>
-            <a:endParaRPr lang="en-US" sz="1250" dirty="0"/>
-          </a:p>
-        </p:txBody>
-      </p:sp>
-      <p:sp>
-        <p:nvSpPr>
-          <p:cNvPr id="8" name="Text 6"/>
-          <p:cNvSpPr/>
-          <p:nvPr/>
-        </p:nvSpPr>
-        <p:spPr>
-          <a:xfrm>
-            <a:off x="8778240" y="2560320"/>
-            <a:ext cx="2743200" cy="292608"/>
-          </a:xfrm>
-          <a:prstGeom prst="rect">
-            <a:avLst/>
-          </a:prstGeom>
-          <a:noFill/>
-          <a:ln/>
-        </p:spPr>
-        <p:txBody>
-          <a:bodyPr wrap="square" lIns="0" tIns="0" rIns="0" bIns="0" rtlCol="0" anchor="ctr"/>
-          <a:lstStyle/>
-          <a:p>
-            <a:pPr marL="0" indent="0">
-              <a:buNone/>
-            </a:pPr>
-            <a:r>
-              <a:rPr lang="en-US" sz="1200" b="1" dirty="0">
-                <a:solidFill>
-                  <a:srgbClr val="EF4444"/>
-                </a:solidFill>
-                <a:latin typeface="Calibri" pitchFamily="34" charset="0"/>
-                <a:ea typeface="Calibri" pitchFamily="34" charset="-122"/>
-                <a:cs typeface="Calibri" pitchFamily="34" charset="-120"/>
-              </a:rPr>
-              <a:t>❌</a:t>
-            </a:r>
-            <a:endParaRPr lang="en-US" sz="1200" dirty="0"/>
-          </a:p>
-        </p:txBody>
-      </p:sp>
-      <p:sp>
-        <p:nvSpPr>
-          <p:cNvPr id="9" name="Text 7"/>
-          <p:cNvSpPr/>
-          <p:nvPr/>
-        </p:nvSpPr>
-        <p:spPr>
-          <a:xfrm>
-            <a:off x="822960" y="2962656"/>
-            <a:ext cx="1097280" cy="292608"/>
-          </a:xfrm>
-          <a:prstGeom prst="rect">
-            <a:avLst/>
-          </a:prstGeom>
-          <a:noFill/>
-          <a:ln/>
-        </p:spPr>
-        <p:txBody>
-          <a:bodyPr wrap="square" lIns="0" tIns="0" rIns="0" bIns="0" rtlCol="0" anchor="ctr"/>
-          <a:lstStyle/>
-          <a:p>
-            <a:pPr marL="0" indent="0">
-              <a:buNone/>
-            </a:pPr>
-            <a:r>
-              <a:rPr lang="en-US" sz="1200" b="1" dirty="0">
-                <a:solidFill>
-                  <a:srgbClr val="94A3B8"/>
-                </a:solidFill>
-                <a:latin typeface="Calibri" pitchFamily="34" charset="0"/>
-                <a:ea typeface="Calibri" pitchFamily="34" charset="-122"/>
-                <a:cs typeface="Calibri" pitchFamily="34" charset="-120"/>
-              </a:rPr>
-              <a:t>第 2 次</a:t>
-            </a:r>
-            <a:endParaRPr lang="en-US" sz="1200" dirty="0"/>
-          </a:p>
-        </p:txBody>
-      </p:sp>
-      <p:sp>
-        <p:nvSpPr>
-          <p:cNvPr id="10" name="Text 8"/>
-          <p:cNvSpPr/>
-          <p:nvPr/>
-        </p:nvSpPr>
-        <p:spPr>
-          <a:xfrm>
-            <a:off x="2011680" y="2962656"/>
-            <a:ext cx="6583680" cy="292608"/>
-          </a:xfrm>
-          <a:prstGeom prst="rect">
-            <a:avLst/>
-          </a:prstGeom>
-          <a:noFill/>
-          <a:ln/>
-        </p:spPr>
-        <p:txBody>
-          <a:bodyPr wrap="square" lIns="0" tIns="0" rIns="0" bIns="0" rtlCol="0" anchor="ctr"/>
-          <a:lstStyle/>
-          <a:p>
-            <a:pPr marL="0" indent="0">
-              <a:buNone/>
-            </a:pPr>
-            <a:r>
-              <a:rPr lang="en-US" sz="1250" dirty="0">
-                <a:solidFill>
-                  <a:srgbClr val="1E293B"/>
-                </a:solidFill>
-                <a:latin typeface="Calibri" pitchFamily="34" charset="0"/>
-                <a:ea typeface="Calibri" pitchFamily="34" charset="-122"/>
-                <a:cs typeface="Calibri" pitchFamily="34" charset="-120"/>
-              </a:rPr>
-              <a:t>推測①：IAM 傳播延遲</a:t>
-            </a:r>
-            <a:endParaRPr lang="en-US" sz="1250" dirty="0"/>
-          </a:p>
-        </p:txBody>
-      </p:sp>
-      <p:sp>
-        <p:nvSpPr>
-          <p:cNvPr id="11" name="Text 9"/>
-          <p:cNvSpPr/>
-          <p:nvPr/>
-        </p:nvSpPr>
-        <p:spPr>
-          <a:xfrm>
-            <a:off x="8778240" y="2962656"/>
-            <a:ext cx="2743200" cy="292608"/>
-          </a:xfrm>
-          <a:prstGeom prst="rect">
-            <a:avLst/>
-          </a:prstGeom>
-          <a:noFill/>
-          <a:ln/>
-        </p:spPr>
-        <p:txBody>
-          <a:bodyPr wrap="square" lIns="0" tIns="0" rIns="0" bIns="0" rtlCol="0" anchor="ctr"/>
-          <a:lstStyle/>
-          <a:p>
-            <a:pPr marL="0" indent="0">
-              <a:buNone/>
-            </a:pPr>
-            <a:r>
-              <a:rPr lang="en-US" sz="1200" b="1" dirty="0">
-                <a:solidFill>
-                  <a:srgbClr val="EF4444"/>
-                </a:solidFill>
-                <a:latin typeface="Calibri" pitchFamily="34" charset="0"/>
-                <a:ea typeface="Calibri" pitchFamily="34" charset="-122"/>
-                <a:cs typeface="Calibri" pitchFamily="34" charset="-120"/>
-              </a:rPr>
-              <a:t>❌ 推測錯誤</a:t>
-            </a:r>
-            <a:endParaRPr lang="en-US" sz="1200" dirty="0"/>
-          </a:p>
-        </p:txBody>
-      </p:sp>
-      <p:sp>
-        <p:nvSpPr>
-          <p:cNvPr id="12" name="Text 10"/>
-          <p:cNvSpPr/>
-          <p:nvPr/>
-        </p:nvSpPr>
-        <p:spPr>
-          <a:xfrm>
-            <a:off x="822960" y="3364992"/>
-            <a:ext cx="1097280" cy="292608"/>
-          </a:xfrm>
-          <a:prstGeom prst="rect">
-            <a:avLst/>
-          </a:prstGeom>
-          <a:noFill/>
-          <a:ln/>
-        </p:spPr>
-        <p:txBody>
-          <a:bodyPr wrap="square" lIns="0" tIns="0" rIns="0" bIns="0" rtlCol="0" anchor="ctr"/>
-          <a:lstStyle/>
-          <a:p>
-            <a:pPr marL="0" indent="0">
-              <a:buNone/>
-            </a:pPr>
-            <a:r>
-              <a:rPr lang="en-US" sz="1200" b="1" dirty="0">
-                <a:solidFill>
-                  <a:srgbClr val="94A3B8"/>
-                </a:solidFill>
-                <a:latin typeface="Calibri" pitchFamily="34" charset="0"/>
-                <a:ea typeface="Calibri" pitchFamily="34" charset="-122"/>
-                <a:cs typeface="Calibri" pitchFamily="34" charset="-120"/>
-              </a:rPr>
-              <a:t>第 3 次</a:t>
-            </a:r>
-            <a:endParaRPr lang="en-US" sz="1200" dirty="0"/>
-          </a:p>
-        </p:txBody>
-      </p:sp>
-      <p:sp>
-        <p:nvSpPr>
-          <p:cNvPr id="13" name="Text 11"/>
-          <p:cNvSpPr/>
-          <p:nvPr/>
-        </p:nvSpPr>
-        <p:spPr>
-          <a:xfrm>
-            <a:off x="2011680" y="3364992"/>
-            <a:ext cx="6583680" cy="292608"/>
-          </a:xfrm>
-          <a:prstGeom prst="rect">
-            <a:avLst/>
-          </a:prstGeom>
-          <a:noFill/>
-          <a:ln/>
-        </p:spPr>
-        <p:txBody>
-          <a:bodyPr wrap="square" lIns="0" tIns="0" rIns="0" bIns="0" rtlCol="0" anchor="ctr"/>
-          <a:lstStyle/>
-          <a:p>
-            <a:pPr marL="0" indent="0">
-              <a:buNone/>
-            </a:pPr>
-            <a:r>
-              <a:rPr lang="en-US" sz="1250" dirty="0">
-                <a:solidFill>
-                  <a:srgbClr val="1E293B"/>
-                </a:solidFill>
-                <a:latin typeface="Calibri" pitchFamily="34" charset="0"/>
-                <a:ea typeface="Calibri" pitchFamily="34" charset="-122"/>
-                <a:cs typeface="Calibri" pitchFamily="34" charset="-120"/>
-              </a:rPr>
-              <a:t>加入除錯步驟，印出實際送出的身分內容</a:t>
-            </a:r>
-            <a:endParaRPr lang="en-US" sz="1250" dirty="0"/>
-          </a:p>
-        </p:txBody>
-      </p:sp>
-      <p:sp>
-        <p:nvSpPr>
-          <p:cNvPr id="14" name="Text 12"/>
-          <p:cNvSpPr/>
-          <p:nvPr/>
-        </p:nvSpPr>
-        <p:spPr>
-          <a:xfrm>
-            <a:off x="8778240" y="3364992"/>
-            <a:ext cx="2743200" cy="292608"/>
-          </a:xfrm>
-          <a:prstGeom prst="rect">
-            <a:avLst/>
-          </a:prstGeom>
-          <a:noFill/>
-          <a:ln/>
-        </p:spPr>
-        <p:txBody>
-          <a:bodyPr wrap="square" lIns="0" tIns="0" rIns="0" bIns="0" rtlCol="0" anchor="ctr"/>
-          <a:lstStyle/>
-          <a:p>
-            <a:pPr marL="0" indent="0">
-              <a:buNone/>
-            </a:pPr>
-            <a:r>
-              <a:rPr lang="en-US" sz="1200" b="1" dirty="0">
-                <a:solidFill>
-                  <a:srgbClr val="F59E0B"/>
-                </a:solidFill>
-                <a:latin typeface="Calibri" pitchFamily="34" charset="0"/>
-                <a:ea typeface="Calibri" pitchFamily="34" charset="-122"/>
-                <a:cs typeface="Calibri" pitchFamily="34" charset="-120"/>
-              </a:rPr>
-              <a:t>❌ 但取得關鍵資料</a:t>
-            </a:r>
-            <a:endParaRPr lang="en-US" sz="1200" dirty="0"/>
-          </a:p>
-        </p:txBody>
-      </p:sp>
-      <p:sp>
-        <p:nvSpPr>
-          <p:cNvPr id="15" name="Text 13"/>
-          <p:cNvSpPr/>
-          <p:nvPr/>
-        </p:nvSpPr>
-        <p:spPr>
-          <a:xfrm>
-            <a:off x="822960" y="3767328"/>
-            <a:ext cx="1097280" cy="292608"/>
-          </a:xfrm>
-          <a:prstGeom prst="rect">
-            <a:avLst/>
-          </a:prstGeom>
-          <a:noFill/>
-          <a:ln/>
-        </p:spPr>
-        <p:txBody>
-          <a:bodyPr wrap="square" lIns="0" tIns="0" rIns="0" bIns="0" rtlCol="0" anchor="ctr"/>
-          <a:lstStyle/>
-          <a:p>
-            <a:pPr marL="0" indent="0">
-              <a:buNone/>
-            </a:pPr>
-            <a:r>
-              <a:rPr lang="en-US" sz="1200" b="1" dirty="0">
-                <a:solidFill>
-                  <a:srgbClr val="94A3B8"/>
-                </a:solidFill>
-                <a:latin typeface="Calibri" pitchFamily="34" charset="0"/>
-                <a:ea typeface="Calibri" pitchFamily="34" charset="-122"/>
-                <a:cs typeface="Calibri" pitchFamily="34" charset="-120"/>
-              </a:rPr>
-              <a:t>第 4 次</a:t>
-            </a:r>
-            <a:endParaRPr lang="en-US" sz="1200" dirty="0"/>
-          </a:p>
-        </p:txBody>
-      </p:sp>
-      <p:sp>
-        <p:nvSpPr>
-          <p:cNvPr id="16" name="Text 14"/>
-          <p:cNvSpPr/>
-          <p:nvPr/>
-        </p:nvSpPr>
-        <p:spPr>
-          <a:xfrm>
-            <a:off x="2011680" y="3767328"/>
-            <a:ext cx="6583680" cy="292608"/>
-          </a:xfrm>
-          <a:prstGeom prst="rect">
-            <a:avLst/>
-          </a:prstGeom>
-          <a:noFill/>
-          <a:ln/>
-        </p:spPr>
-        <p:txBody>
-          <a:bodyPr wrap="square" lIns="0" tIns="0" rIns="0" bIns="0" rtlCol="0" anchor="ctr"/>
-          <a:lstStyle/>
-          <a:p>
-            <a:pPr marL="0" indent="0">
-              <a:buNone/>
-            </a:pPr>
-            <a:r>
-              <a:rPr lang="en-US" sz="1250" dirty="0">
-                <a:solidFill>
-                  <a:srgbClr val="1E293B"/>
-                </a:solidFill>
-                <a:latin typeface="Calibri" pitchFamily="34" charset="0"/>
-                <a:ea typeface="Calibri" pitchFamily="34" charset="-122"/>
-                <a:cs typeface="Calibri" pitchFamily="34" charset="-120"/>
-              </a:rPr>
-              <a:t>推測②：憑證指紋過期</a:t>
-            </a:r>
-            <a:endParaRPr lang="en-US" sz="1250" dirty="0"/>
-          </a:p>
-        </p:txBody>
-      </p:sp>
-      <p:sp>
-        <p:nvSpPr>
-          <p:cNvPr id="17" name="Text 15"/>
-          <p:cNvSpPr/>
-          <p:nvPr/>
-        </p:nvSpPr>
-        <p:spPr>
-          <a:xfrm>
-            <a:off x="8778240" y="3767328"/>
-            <a:ext cx="2743200" cy="292608"/>
-          </a:xfrm>
-          <a:prstGeom prst="rect">
-            <a:avLst/>
-          </a:prstGeom>
-          <a:noFill/>
-          <a:ln/>
-        </p:spPr>
-        <p:txBody>
-          <a:bodyPr wrap="square" lIns="0" tIns="0" rIns="0" bIns="0" rtlCol="0" anchor="ctr"/>
-          <a:lstStyle/>
-          <a:p>
-            <a:pPr marL="0" indent="0">
-              <a:buNone/>
-            </a:pPr>
-            <a:r>
-              <a:rPr lang="en-US" sz="1200" b="1" dirty="0">
-                <a:solidFill>
-                  <a:srgbClr val="EF4444"/>
-                </a:solidFill>
-                <a:latin typeface="Calibri" pitchFamily="34" charset="0"/>
-                <a:ea typeface="Calibri" pitchFamily="34" charset="-122"/>
-                <a:cs typeface="Calibri" pitchFamily="34" charset="-120"/>
-              </a:rPr>
-              <a:t>❌ 推測錯誤</a:t>
-            </a:r>
-            <a:endParaRPr lang="en-US" sz="1200" dirty="0"/>
-          </a:p>
-        </p:txBody>
-      </p:sp>
-      <p:sp>
-        <p:nvSpPr>
-          <p:cNvPr id="18" name="Text 16"/>
-          <p:cNvSpPr/>
-          <p:nvPr/>
-        </p:nvSpPr>
-        <p:spPr>
-          <a:xfrm>
-            <a:off x="822960" y="4169664"/>
-            <a:ext cx="1097280" cy="292608"/>
-          </a:xfrm>
-          <a:prstGeom prst="rect">
-            <a:avLst/>
-          </a:prstGeom>
-          <a:noFill/>
-          <a:ln/>
-        </p:spPr>
-        <p:txBody>
-          <a:bodyPr wrap="square" lIns="0" tIns="0" rIns="0" bIns="0" rtlCol="0" anchor="ctr"/>
-          <a:lstStyle/>
-          <a:p>
-            <a:pPr marL="0" indent="0">
-              <a:buNone/>
-            </a:pPr>
-            <a:r>
-              <a:rPr lang="en-US" sz="1200" b="1" dirty="0">
-                <a:solidFill>
-                  <a:srgbClr val="94A3B8"/>
-                </a:solidFill>
-                <a:latin typeface="Calibri" pitchFamily="34" charset="0"/>
-                <a:ea typeface="Calibri" pitchFamily="34" charset="-122"/>
-                <a:cs typeface="Calibri" pitchFamily="34" charset="-120"/>
-              </a:rPr>
-              <a:t>第 5 次</a:t>
-            </a:r>
-            <a:endParaRPr lang="en-US" sz="1200" dirty="0"/>
-          </a:p>
-        </p:txBody>
-      </p:sp>
-      <p:sp>
-        <p:nvSpPr>
-          <p:cNvPr id="19" name="Text 17"/>
-          <p:cNvSpPr/>
-          <p:nvPr/>
-        </p:nvSpPr>
-        <p:spPr>
-          <a:xfrm>
-            <a:off x="2011680" y="4169664"/>
-            <a:ext cx="6583680" cy="292608"/>
-          </a:xfrm>
-          <a:prstGeom prst="rect">
-            <a:avLst/>
-          </a:prstGeom>
-          <a:noFill/>
-          <a:ln/>
-        </p:spPr>
-        <p:txBody>
-          <a:bodyPr wrap="square" lIns="0" tIns="0" rIns="0" bIns="0" rtlCol="0" anchor="ctr"/>
-          <a:lstStyle/>
-          <a:p>
-            <a:pPr marL="0" indent="0">
-              <a:buNone/>
-            </a:pPr>
-            <a:r>
-              <a:rPr lang="en-US" sz="1250" dirty="0">
-                <a:solidFill>
-                  <a:srgbClr val="1E293B"/>
-                </a:solidFill>
-                <a:latin typeface="Calibri" pitchFamily="34" charset="0"/>
-                <a:ea typeface="Calibri" pitchFamily="34" charset="-122"/>
-                <a:cs typeface="Calibri" pitchFamily="34" charset="-120"/>
-              </a:rPr>
-              <a:t>推測③：大小寫不符</a:t>
-            </a:r>
-            <a:endParaRPr lang="en-US" sz="1250" dirty="0"/>
-          </a:p>
-        </p:txBody>
-      </p:sp>
-      <p:sp>
-        <p:nvSpPr>
-          <p:cNvPr id="20" name="Text 18"/>
-          <p:cNvSpPr/>
-          <p:nvPr/>
-        </p:nvSpPr>
-        <p:spPr>
-          <a:xfrm>
-            <a:off x="8778240" y="4169664"/>
-            <a:ext cx="2743200" cy="292608"/>
-          </a:xfrm>
-          <a:prstGeom prst="rect">
-            <a:avLst/>
-          </a:prstGeom>
-          <a:noFill/>
-          <a:ln/>
-        </p:spPr>
-        <p:txBody>
-          <a:bodyPr wrap="square" lIns="0" tIns="0" rIns="0" bIns="0" rtlCol="0" anchor="ctr"/>
-          <a:lstStyle/>
-          <a:p>
-            <a:pPr marL="0" indent="0">
-              <a:buNone/>
-            </a:pPr>
-            <a:r>
-              <a:rPr lang="en-US" sz="1200" b="1" dirty="0">
-                <a:solidFill>
-                  <a:srgbClr val="EF4444"/>
-                </a:solidFill>
-                <a:latin typeface="Calibri" pitchFamily="34" charset="0"/>
-                <a:ea typeface="Calibri" pitchFamily="34" charset="-122"/>
-                <a:cs typeface="Calibri" pitchFamily="34" charset="-120"/>
-              </a:rPr>
-              <a:t>❌ 推測錯誤</a:t>
-            </a:r>
-            <a:endParaRPr lang="en-US" sz="1200" dirty="0"/>
-          </a:p>
-        </p:txBody>
-      </p:sp>
-      <p:sp>
-        <p:nvSpPr>
-          <p:cNvPr id="21" name="Text 19"/>
-          <p:cNvSpPr/>
-          <p:nvPr/>
-        </p:nvSpPr>
-        <p:spPr>
-          <a:xfrm>
-            <a:off x="822960" y="4572000"/>
-            <a:ext cx="1097280" cy="292608"/>
-          </a:xfrm>
-          <a:prstGeom prst="rect">
-            <a:avLst/>
-          </a:prstGeom>
-          <a:noFill/>
-          <a:ln/>
-        </p:spPr>
-        <p:txBody>
-          <a:bodyPr wrap="square" lIns="0" tIns="0" rIns="0" bIns="0" rtlCol="0" anchor="ctr"/>
-          <a:lstStyle/>
-          <a:p>
-            <a:pPr marL="0" indent="0">
-              <a:buNone/>
-            </a:pPr>
-            <a:r>
-              <a:rPr lang="en-US" sz="1200" b="1" dirty="0">
-                <a:solidFill>
-                  <a:srgbClr val="94A3B8"/>
-                </a:solidFill>
-                <a:latin typeface="Calibri" pitchFamily="34" charset="0"/>
-                <a:ea typeface="Calibri" pitchFamily="34" charset="-122"/>
-                <a:cs typeface="Calibri" pitchFamily="34" charset="-120"/>
-              </a:rPr>
-              <a:t>第 6 次</a:t>
-            </a:r>
-            <a:endParaRPr lang="en-US" sz="1200" dirty="0"/>
-          </a:p>
-        </p:txBody>
-      </p:sp>
-      <p:sp>
-        <p:nvSpPr>
-          <p:cNvPr id="22" name="Text 20"/>
-          <p:cNvSpPr/>
-          <p:nvPr/>
-        </p:nvSpPr>
-        <p:spPr>
-          <a:xfrm>
-            <a:off x="2011680" y="4572000"/>
-            <a:ext cx="6583680" cy="292608"/>
-          </a:xfrm>
-          <a:prstGeom prst="rect">
-            <a:avLst/>
-          </a:prstGeom>
-          <a:noFill/>
-          <a:ln/>
-        </p:spPr>
-        <p:txBody>
-          <a:bodyPr wrap="square" lIns="0" tIns="0" rIns="0" bIns="0" rtlCol="0" anchor="ctr"/>
-          <a:lstStyle/>
-          <a:p>
-            <a:pPr marL="0" indent="0">
-              <a:buNone/>
-            </a:pPr>
-            <a:r>
-              <a:rPr lang="en-US" sz="1250" dirty="0">
-                <a:solidFill>
-                  <a:srgbClr val="1E293B"/>
-                </a:solidFill>
-                <a:latin typeface="Calibri" pitchFamily="34" charset="0"/>
-                <a:ea typeface="Calibri" pitchFamily="34" charset="-122"/>
-                <a:cs typeface="Calibri" pitchFamily="34" charset="-120"/>
-              </a:rPr>
-              <a:t>讀除錯輸出後對症下藥</a:t>
-            </a:r>
-            <a:endParaRPr lang="en-US" sz="1250" dirty="0"/>
-          </a:p>
-        </p:txBody>
-      </p:sp>
-      <p:sp>
-        <p:nvSpPr>
-          <p:cNvPr id="23" name="Text 21"/>
-          <p:cNvSpPr/>
-          <p:nvPr/>
-        </p:nvSpPr>
-        <p:spPr>
-          <a:xfrm>
-            <a:off x="8778240" y="4572000"/>
-            <a:ext cx="2743200" cy="292608"/>
-          </a:xfrm>
-          <a:prstGeom prst="rect">
-            <a:avLst/>
-          </a:prstGeom>
-          <a:noFill/>
-          <a:ln/>
-        </p:spPr>
-        <p:txBody>
-          <a:bodyPr wrap="square" lIns="0" tIns="0" rIns="0" bIns="0" rtlCol="0" anchor="ctr"/>
-          <a:lstStyle/>
-          <a:p>
-            <a:pPr marL="0" indent="0">
-              <a:buNone/>
-            </a:pPr>
-            <a:r>
-              <a:rPr lang="en-US" sz="1200" b="1" dirty="0">
-                <a:solidFill>
-                  <a:srgbClr val="22C55E"/>
-                </a:solidFill>
-                <a:latin typeface="Calibri" pitchFamily="34" charset="0"/>
-                <a:ea typeface="Calibri" pitchFamily="34" charset="-122"/>
-                <a:cs typeface="Calibri" pitchFamily="34" charset="-120"/>
-              </a:rPr>
-              <a:t>✅ 成功</a:t>
-            </a:r>
-            <a:endParaRPr lang="en-US" sz="1200" dirty="0"/>
-          </a:p>
-        </p:txBody>
-      </p:sp>
-      <p:sp>
-        <p:nvSpPr>
-          <p:cNvPr id="24" name="Shape 22"/>
-          <p:cNvSpPr/>
-          <p:nvPr/>
-        </p:nvSpPr>
-        <p:spPr>
-          <a:xfrm>
-            <a:off x="548640" y="5074920"/>
-            <a:ext cx="11064240" cy="1234440"/>
-          </a:xfrm>
-          <a:prstGeom prst="roundRect">
-            <a:avLst>
-              <a:gd name="adj" fmla="val 5926"/>
-            </a:avLst>
-          </a:prstGeom>
-          <a:solidFill>
-            <a:srgbClr val="F0F9FF"/>
-          </a:solidFill>
-          <a:ln w="12700">
-            <a:solidFill>
-              <a:srgbClr val="E2E8F0"/>
-            </a:solidFill>
-            <a:prstDash val="solid"/>
-          </a:ln>
-        </p:spPr>
-        <p:txBody>
-          <a:bodyPr/>
-          <a:lstStyle/>
-          <a:p>
-            <a:endParaRPr lang="en-US"/>
-          </a:p>
-        </p:txBody>
-      </p:sp>
-      <p:sp>
-        <p:nvSpPr>
-          <p:cNvPr id="25" name="Text 23"/>
-          <p:cNvSpPr/>
-          <p:nvPr/>
-        </p:nvSpPr>
-        <p:spPr>
-          <a:xfrm>
-            <a:off x="914400" y="5230368"/>
-            <a:ext cx="10332720" cy="320040"/>
-          </a:xfrm>
-          <a:prstGeom prst="rect">
-            <a:avLst/>
-          </a:prstGeom>
-          <a:noFill/>
-          <a:ln/>
-        </p:spPr>
-        <p:txBody>
-          <a:bodyPr wrap="square" lIns="0" tIns="0" rIns="0" bIns="0" rtlCol="0" anchor="ctr"/>
-          <a:lstStyle/>
-          <a:p>
-            <a:pPr marL="0" indent="0">
-              <a:buNone/>
-            </a:pPr>
-            <a:r>
-              <a:rPr lang="en-US" sz="1600" b="1" dirty="0">
-                <a:solidFill>
-                  <a:srgbClr val="0369A1"/>
-                </a:solidFill>
-                <a:latin typeface="Calibri" pitchFamily="34" charset="0"/>
-                <a:ea typeface="Calibri" pitchFamily="34" charset="-122"/>
-                <a:cs typeface="Calibri" pitchFamily="34" charset="-120"/>
-              </a:rPr>
-              <a:t>三次推測全錯，花了 10 分鐘；一次量測直接命中，3 秒定位。</a:t>
-            </a:r>
-            <a:endParaRPr lang="en-US" sz="1600" dirty="0"/>
-          </a:p>
-        </p:txBody>
-      </p:sp>
-      <p:sp>
-        <p:nvSpPr>
-          <p:cNvPr id="26" name="Text 24"/>
-          <p:cNvSpPr/>
-          <p:nvPr/>
-        </p:nvSpPr>
-        <p:spPr>
-          <a:xfrm>
-            <a:off x="914400" y="5605272"/>
-            <a:ext cx="10332720" cy="548640"/>
-          </a:xfrm>
-          <a:prstGeom prst="rect">
-            <a:avLst/>
-          </a:prstGeom>
-          <a:noFill/>
-          <a:ln/>
-        </p:spPr>
-        <p:txBody>
-          <a:bodyPr wrap="square" lIns="0" tIns="0" rIns="0" bIns="0" rtlCol="0" anchor="ctr"/>
-          <a:lstStyle/>
-          <a:p>
-            <a:pPr marL="0" indent="0">
-              <a:lnSpc>
-                <a:spcPts val="2000"/>
-              </a:lnSpc>
-              <a:buNone/>
-            </a:pPr>
-            <a:r>
-              <a:rPr lang="en-US" sz="1300" dirty="0">
-                <a:solidFill>
-                  <a:srgbClr val="1E293B"/>
-                </a:solidFill>
-                <a:latin typeface="Calibri" pitchFamily="34" charset="0"/>
-                <a:ea typeface="Calibri" pitchFamily="34" charset="-122"/>
-                <a:cs typeface="Calibri" pitchFamily="34" charset="-120"/>
-              </a:rPr>
-              <a:t>真正的原因：GitHub 已改用「不可變主體識別」格式，在身分內容中嵌入帳號與 repo 的數字 ID，與網路教學上的舊格式不同。</a:t>
-            </a:r>
-            <a:endParaRPr lang="en-US" sz="1300" dirty="0"/>
-          </a:p>
-        </p:txBody>
-      </p:sp>
-    </p:spTree>
-  </p:cSld>
-  <p:clrMapOvr>
-    <a:masterClrMapping/>
-  </p:clrMapOvr>
-</p:sld>
-</file>
-
-<file path=ppt/slides/slide12.xml><?xml version="1.0" encoding="utf-8"?>
-<p:sld xmlns:a="http://schemas.openxmlformats.org/drawingml/2006/main" xmlns:r="http://schemas.openxmlformats.org/officeDocument/2006/relationships" xmlns:p="http://schemas.openxmlformats.org/presentationml/2006/main">
-  <p:cSld name="Slide 12">
-    <p:bg>
-      <p:bgPr>
-        <a:solidFill>
-          <a:srgbClr val="FFFFFF"/>
-        </a:solidFill>
-        <a:effectLst/>
-      </p:bgPr>
-    </p:bg>
-    <p:spTree>
-      <p:nvGrpSpPr>
-        <p:cNvPr id="1" name=""/>
-        <p:cNvGrpSpPr/>
-        <p:nvPr/>
-      </p:nvGrpSpPr>
-      <p:grpSpPr>
-        <a:xfrm>
-          <a:off x="0" y="0"/>
-          <a:ext cx="0" cy="0"/>
-          <a:chOff x="0" y="0"/>
-          <a:chExt cx="0" cy="0"/>
-        </a:xfrm>
-      </p:grpSpPr>
-      <p:sp>
-        <p:nvSpPr>
-          <p:cNvPr id="2" name="Text 0"/>
-          <p:cNvSpPr/>
-          <p:nvPr/>
-        </p:nvSpPr>
-        <p:spPr>
-          <a:xfrm>
-            <a:off x="548640" y="384048"/>
-            <a:ext cx="7315200" cy="274320"/>
-          </a:xfrm>
-          <a:prstGeom prst="rect">
-            <a:avLst/>
-          </a:prstGeom>
-          <a:noFill/>
-          <a:ln/>
-        </p:spPr>
-        <p:txBody>
-          <a:bodyPr wrap="square" lIns="0" tIns="0" rIns="0" bIns="0" rtlCol="0" anchor="ctr"/>
-          <a:lstStyle/>
-          <a:p>
-            <a:pPr marL="0" indent="0">
-              <a:buNone/>
-            </a:pPr>
-            <a:r>
-              <a:rPr lang="en-US" sz="1200" b="1" kern="0" spc="150" dirty="0">
-                <a:solidFill>
-                  <a:srgbClr val="38BDF8"/>
-                </a:solidFill>
-                <a:latin typeface="Calibri" pitchFamily="34" charset="0"/>
-                <a:ea typeface="Calibri" pitchFamily="34" charset="-122"/>
-                <a:cs typeface="Calibri" pitchFamily="34" charset="-120"/>
-              </a:rPr>
-              <a:t>取捨</a:t>
-            </a:r>
-            <a:endParaRPr lang="en-US" sz="1200" dirty="0"/>
-          </a:p>
-        </p:txBody>
-      </p:sp>
-      <p:sp>
-        <p:nvSpPr>
-          <p:cNvPr id="3" name="Text 1"/>
-          <p:cNvSpPr/>
-          <p:nvPr/>
-        </p:nvSpPr>
-        <p:spPr>
-          <a:xfrm>
-            <a:off x="548640" y="658368"/>
-            <a:ext cx="11064240" cy="640080"/>
-          </a:xfrm>
-          <a:prstGeom prst="rect">
-            <a:avLst/>
-          </a:prstGeom>
-          <a:noFill/>
-          <a:ln/>
-        </p:spPr>
-        <p:txBody>
-          <a:bodyPr wrap="square" lIns="0" tIns="0" rIns="0" bIns="0" rtlCol="0" anchor="ctr"/>
-          <a:lstStyle/>
-          <a:p>
-            <a:pPr marL="0" indent="0">
-              <a:buNone/>
-            </a:pPr>
-            <a:r>
-              <a:rPr lang="en-US" sz="3400" b="1" dirty="0">
-                <a:solidFill>
-                  <a:srgbClr val="1E293B"/>
-                </a:solidFill>
-                <a:latin typeface="Calibri" pitchFamily="34" charset="0"/>
-                <a:ea typeface="Calibri" pitchFamily="34" charset="-122"/>
-                <a:cs typeface="Calibri" pitchFamily="34" charset="-120"/>
-              </a:rPr>
-              <a:t>關 5：評估後決定不執行</a:t>
-            </a:r>
-            <a:endParaRPr lang="en-US" sz="3400" dirty="0"/>
-          </a:p>
-        </p:txBody>
-      </p:sp>
-      <p:sp>
-        <p:nvSpPr>
-          <p:cNvPr id="4" name="Shape 2"/>
-          <p:cNvSpPr/>
-          <p:nvPr/>
-        </p:nvSpPr>
-        <p:spPr>
-          <a:xfrm>
-            <a:off x="548640" y="1737360"/>
-            <a:ext cx="5394960" cy="2377440"/>
-          </a:xfrm>
-          <a:prstGeom prst="roundRect">
-            <a:avLst>
-              <a:gd name="adj" fmla="val 3077"/>
-            </a:avLst>
-          </a:prstGeom>
-          <a:solidFill>
-            <a:srgbClr val="F8FAFC"/>
-          </a:solidFill>
-          <a:ln w="12700">
-            <a:solidFill>
-              <a:srgbClr val="E2E8F0"/>
-            </a:solidFill>
-            <a:prstDash val="solid"/>
-          </a:ln>
-        </p:spPr>
-        <p:txBody>
-          <a:bodyPr/>
-          <a:lstStyle/>
-          <a:p>
-            <a:endParaRPr lang="en-US"/>
-          </a:p>
-        </p:txBody>
-      </p:sp>
-      <p:sp>
-        <p:nvSpPr>
-          <p:cNvPr id="5" name="Text 3"/>
-          <p:cNvSpPr/>
-          <p:nvPr/>
-        </p:nvSpPr>
-        <p:spPr>
-          <a:xfrm>
-            <a:off x="914400" y="1920240"/>
-            <a:ext cx="4663440" cy="274320"/>
-          </a:xfrm>
-          <a:prstGeom prst="rect">
-            <a:avLst/>
-          </a:prstGeom>
-          <a:noFill/>
-          <a:ln/>
-        </p:spPr>
-        <p:txBody>
-          <a:bodyPr wrap="square" lIns="0" tIns="0" rIns="0" bIns="0" rtlCol="0" anchor="ctr"/>
-          <a:lstStyle/>
-          <a:p>
-            <a:pPr marL="0" indent="0">
-              <a:buNone/>
-            </a:pPr>
-            <a:r>
-              <a:rPr lang="en-US" sz="1400" b="1" dirty="0">
-                <a:solidFill>
-                  <a:srgbClr val="1E293B"/>
-                </a:solidFill>
-                <a:latin typeface="Calibri" pitchFamily="34" charset="0"/>
-                <a:ea typeface="Calibri" pitchFamily="34" charset="-122"/>
-                <a:cs typeface="Calibri" pitchFamily="34" charset="-120"/>
-              </a:rPr>
-              <a:t>關 5 要做什麼</a:t>
-            </a:r>
-            <a:endParaRPr lang="en-US" sz="1400" dirty="0"/>
-          </a:p>
-        </p:txBody>
-      </p:sp>
-      <p:sp>
-        <p:nvSpPr>
-          <p:cNvPr id="6" name="Text 4"/>
-          <p:cNvSpPr/>
-          <p:nvPr/>
-        </p:nvSpPr>
-        <p:spPr>
-          <a:xfrm>
-            <a:off x="914400" y="2286000"/>
-            <a:ext cx="4663440" cy="1645920"/>
-          </a:xfrm>
-          <a:prstGeom prst="rect">
-            <a:avLst/>
-          </a:prstGeom>
-          <a:noFill/>
-          <a:ln/>
-        </p:spPr>
-        <p:txBody>
-          <a:bodyPr wrap="square" lIns="0" tIns="0" rIns="0" bIns="0" rtlCol="0" anchor="ctr"/>
-          <a:lstStyle/>
-          <a:p>
-            <a:pPr marL="342900" indent="-342900">
-              <a:lnSpc>
-                <a:spcPts val="1800"/>
-              </a:lnSpc>
-              <a:spcAft>
-                <a:spcPts val="800"/>
-              </a:spcAft>
-              <a:buSzPct val="100000"/>
-              <a:buChar char="•"/>
-            </a:pPr>
-            <a:r>
-              <a:rPr lang="en-US" sz="1250" dirty="0">
-                <a:solidFill>
-                  <a:srgbClr val="1E293B"/>
-                </a:solidFill>
-                <a:latin typeface="Calibri" pitchFamily="34" charset="0"/>
-                <a:ea typeface="Calibri" pitchFamily="34" charset="-122"/>
-                <a:cs typeface="Calibri" pitchFamily="34" charset="-120"/>
-              </a:rPr>
-              <a:t>另開 Google Cloud 帳號並綁定帳單</a:t>
-            </a:r>
-            <a:endParaRPr lang="en-US" sz="1250" dirty="0"/>
-          </a:p>
-          <a:p>
-            <a:pPr marL="342900" indent="-342900">
-              <a:lnSpc>
-                <a:spcPts val="1800"/>
-              </a:lnSpc>
-              <a:spcAft>
-                <a:spcPts val="800"/>
-              </a:spcAft>
-              <a:buSzPct val="100000"/>
-              <a:buChar char="•"/>
-            </a:pPr>
-            <a:r>
-              <a:rPr lang="en-US" sz="1250" dirty="0">
-                <a:solidFill>
-                  <a:srgbClr val="1E293B"/>
-                </a:solidFill>
-                <a:latin typeface="Calibri" pitchFamily="34" charset="0"/>
-                <a:ea typeface="Calibri" pitchFamily="34" charset="-122"/>
-                <a:cs typeface="Calibri" pitchFamily="34" charset="-120"/>
-              </a:rPr>
-              <a:t>設定 GCP 版的身分聯邦（Workload Identity）</a:t>
-            </a:r>
-            <a:endParaRPr lang="en-US" sz="1250" dirty="0"/>
-          </a:p>
-          <a:p>
-            <a:pPr marL="342900" indent="-342900">
-              <a:lnSpc>
-                <a:spcPts val="1800"/>
-              </a:lnSpc>
-              <a:spcAft>
-                <a:spcPts val="800"/>
-              </a:spcAft>
-              <a:buSzPct val="100000"/>
-              <a:buChar char="•"/>
-            </a:pPr>
-            <a:r>
-              <a:rPr lang="en-US" sz="1250" dirty="0">
-                <a:solidFill>
-                  <a:srgbClr val="1E293B"/>
-                </a:solidFill>
-                <a:latin typeface="Calibri" pitchFamily="34" charset="0"/>
-                <a:ea typeface="Calibri" pitchFamily="34" charset="-122"/>
-                <a:cs typeface="Calibri" pitchFamily="34" charset="-120"/>
-              </a:rPr>
-              <a:t>學習 Cloud Run 的部署模型</a:t>
-            </a:r>
-            <a:endParaRPr lang="en-US" sz="1250" dirty="0"/>
-          </a:p>
-          <a:p>
-            <a:pPr marL="342900" indent="-342900">
-              <a:lnSpc>
-                <a:spcPts val="1800"/>
-              </a:lnSpc>
-              <a:spcAft>
-                <a:spcPts val="800"/>
-              </a:spcAft>
-              <a:buSzPct val="100000"/>
-              <a:buChar char="•"/>
-            </a:pPr>
-            <a:r>
-              <a:rPr lang="en-US" sz="1250" dirty="0">
-                <a:solidFill>
-                  <a:srgbClr val="1E293B"/>
-                </a:solidFill>
-                <a:latin typeface="Calibri" pitchFamily="34" charset="0"/>
-                <a:ea typeface="Calibri" pitchFamily="34" charset="-122"/>
-                <a:cs typeface="Calibri" pitchFamily="34" charset="-120"/>
-              </a:rPr>
-              <a:t>撰寫並維護第二套流水線</a:t>
-            </a:r>
-            <a:endParaRPr lang="en-US" sz="1250" dirty="0"/>
-          </a:p>
-        </p:txBody>
-      </p:sp>
-      <p:sp>
-        <p:nvSpPr>
-          <p:cNvPr id="7" name="Shape 5"/>
-          <p:cNvSpPr/>
-          <p:nvPr/>
-        </p:nvSpPr>
-        <p:spPr>
-          <a:xfrm>
-            <a:off x="6217920" y="1737360"/>
-            <a:ext cx="5394960" cy="2377440"/>
-          </a:xfrm>
-          <a:prstGeom prst="roundRect">
-            <a:avLst>
-              <a:gd name="adj" fmla="val 3077"/>
-            </a:avLst>
-          </a:prstGeom>
-          <a:solidFill>
-            <a:srgbClr val="F0F9FF"/>
-          </a:solidFill>
-          <a:ln w="12700">
-            <a:solidFill>
-              <a:srgbClr val="E2E8F0"/>
-            </a:solidFill>
-            <a:prstDash val="solid"/>
-          </a:ln>
-        </p:spPr>
-        <p:txBody>
-          <a:bodyPr/>
-          <a:lstStyle/>
-          <a:p>
-            <a:endParaRPr lang="en-US"/>
-          </a:p>
-        </p:txBody>
-      </p:sp>
-      <p:sp>
-        <p:nvSpPr>
-          <p:cNvPr id="8" name="Text 6"/>
-          <p:cNvSpPr/>
-          <p:nvPr/>
-        </p:nvSpPr>
-        <p:spPr>
-          <a:xfrm>
-            <a:off x="6583680" y="1920240"/>
-            <a:ext cx="4663440" cy="274320"/>
-          </a:xfrm>
-          <a:prstGeom prst="rect">
-            <a:avLst/>
-          </a:prstGeom>
-          <a:noFill/>
-          <a:ln/>
-        </p:spPr>
-        <p:txBody>
-          <a:bodyPr wrap="square" lIns="0" tIns="0" rIns="0" bIns="0" rtlCol="0" anchor="ctr"/>
-          <a:lstStyle/>
-          <a:p>
-            <a:pPr marL="0" indent="0">
-              <a:buNone/>
-            </a:pPr>
-            <a:r>
-              <a:rPr lang="en-US" sz="1400" b="1" dirty="0">
-                <a:solidFill>
-                  <a:srgbClr val="0369A1"/>
-                </a:solidFill>
-                <a:latin typeface="Calibri" pitchFamily="34" charset="0"/>
-                <a:ea typeface="Calibri" pitchFamily="34" charset="-122"/>
-                <a:cs typeface="Calibri" pitchFamily="34" charset="-120"/>
-              </a:rPr>
-              <a:t>評估結果</a:t>
-            </a:r>
-            <a:endParaRPr lang="en-US" sz="1400" dirty="0"/>
-          </a:p>
-        </p:txBody>
-      </p:sp>
-      <p:sp>
-        <p:nvSpPr>
-          <p:cNvPr id="9" name="Text 7"/>
-          <p:cNvSpPr/>
-          <p:nvPr/>
-        </p:nvSpPr>
-        <p:spPr>
-          <a:xfrm>
-            <a:off x="6583680" y="2331720"/>
-            <a:ext cx="2103120" cy="256032"/>
-          </a:xfrm>
-          <a:prstGeom prst="rect">
-            <a:avLst/>
-          </a:prstGeom>
-          <a:noFill/>
-          <a:ln/>
-        </p:spPr>
-        <p:txBody>
-          <a:bodyPr wrap="square" lIns="0" tIns="0" rIns="0" bIns="0" rtlCol="0" anchor="ctr"/>
-          <a:lstStyle/>
-          <a:p>
-            <a:pPr marL="0" indent="0">
-              <a:buNone/>
-            </a:pPr>
-            <a:r>
-              <a:rPr lang="en-US" sz="1100" dirty="0">
-                <a:solidFill>
-                  <a:srgbClr val="94A3B8"/>
-                </a:solidFill>
-                <a:latin typeface="Calibri" pitchFamily="34" charset="0"/>
-                <a:ea typeface="Calibri" pitchFamily="34" charset="-122"/>
-                <a:cs typeface="Calibri" pitchFamily="34" charset="-120"/>
-              </a:rPr>
-              <a:t>預估投入</a:t>
-            </a:r>
-            <a:endParaRPr lang="en-US" sz="1100" dirty="0"/>
-          </a:p>
-        </p:txBody>
-      </p:sp>
-      <p:sp>
-        <p:nvSpPr>
-          <p:cNvPr id="10" name="Text 8"/>
-          <p:cNvSpPr/>
-          <p:nvPr/>
-        </p:nvSpPr>
-        <p:spPr>
-          <a:xfrm>
-            <a:off x="6583680" y="2578608"/>
-            <a:ext cx="2103120" cy="320040"/>
-          </a:xfrm>
-          <a:prstGeom prst="rect">
-            <a:avLst/>
-          </a:prstGeom>
-          <a:noFill/>
-          <a:ln/>
-        </p:spPr>
-        <p:txBody>
-          <a:bodyPr wrap="square" lIns="0" tIns="0" rIns="0" bIns="0" rtlCol="0" anchor="ctr"/>
-          <a:lstStyle/>
-          <a:p>
-            <a:pPr marL="0" indent="0">
-              <a:buNone/>
-            </a:pPr>
-            <a:r>
-              <a:rPr lang="en-US" sz="2000" b="1" dirty="0">
-                <a:solidFill>
-                  <a:srgbClr val="EF4444"/>
-                </a:solidFill>
-                <a:latin typeface="Calibri" pitchFamily="34" charset="0"/>
-                <a:ea typeface="Calibri" pitchFamily="34" charset="-122"/>
-                <a:cs typeface="Calibri" pitchFamily="34" charset="-120"/>
-              </a:rPr>
-              <a:t>5–8 小時</a:t>
-            </a:r>
-            <a:endParaRPr lang="en-US" sz="2000" dirty="0"/>
-          </a:p>
-        </p:txBody>
-      </p:sp>
-      <p:sp>
-        <p:nvSpPr>
-          <p:cNvPr id="11" name="Text 9"/>
-          <p:cNvSpPr/>
-          <p:nvPr/>
-        </p:nvSpPr>
-        <p:spPr>
-          <a:xfrm>
-            <a:off x="9052560" y="2331720"/>
-            <a:ext cx="2194560" cy="256032"/>
-          </a:xfrm>
-          <a:prstGeom prst="rect">
-            <a:avLst/>
-          </a:prstGeom>
-          <a:noFill/>
-          <a:ln/>
-        </p:spPr>
-        <p:txBody>
-          <a:bodyPr wrap="square" lIns="0" tIns="0" rIns="0" bIns="0" rtlCol="0" anchor="ctr"/>
-          <a:lstStyle/>
-          <a:p>
-            <a:pPr marL="0" indent="0">
-              <a:buNone/>
-            </a:pPr>
-            <a:r>
-              <a:rPr lang="en-US" sz="1100" dirty="0">
-                <a:solidFill>
-                  <a:srgbClr val="94A3B8"/>
-                </a:solidFill>
-                <a:latin typeface="Calibri" pitchFamily="34" charset="0"/>
-                <a:ea typeface="Calibri" pitchFamily="34" charset="-122"/>
-                <a:cs typeface="Calibri" pitchFamily="34" charset="-120"/>
-              </a:rPr>
-              <a:t>Tier 認定</a:t>
-            </a:r>
-            <a:endParaRPr lang="en-US" sz="1100" dirty="0"/>
-          </a:p>
-        </p:txBody>
-      </p:sp>
-      <p:sp>
-        <p:nvSpPr>
-          <p:cNvPr id="12" name="Text 10"/>
-          <p:cNvSpPr/>
-          <p:nvPr/>
-        </p:nvSpPr>
-        <p:spPr>
-          <a:xfrm>
-            <a:off x="9052560" y="2578608"/>
-            <a:ext cx="2194560" cy="320040"/>
-          </a:xfrm>
-          <a:prstGeom prst="rect">
-            <a:avLst/>
-          </a:prstGeom>
-          <a:noFill/>
-          <a:ln/>
-        </p:spPr>
-        <p:txBody>
-          <a:bodyPr wrap="square" lIns="0" tIns="0" rIns="0" bIns="0" rtlCol="0" anchor="ctr"/>
-          <a:lstStyle/>
-          <a:p>
-            <a:pPr marL="0" indent="0">
-              <a:buNone/>
-            </a:pPr>
-            <a:r>
-              <a:rPr lang="en-US" sz="2000" b="1" dirty="0">
-                <a:solidFill>
-                  <a:srgbClr val="EF4444"/>
-                </a:solidFill>
-                <a:latin typeface="Calibri" pitchFamily="34" charset="0"/>
-                <a:ea typeface="Calibri" pitchFamily="34" charset="-122"/>
-                <a:cs typeface="Calibri" pitchFamily="34" charset="-120"/>
-              </a:rPr>
-              <a:t>不變（仍為 3）</a:t>
-            </a:r>
-            <a:endParaRPr lang="en-US" sz="2000" dirty="0"/>
-          </a:p>
-        </p:txBody>
-      </p:sp>
-      <p:sp>
-        <p:nvSpPr>
-          <p:cNvPr id="13" name="Text 11"/>
-          <p:cNvSpPr/>
-          <p:nvPr/>
-        </p:nvSpPr>
-        <p:spPr>
-          <a:xfrm>
-            <a:off x="6583680" y="3108960"/>
-            <a:ext cx="4663440" cy="731520"/>
-          </a:xfrm>
-          <a:prstGeom prst="rect">
-            <a:avLst/>
-          </a:prstGeom>
-          <a:noFill/>
-          <a:ln/>
-        </p:spPr>
-        <p:txBody>
-          <a:bodyPr wrap="square" lIns="0" tIns="0" rIns="0" bIns="0" rtlCol="0" anchor="ctr"/>
-          <a:lstStyle/>
-          <a:p>
-            <a:pPr marL="0" indent="0">
-              <a:lnSpc>
-                <a:spcPts val="1900"/>
-              </a:lnSpc>
-              <a:buNone/>
-            </a:pPr>
-            <a:r>
-              <a:rPr lang="en-US" sz="1250" dirty="0">
-                <a:solidFill>
-                  <a:srgbClr val="1E293B"/>
-                </a:solidFill>
-                <a:latin typeface="Calibri" pitchFamily="34" charset="0"/>
-                <a:ea typeface="Calibri" pitchFamily="34" charset="-122"/>
-                <a:cs typeface="Calibri" pitchFamily="34" charset="-120"/>
-              </a:rPr>
-              <a:t>同樣的時間投入關 4 的滾動更新與文件完整度，</a:t>
-            </a:r>
-            <a:endParaRPr lang="en-US" sz="1250" dirty="0"/>
-          </a:p>
-          <a:p>
-            <a:pPr marL="0" indent="0">
-              <a:lnSpc>
-                <a:spcPts val="1900"/>
-              </a:lnSpc>
-              <a:buNone/>
-            </a:pPr>
-            <a:r>
-              <a:rPr lang="en-US" sz="1250" dirty="0">
-                <a:solidFill>
-                  <a:srgbClr val="1E293B"/>
-                </a:solidFill>
-                <a:latin typeface="Calibri" pitchFamily="34" charset="0"/>
-                <a:ea typeface="Calibri" pitchFamily="34" charset="-122"/>
-                <a:cs typeface="Calibri" pitchFamily="34" charset="-120"/>
-              </a:rPr>
-              <a:t>對專題品質的貢獻明顯更高。</a:t>
-            </a:r>
-            <a:endParaRPr lang="en-US" sz="1250" dirty="0"/>
-          </a:p>
-        </p:txBody>
-      </p:sp>
-      <p:sp>
-        <p:nvSpPr>
-          <p:cNvPr id="14" name="Shape 12"/>
-          <p:cNvSpPr/>
-          <p:nvPr/>
-        </p:nvSpPr>
-        <p:spPr>
-          <a:xfrm>
-            <a:off x="548640" y="4343400"/>
-            <a:ext cx="11064240" cy="1417320"/>
-          </a:xfrm>
-          <a:prstGeom prst="roundRect">
-            <a:avLst>
-              <a:gd name="adj" fmla="val 5161"/>
-            </a:avLst>
-          </a:prstGeom>
-          <a:solidFill>
-            <a:srgbClr val="F0FDF4"/>
-          </a:solidFill>
-          <a:ln w="12700">
-            <a:solidFill>
-              <a:srgbClr val="E2E8F0"/>
-            </a:solidFill>
-            <a:prstDash val="solid"/>
-          </a:ln>
-        </p:spPr>
-        <p:txBody>
-          <a:bodyPr/>
-          <a:lstStyle/>
-          <a:p>
-            <a:endParaRPr lang="en-US"/>
-          </a:p>
-        </p:txBody>
-      </p:sp>
-      <p:sp>
-        <p:nvSpPr>
-          <p:cNvPr id="15" name="Text 13"/>
-          <p:cNvSpPr/>
-          <p:nvPr/>
-        </p:nvSpPr>
-        <p:spPr>
-          <a:xfrm>
-            <a:off x="914400" y="4553712"/>
-            <a:ext cx="10332720" cy="320040"/>
-          </a:xfrm>
-          <a:prstGeom prst="rect">
-            <a:avLst/>
-          </a:prstGeom>
-          <a:noFill/>
-          <a:ln/>
-        </p:spPr>
-        <p:txBody>
-          <a:bodyPr wrap="square" lIns="0" tIns="0" rIns="0" bIns="0" rtlCol="0" anchor="ctr"/>
-          <a:lstStyle/>
-          <a:p>
-            <a:pPr marL="0" indent="0">
-              <a:buNone/>
-            </a:pPr>
-            <a:r>
-              <a:rPr lang="en-US" sz="1700" b="1" dirty="0">
-                <a:solidFill>
-                  <a:srgbClr val="166534"/>
-                </a:solidFill>
-                <a:latin typeface="Calibri" pitchFamily="34" charset="0"/>
-                <a:ea typeface="Calibri" pitchFamily="34" charset="-122"/>
-                <a:cs typeface="Calibri" pitchFamily="34" charset="-120"/>
-              </a:rPr>
-              <a:t>「評估過、有理由地決定不做」與「沒做完」是兩件事</a:t>
-            </a:r>
-            <a:endParaRPr lang="en-US" sz="1700" dirty="0"/>
-          </a:p>
-        </p:txBody>
-      </p:sp>
-      <p:sp>
-        <p:nvSpPr>
-          <p:cNvPr id="16" name="Text 14"/>
-          <p:cNvSpPr/>
-          <p:nvPr/>
-        </p:nvSpPr>
-        <p:spPr>
-          <a:xfrm>
-            <a:off x="914400" y="4956048"/>
-            <a:ext cx="10332720" cy="548640"/>
-          </a:xfrm>
-          <a:prstGeom prst="rect">
-            <a:avLst/>
-          </a:prstGeom>
-          <a:noFill/>
-          <a:ln/>
-        </p:spPr>
-        <p:txBody>
-          <a:bodyPr wrap="square" lIns="0" tIns="0" rIns="0" bIns="0" rtlCol="0" anchor="ctr"/>
-          <a:lstStyle/>
-          <a:p>
-            <a:pPr marL="0" indent="0">
-              <a:lnSpc>
-                <a:spcPts val="2000"/>
-              </a:lnSpc>
-              <a:buNone/>
-            </a:pPr>
-            <a:r>
-              <a:rPr lang="en-US" sz="1300" dirty="0">
-                <a:solidFill>
-                  <a:srgbClr val="1E293B"/>
-                </a:solidFill>
-                <a:latin typeface="Calibri" pitchFamily="34" charset="0"/>
-                <a:ea typeface="Calibri" pitchFamily="34" charset="-122"/>
-                <a:cs typeface="Calibri" pitchFamily="34" charset="-120"/>
-              </a:rPr>
-              <a:t>架構設計的工作不只是「把東西做出來」，也包含「判斷什麼不該做」。能講出評估的依據與取捨的代價，比硬把六關做滿更接近實務。</a:t>
-            </a:r>
-            <a:endParaRPr lang="en-US" sz="1300" dirty="0"/>
-          </a:p>
-        </p:txBody>
-      </p:sp>
-    </p:spTree>
-  </p:cSld>
-  <p:clrMapOvr>
-    <a:masterClrMapping/>
-  </p:clrMapOvr>
-</p:sld>
-</file>
-
-<file path=ppt/slides/slide13.xml><?xml version="1.0" encoding="utf-8"?>
-<p:sld xmlns:a="http://schemas.openxmlformats.org/drawingml/2006/main" xmlns:r="http://schemas.openxmlformats.org/officeDocument/2006/relationships" xmlns:p="http://schemas.openxmlformats.org/presentationml/2006/main">
   <p:cSld name="Slide 13">
     <p:bg>
       <p:bgPr>
@@ -6489,13 +3481,13 @@
 </p:sld>
 </file>
 
-<file path=ppt/slides/slide14.xml><?xml version="1.0" encoding="utf-8"?>
+<file path=ppt/slides/slide11.xml><?xml version="1.0" encoding="utf-8"?>
 <p:sld xmlns:a="http://schemas.openxmlformats.org/drawingml/2006/main" xmlns:r="http://schemas.openxmlformats.org/officeDocument/2006/relationships" xmlns:p="http://schemas.openxmlformats.org/presentationml/2006/main">
-  <p:cSld name="Slide 15">
+  <p:cSld>
     <p:bg>
       <p:bgPr>
         <a:solidFill>
-          <a:srgbClr val="0F172A"/>
+          <a:schemeClr val="bg1"/>
         </a:solidFill>
         <a:effectLst/>
       </p:bgPr>
@@ -6516,415 +3508,592 @@
       </p:grpSpPr>
       <p:sp>
         <p:nvSpPr>
-          <p:cNvPr id="2" name="Text 0"/>
-          <p:cNvSpPr/>
-          <p:nvPr/>
-        </p:nvSpPr>
-        <p:spPr>
-          <a:xfrm>
-            <a:off x="822960" y="1005840"/>
-            <a:ext cx="10515600" cy="548640"/>
-          </a:xfrm>
-          <a:prstGeom prst="rect">
-            <a:avLst/>
-          </a:prstGeom>
-          <a:noFill/>
-          <a:ln/>
-        </p:spPr>
-        <p:txBody>
-          <a:bodyPr wrap="square" lIns="0" tIns="0" rIns="0" bIns="0" rtlCol="0" anchor="ctr"/>
-          <a:lstStyle/>
-          <a:p>
-            <a:pPr marL="0" indent="0">
-              <a:buNone/>
-            </a:pPr>
-            <a:r>
-              <a:rPr lang="en-US" sz="3200" b="1" dirty="0">
-                <a:solidFill>
-                  <a:srgbClr val="94A3B8"/>
-                </a:solidFill>
-                <a:latin typeface="Calibri" pitchFamily="34" charset="0"/>
-                <a:ea typeface="Calibri" pitchFamily="34" charset="-122"/>
-                <a:cs typeface="Calibri" pitchFamily="34" charset="-120"/>
-              </a:rPr>
-              <a:t>結語</a:t>
-            </a:r>
-            <a:endParaRPr lang="en-US" sz="3200" dirty="0"/>
-          </a:p>
-        </p:txBody>
-      </p:sp>
-      <p:sp>
-        <p:nvSpPr>
-          <p:cNvPr id="3" name="Text 1"/>
-          <p:cNvSpPr/>
-          <p:nvPr/>
-        </p:nvSpPr>
-        <p:spPr>
-          <a:xfrm>
-            <a:off x="822960" y="1737360"/>
-            <a:ext cx="10515600" cy="1188720"/>
-          </a:xfrm>
-          <a:prstGeom prst="rect">
-            <a:avLst/>
-          </a:prstGeom>
-          <a:noFill/>
-          <a:ln/>
-        </p:spPr>
-        <p:txBody>
-          <a:bodyPr wrap="square" lIns="0" tIns="0" rIns="0" bIns="0" rtlCol="0" anchor="ctr"/>
-          <a:lstStyle/>
-          <a:p>
-            <a:pPr marL="0" indent="0">
-              <a:lnSpc>
-                <a:spcPts val="4600"/>
-              </a:lnSpc>
-              <a:buNone/>
-            </a:pPr>
-            <a:r>
-              <a:rPr lang="en-US" sz="3400" b="1" dirty="0">
-                <a:solidFill>
-                  <a:srgbClr val="E2E8F0"/>
-                </a:solidFill>
-                <a:latin typeface="Calibri" pitchFamily="34" charset="0"/>
-                <a:ea typeface="Calibri" pitchFamily="34" charset="-122"/>
-                <a:cs typeface="Calibri" pitchFamily="34" charset="-120"/>
-              </a:rPr>
-              <a:t>這個專題真正的產出，</a:t>
-            </a:r>
-            <a:endParaRPr lang="en-US" sz="3400" dirty="0"/>
-          </a:p>
-          <a:p>
-            <a:pPr marL="0" indent="0">
-              <a:lnSpc>
-                <a:spcPts val="4600"/>
-              </a:lnSpc>
-              <a:buNone/>
-            </a:pPr>
-            <a:r>
-              <a:rPr lang="en-US" sz="3400" b="1" dirty="0">
-                <a:solidFill>
-                  <a:srgbClr val="E2E8F0"/>
-                </a:solidFill>
-                <a:latin typeface="Calibri" pitchFamily="34" charset="0"/>
-                <a:ea typeface="Calibri" pitchFamily="34" charset="-122"/>
-                <a:cs typeface="Calibri" pitchFamily="34" charset="-120"/>
-              </a:rPr>
-              <a:t>不是四個關卡，是兩份紀錄。</a:t>
-            </a:r>
-            <a:endParaRPr lang="en-US" sz="3400" dirty="0"/>
-          </a:p>
-        </p:txBody>
-      </p:sp>
-      <p:sp>
-        <p:nvSpPr>
-          <p:cNvPr id="4" name="Shape 2"/>
-          <p:cNvSpPr/>
-          <p:nvPr/>
-        </p:nvSpPr>
-        <p:spPr>
-          <a:xfrm>
-            <a:off x="822960" y="3200400"/>
-            <a:ext cx="5120640" cy="1737360"/>
-          </a:xfrm>
-          <a:prstGeom prst="roundRect">
-            <a:avLst>
-              <a:gd name="adj" fmla="val 4211"/>
-            </a:avLst>
+          <p:cNvPr id="7" name="Rectangle 6">
+            <a:extLst>
+              <a:ext uri="{FF2B5EF4-FFF2-40B4-BE49-F238E27FC236}">
+                <a16:creationId xmlns:a16="http://schemas.microsoft.com/office/drawing/2014/main" id="{F3060C83-F051-4F0E-ABAD-AA0DFC48B218}"/>
+              </a:ext>
+              <a:ext uri="{C183D7F6-B498-43B3-948B-1728B52AA6E4}">
+                <adec:decorative xmlns:adec="http://schemas.microsoft.com/office/drawing/2017/decorative" val="1"/>
+              </a:ext>
+            </a:extLst>
+          </p:cNvPr>
+          <p:cNvSpPr>
+            <a:spLocks noGrp="1" noRot="1" noChangeAspect="1" noMove="1" noResize="1" noEditPoints="1" noAdjustHandles="1" noChangeArrowheads="1" noChangeShapeType="1" noTextEdit="1"/>
+          </p:cNvSpPr>
+          <p:nvPr>
+            <p:extLst>
+              <p:ext uri="{386F3935-93C4-4BCD-93E2-E3B085C9AB24}">
+                <p16:designElem xmlns:p16="http://schemas.microsoft.com/office/powerpoint/2015/main" val="1"/>
+              </p:ext>
+            </p:extLst>
+          </p:nvPr>
+        </p:nvSpPr>
+        <p:spPr>
+          <a:xfrm>
+            <a:off x="0" y="0"/>
+            <a:ext cx="12192000" cy="6858000"/>
+          </a:xfrm>
+          <a:prstGeom prst="rect">
+            <a:avLst/>
           </a:prstGeom>
           <a:solidFill>
-            <a:srgbClr val="1E293B"/>
+            <a:schemeClr val="bg1"/>
           </a:solidFill>
-          <a:ln w="12700">
-            <a:solidFill>
-              <a:srgbClr val="334155"/>
-            </a:solidFill>
-            <a:prstDash val="solid"/>
+          <a:ln>
+            <a:noFill/>
           </a:ln>
         </p:spPr>
-        <p:txBody>
-          <a:bodyPr/>
-          <a:lstStyle/>
-          <a:p>
+        <p:style>
+          <a:lnRef idx="2">
+            <a:schemeClr val="accent1">
+              <a:shade val="50000"/>
+            </a:schemeClr>
+          </a:lnRef>
+          <a:fillRef idx="1">
+            <a:schemeClr val="accent1"/>
+          </a:fillRef>
+          <a:effectRef idx="0">
+            <a:schemeClr val="accent1"/>
+          </a:effectRef>
+          <a:fontRef idx="minor">
+            <a:schemeClr val="lt1"/>
+          </a:fontRef>
+        </p:style>
+        <p:txBody>
+          <a:bodyPr rtlCol="0" anchor="ctr"/>
+          <a:lstStyle/>
+          <a:p>
+            <a:pPr algn="ctr"/>
+            <a:endParaRPr lang="en-US" dirty="0"/>
+          </a:p>
+        </p:txBody>
+      </p:sp>
+      <p:sp>
+        <p:nvSpPr>
+          <p:cNvPr id="9" name="Freeform: Shape 8">
+            <a:extLst>
+              <a:ext uri="{FF2B5EF4-FFF2-40B4-BE49-F238E27FC236}">
+                <a16:creationId xmlns:a16="http://schemas.microsoft.com/office/drawing/2014/main" id="{83C98ABE-055B-441F-B07E-44F97F083C39}"/>
+              </a:ext>
+              <a:ext uri="{C183D7F6-B498-43B3-948B-1728B52AA6E4}">
+                <adec:decorative xmlns:adec="http://schemas.microsoft.com/office/drawing/2017/decorative" val="1"/>
+              </a:ext>
+            </a:extLst>
+          </p:cNvPr>
+          <p:cNvSpPr>
+            <a:spLocks noGrp="1" noRot="1" noChangeAspect="1" noMove="1" noResize="1" noEditPoints="1" noAdjustHandles="1" noChangeArrowheads="1" noChangeShapeType="1" noTextEdit="1"/>
+          </p:cNvSpPr>
+          <p:nvPr>
+            <p:extLst>
+              <p:ext uri="{386F3935-93C4-4BCD-93E2-E3B085C9AB24}">
+                <p16:designElem xmlns:p16="http://schemas.microsoft.com/office/powerpoint/2015/main" val="1"/>
+              </p:ext>
+            </p:extLst>
+          </p:nvPr>
+        </p:nvSpPr>
+        <p:spPr>
+          <a:xfrm rot="18900000" flipH="1">
+            <a:off x="-376156" y="-253670"/>
+            <a:ext cx="1827638" cy="1376989"/>
+          </a:xfrm>
+          <a:custGeom>
+            <a:avLst/>
+            <a:gdLst>
+              <a:gd name="connsiteX0" fmla="*/ 0 w 1827638"/>
+              <a:gd name="connsiteY0" fmla="*/ 987379 h 1376989"/>
+              <a:gd name="connsiteX1" fmla="*/ 987379 w 1827638"/>
+              <a:gd name="connsiteY1" fmla="*/ 0 h 1376989"/>
+              <a:gd name="connsiteX2" fmla="*/ 1827638 w 1827638"/>
+              <a:gd name="connsiteY2" fmla="*/ 840260 h 1376989"/>
+              <a:gd name="connsiteX3" fmla="*/ 1827638 w 1827638"/>
+              <a:gd name="connsiteY3" fmla="*/ 1376989 h 1376989"/>
+              <a:gd name="connsiteX4" fmla="*/ 0 w 1827638"/>
+              <a:gd name="connsiteY4" fmla="*/ 1376989 h 1376989"/>
+            </a:gdLst>
+            <a:ahLst/>
+            <a:cxnLst>
+              <a:cxn ang="0">
+                <a:pos x="connsiteX0" y="connsiteY0"/>
+              </a:cxn>
+              <a:cxn ang="0">
+                <a:pos x="connsiteX1" y="connsiteY1"/>
+              </a:cxn>
+              <a:cxn ang="0">
+                <a:pos x="connsiteX2" y="connsiteY2"/>
+              </a:cxn>
+              <a:cxn ang="0">
+                <a:pos x="connsiteX3" y="connsiteY3"/>
+              </a:cxn>
+              <a:cxn ang="0">
+                <a:pos x="connsiteX4" y="connsiteY4"/>
+              </a:cxn>
+            </a:cxnLst>
+            <a:rect l="l" t="t" r="r" b="b"/>
+            <a:pathLst>
+              <a:path w="1827638" h="1376989">
+                <a:moveTo>
+                  <a:pt x="0" y="987379"/>
+                </a:moveTo>
+                <a:lnTo>
+                  <a:pt x="987379" y="0"/>
+                </a:lnTo>
+                <a:lnTo>
+                  <a:pt x="1827638" y="840260"/>
+                </a:lnTo>
+                <a:lnTo>
+                  <a:pt x="1827638" y="1376989"/>
+                </a:lnTo>
+                <a:lnTo>
+                  <a:pt x="0" y="1376989"/>
+                </a:lnTo>
+                <a:close/>
+              </a:path>
+            </a:pathLst>
+          </a:custGeom>
+          <a:solidFill>
+            <a:schemeClr val="accent1">
+              <a:alpha val="30000"/>
+            </a:schemeClr>
+          </a:solidFill>
+          <a:ln>
+            <a:noFill/>
+          </a:ln>
+        </p:spPr>
+        <p:style>
+          <a:lnRef idx="2">
+            <a:schemeClr val="accent1">
+              <a:shade val="50000"/>
+            </a:schemeClr>
+          </a:lnRef>
+          <a:fillRef idx="1">
+            <a:schemeClr val="accent1"/>
+          </a:fillRef>
+          <a:effectRef idx="0">
+            <a:schemeClr val="accent1"/>
+          </a:effectRef>
+          <a:fontRef idx="minor">
+            <a:schemeClr val="lt1"/>
+          </a:fontRef>
+        </p:style>
+        <p:txBody>
+          <a:bodyPr rtlCol="0" anchor="ctr"/>
+          <a:lstStyle/>
+          <a:p>
+            <a:pPr algn="ctr"/>
+            <a:endParaRPr lang="en-US" dirty="0"/>
+          </a:p>
+        </p:txBody>
+      </p:sp>
+      <p:sp>
+        <p:nvSpPr>
+          <p:cNvPr id="11" name="Rectangle 10">
+            <a:extLst>
+              <a:ext uri="{FF2B5EF4-FFF2-40B4-BE49-F238E27FC236}">
+                <a16:creationId xmlns:a16="http://schemas.microsoft.com/office/drawing/2014/main" id="{29FDB030-9B49-4CED-8CCD-4D99382388AC}"/>
+              </a:ext>
+              <a:ext uri="{C183D7F6-B498-43B3-948B-1728B52AA6E4}">
+                <adec:decorative xmlns:adec="http://schemas.microsoft.com/office/drawing/2017/decorative" val="1"/>
+              </a:ext>
+            </a:extLst>
+          </p:cNvPr>
+          <p:cNvSpPr>
+            <a:spLocks noGrp="1" noRot="1" noChangeAspect="1" noMove="1" noResize="1" noEditPoints="1" noAdjustHandles="1" noChangeArrowheads="1" noChangeShapeType="1" noTextEdit="1"/>
+          </p:cNvSpPr>
+          <p:nvPr>
+            <p:extLst>
+              <p:ext uri="{386F3935-93C4-4BCD-93E2-E3B085C9AB24}">
+                <p16:designElem xmlns:p16="http://schemas.microsoft.com/office/powerpoint/2015/main" val="1"/>
+              </p:ext>
+            </p:extLst>
+          </p:nvPr>
+        </p:nvSpPr>
+        <p:spPr>
+          <a:xfrm rot="18900000" flipH="1">
+            <a:off x="891641" y="422146"/>
+            <a:ext cx="645368" cy="645368"/>
+          </a:xfrm>
+          <a:prstGeom prst="rect">
+            <a:avLst/>
+          </a:prstGeom>
+          <a:solidFill>
+            <a:schemeClr val="accent1">
+              <a:alpha val="30000"/>
+            </a:schemeClr>
+          </a:solidFill>
+          <a:ln>
+            <a:noFill/>
+          </a:ln>
+        </p:spPr>
+        <p:style>
+          <a:lnRef idx="2">
+            <a:schemeClr val="accent1">
+              <a:shade val="50000"/>
+            </a:schemeClr>
+          </a:lnRef>
+          <a:fillRef idx="1">
+            <a:schemeClr val="accent1"/>
+          </a:fillRef>
+          <a:effectRef idx="0">
+            <a:schemeClr val="accent1"/>
+          </a:effectRef>
+          <a:fontRef idx="minor">
+            <a:schemeClr val="lt1"/>
+          </a:fontRef>
+        </p:style>
+        <p:txBody>
+          <a:bodyPr rtlCol="0" anchor="ctr"/>
+          <a:lstStyle/>
+          <a:p>
+            <a:pPr algn="ctr"/>
             <a:endParaRPr lang="en-US"/>
           </a:p>
         </p:txBody>
       </p:sp>
       <p:sp>
         <p:nvSpPr>
-          <p:cNvPr id="5" name="Text 3"/>
-          <p:cNvSpPr/>
-          <p:nvPr/>
-        </p:nvSpPr>
-        <p:spPr>
-          <a:xfrm>
-            <a:off x="1188720" y="3401568"/>
-            <a:ext cx="4389120" cy="320040"/>
-          </a:xfrm>
-          <a:prstGeom prst="rect">
-            <a:avLst/>
-          </a:prstGeom>
-          <a:noFill/>
-          <a:ln/>
-        </p:spPr>
-        <p:txBody>
-          <a:bodyPr wrap="square" lIns="0" tIns="0" rIns="0" bIns="0" rtlCol="0" anchor="ctr"/>
-          <a:lstStyle/>
-          <a:p>
-            <a:pPr marL="0" indent="0">
-              <a:buNone/>
-            </a:pPr>
-            <a:r>
-              <a:rPr lang="en-US" sz="1600" b="1" dirty="0">
-                <a:solidFill>
-                  <a:srgbClr val="38BDF8"/>
-                </a:solidFill>
-                <a:latin typeface="Calibri" pitchFamily="34" charset="0"/>
-                <a:ea typeface="Calibri" pitchFamily="34" charset="-122"/>
-                <a:cs typeface="Calibri" pitchFamily="34" charset="-120"/>
-              </a:rPr>
-              <a:t>關 0 的基準線</a:t>
-            </a:r>
-            <a:endParaRPr lang="en-US" sz="1600" dirty="0"/>
-          </a:p>
-        </p:txBody>
-      </p:sp>
-      <p:sp>
-        <p:nvSpPr>
-          <p:cNvPr id="6" name="Text 4"/>
-          <p:cNvSpPr/>
-          <p:nvPr/>
-        </p:nvSpPr>
-        <p:spPr>
-          <a:xfrm>
-            <a:off x="1188720" y="3794760"/>
-            <a:ext cx="4389120" cy="914400"/>
-          </a:xfrm>
-          <a:prstGeom prst="rect">
-            <a:avLst/>
-          </a:prstGeom>
-          <a:noFill/>
-          <a:ln/>
-        </p:spPr>
-        <p:txBody>
-          <a:bodyPr wrap="square" lIns="0" tIns="0" rIns="0" bIns="0" rtlCol="0" anchor="ctr"/>
-          <a:lstStyle/>
-          <a:p>
-            <a:pPr marL="0" indent="0">
-              <a:lnSpc>
-                <a:spcPts val="2000"/>
-              </a:lnSpc>
-              <a:buNone/>
-            </a:pPr>
-            <a:r>
-              <a:rPr lang="en-US" sz="1300" dirty="0">
-                <a:solidFill>
-                  <a:srgbClr val="E2E8F0"/>
-                </a:solidFill>
-                <a:latin typeface="Calibri" pitchFamily="34" charset="0"/>
-                <a:ea typeface="Calibri" pitchFamily="34" charset="-122"/>
-                <a:cs typeface="Calibri" pitchFamily="34" charset="-120"/>
-              </a:rPr>
-              <a:t>18 步、16 分鐘、2 次失敗、版本無法追溯。</a:t>
-            </a:r>
-            <a:endParaRPr lang="en-US" sz="1300" dirty="0"/>
-          </a:p>
-          <a:p>
-            <a:pPr marL="0" indent="0">
-              <a:lnSpc>
-                <a:spcPts val="2000"/>
-              </a:lnSpc>
-              <a:buNone/>
-            </a:pPr>
-            <a:r>
-              <a:rPr lang="en-US" sz="1300" dirty="0">
-                <a:solidFill>
-                  <a:srgbClr val="E2E8F0"/>
-                </a:solidFill>
-                <a:latin typeface="Calibri" pitchFamily="34" charset="0"/>
-                <a:ea typeface="Calibri" pitchFamily="34" charset="-122"/>
-                <a:cs typeface="Calibri" pitchFamily="34" charset="-120"/>
-              </a:rPr>
-              <a:t>沒有這四個數字，後面四關就只是四個工具。</a:t>
-            </a:r>
-            <a:endParaRPr lang="en-US" sz="1300" dirty="0"/>
-          </a:p>
-        </p:txBody>
-      </p:sp>
-      <p:sp>
-        <p:nvSpPr>
-          <p:cNvPr id="7" name="Shape 5"/>
-          <p:cNvSpPr/>
-          <p:nvPr/>
-        </p:nvSpPr>
-        <p:spPr>
-          <a:xfrm>
-            <a:off x="6217920" y="3200400"/>
-            <a:ext cx="5120640" cy="1737360"/>
-          </a:xfrm>
-          <a:prstGeom prst="roundRect">
-            <a:avLst>
-              <a:gd name="adj" fmla="val 4211"/>
-            </a:avLst>
+          <p:cNvPr id="13" name="Rectangle 12">
+            <a:extLst>
+              <a:ext uri="{FF2B5EF4-FFF2-40B4-BE49-F238E27FC236}">
+                <a16:creationId xmlns:a16="http://schemas.microsoft.com/office/drawing/2014/main" id="{3783CA14-24A1-485C-8B30-D6A5D87987AD}"/>
+              </a:ext>
+              <a:ext uri="{C183D7F6-B498-43B3-948B-1728B52AA6E4}">
+                <adec:decorative xmlns:adec="http://schemas.microsoft.com/office/drawing/2017/decorative" val="1"/>
+              </a:ext>
+            </a:extLst>
+          </p:cNvPr>
+          <p:cNvSpPr>
+            <a:spLocks noGrp="1" noRot="1" noChangeAspect="1" noMove="1" noResize="1" noEditPoints="1" noAdjustHandles="1" noChangeArrowheads="1" noChangeShapeType="1" noTextEdit="1"/>
+          </p:cNvSpPr>
+          <p:nvPr>
+            <p:extLst>
+              <p:ext uri="{386F3935-93C4-4BCD-93E2-E3B085C9AB24}">
+                <p16:designElem xmlns:p16="http://schemas.microsoft.com/office/powerpoint/2015/main" val="1"/>
+              </p:ext>
+            </p:extLst>
+          </p:nvPr>
+        </p:nvSpPr>
+        <p:spPr>
+          <a:xfrm rot="18900000" flipH="1">
+            <a:off x="10043482" y="655140"/>
+            <a:ext cx="687472" cy="687472"/>
+          </a:xfrm>
+          <a:prstGeom prst="rect">
+            <a:avLst/>
           </a:prstGeom>
           <a:solidFill>
-            <a:srgbClr val="1E293B"/>
+            <a:schemeClr val="accent4">
+              <a:alpha val="30000"/>
+            </a:schemeClr>
           </a:solidFill>
-          <a:ln w="12700">
-            <a:solidFill>
-              <a:srgbClr val="334155"/>
-            </a:solidFill>
-            <a:prstDash val="solid"/>
+          <a:ln>
+            <a:noFill/>
           </a:ln>
         </p:spPr>
-        <p:txBody>
-          <a:bodyPr/>
-          <a:lstStyle/>
-          <a:p>
+        <p:style>
+          <a:lnRef idx="2">
+            <a:schemeClr val="accent1">
+              <a:shade val="50000"/>
+            </a:schemeClr>
+          </a:lnRef>
+          <a:fillRef idx="1">
+            <a:schemeClr val="accent1"/>
+          </a:fillRef>
+          <a:effectRef idx="0">
+            <a:schemeClr val="accent1"/>
+          </a:effectRef>
+          <a:fontRef idx="minor">
+            <a:schemeClr val="lt1"/>
+          </a:fontRef>
+        </p:style>
+        <p:txBody>
+          <a:bodyPr rtlCol="0" anchor="ctr"/>
+          <a:lstStyle/>
+          <a:p>
+            <a:pPr algn="ctr"/>
             <a:endParaRPr lang="en-US"/>
           </a:p>
         </p:txBody>
       </p:sp>
       <p:sp>
         <p:nvSpPr>
-          <p:cNvPr id="8" name="Text 6"/>
-          <p:cNvSpPr/>
-          <p:nvPr/>
-        </p:nvSpPr>
-        <p:spPr>
-          <a:xfrm>
-            <a:off x="6583680" y="3401568"/>
-            <a:ext cx="4389120" cy="320040"/>
-          </a:xfrm>
-          <a:prstGeom prst="rect">
-            <a:avLst/>
-          </a:prstGeom>
-          <a:noFill/>
-          <a:ln/>
-        </p:spPr>
-        <p:txBody>
-          <a:bodyPr wrap="square" lIns="0" tIns="0" rIns="0" bIns="0" rtlCol="0" anchor="ctr"/>
-          <a:lstStyle/>
-          <a:p>
-            <a:pPr marL="0" indent="0">
-              <a:buNone/>
-            </a:pPr>
-            <a:r>
-              <a:rPr lang="en-US" sz="1600" b="1" dirty="0">
-                <a:solidFill>
-                  <a:srgbClr val="38BDF8"/>
-                </a:solidFill>
-                <a:latin typeface="Calibri" pitchFamily="34" charset="0"/>
-                <a:ea typeface="Calibri" pitchFamily="34" charset="-122"/>
-                <a:cs typeface="Calibri" pitchFamily="34" charset="-120"/>
-              </a:rPr>
-              <a:t>六次失敗的除錯歷程</a:t>
-            </a:r>
-            <a:endParaRPr lang="en-US" sz="1600" dirty="0"/>
-          </a:p>
-        </p:txBody>
-      </p:sp>
-      <p:sp>
-        <p:nvSpPr>
-          <p:cNvPr id="9" name="Text 7"/>
-          <p:cNvSpPr/>
-          <p:nvPr/>
-        </p:nvSpPr>
-        <p:spPr>
-          <a:xfrm>
-            <a:off x="6583680" y="3794760"/>
-            <a:ext cx="4389120" cy="914400"/>
-          </a:xfrm>
-          <a:prstGeom prst="rect">
-            <a:avLst/>
-          </a:prstGeom>
-          <a:noFill/>
-          <a:ln/>
-        </p:spPr>
-        <p:txBody>
-          <a:bodyPr wrap="square" lIns="0" tIns="0" rIns="0" bIns="0" rtlCol="0" anchor="ctr"/>
-          <a:lstStyle/>
-          <a:p>
-            <a:pPr marL="0" indent="0">
-              <a:lnSpc>
-                <a:spcPts val="2000"/>
-              </a:lnSpc>
-              <a:buNone/>
-            </a:pPr>
-            <a:r>
-              <a:rPr lang="en-US" sz="1300" dirty="0">
-                <a:solidFill>
-                  <a:srgbClr val="E2E8F0"/>
-                </a:solidFill>
-                <a:latin typeface="Calibri" pitchFamily="34" charset="0"/>
-                <a:ea typeface="Calibri" pitchFamily="34" charset="-122"/>
-                <a:cs typeface="Calibri" pitchFamily="34" charset="-120"/>
-              </a:rPr>
-              <a:t>三次推測全錯，一次量測命中。</a:t>
-            </a:r>
-            <a:endParaRPr lang="en-US" sz="1300" dirty="0"/>
-          </a:p>
-          <a:p>
-            <a:pPr marL="0" indent="0">
-              <a:lnSpc>
-                <a:spcPts val="2000"/>
-              </a:lnSpc>
-              <a:buNone/>
-            </a:pPr>
-            <a:r>
-              <a:rPr lang="en-US" sz="1300" dirty="0">
-                <a:solidFill>
-                  <a:srgbClr val="E2E8F0"/>
-                </a:solidFill>
-                <a:latin typeface="Calibri" pitchFamily="34" charset="0"/>
-                <a:ea typeface="Calibri" pitchFamily="34" charset="-122"/>
-                <a:cs typeface="Calibri" pitchFamily="34" charset="-120"/>
-              </a:rPr>
-              <a:t>它證明的不是我會用工具，是我會找出問題。</a:t>
-            </a:r>
-            <a:endParaRPr lang="en-US" sz="1300" dirty="0"/>
-          </a:p>
-        </p:txBody>
-      </p:sp>
-      <p:sp>
-        <p:nvSpPr>
-          <p:cNvPr id="10" name="Text 8"/>
-          <p:cNvSpPr/>
-          <p:nvPr/>
-        </p:nvSpPr>
-        <p:spPr>
-          <a:xfrm>
-            <a:off x="822960" y="5349240"/>
-            <a:ext cx="10515600" cy="365760"/>
-          </a:xfrm>
-          <a:prstGeom prst="rect">
-            <a:avLst/>
-          </a:prstGeom>
-          <a:noFill/>
-          <a:ln/>
-        </p:spPr>
-        <p:txBody>
-          <a:bodyPr wrap="square" lIns="0" tIns="0" rIns="0" bIns="0" rtlCol="0" anchor="ctr"/>
-          <a:lstStyle/>
-          <a:p>
-            <a:pPr marL="0" indent="0">
-              <a:buNone/>
-            </a:pPr>
-            <a:r>
-              <a:rPr lang="en-US" sz="1500" dirty="0">
-                <a:solidFill>
-                  <a:srgbClr val="94A3B8"/>
-                </a:solidFill>
-                <a:latin typeface="Calibri" pitchFamily="34" charset="0"/>
-                <a:ea typeface="Calibri" pitchFamily="34" charset="-122"/>
-                <a:cs typeface="Calibri" pitchFamily="34" charset="-120"/>
-              </a:rPr>
-              <a:t>感謝聆聽　·　github.com/CarlosChangYao/aws-cicd-pipeline</a:t>
-            </a:r>
-            <a:endParaRPr lang="en-US" sz="1500" dirty="0"/>
+          <p:cNvPr id="15" name="Freeform: Shape 14">
+            <a:extLst>
+              <a:ext uri="{FF2B5EF4-FFF2-40B4-BE49-F238E27FC236}">
+                <a16:creationId xmlns:a16="http://schemas.microsoft.com/office/drawing/2014/main" id="{9A97C86A-04D6-40F7-AE84-31AB43E6A846}"/>
+              </a:ext>
+              <a:ext uri="{C183D7F6-B498-43B3-948B-1728B52AA6E4}">
+                <adec:decorative xmlns:adec="http://schemas.microsoft.com/office/drawing/2017/decorative" val="1"/>
+              </a:ext>
+            </a:extLst>
+          </p:cNvPr>
+          <p:cNvSpPr>
+            <a:spLocks noGrp="1" noRot="1" noChangeAspect="1" noMove="1" noResize="1" noEditPoints="1" noAdjustHandles="1" noChangeArrowheads="1" noChangeShapeType="1" noTextEdit="1"/>
+          </p:cNvSpPr>
+          <p:nvPr>
+            <p:extLst>
+              <p:ext uri="{386F3935-93C4-4BCD-93E2-E3B085C9AB24}">
+                <p16:designElem xmlns:p16="http://schemas.microsoft.com/office/powerpoint/2015/main" val="1"/>
+              </p:ext>
+            </p:extLst>
+          </p:nvPr>
+        </p:nvSpPr>
+        <p:spPr>
+          <a:xfrm rot="10800000" flipH="1">
+            <a:off x="9356643" y="0"/>
+            <a:ext cx="2835357" cy="1480837"/>
+          </a:xfrm>
+          <a:custGeom>
+            <a:avLst/>
+            <a:gdLst>
+              <a:gd name="connsiteX0" fmla="*/ 2835357 w 2835357"/>
+              <a:gd name="connsiteY0" fmla="*/ 1480837 h 1480837"/>
+              <a:gd name="connsiteX1" fmla="*/ 0 w 2835357"/>
+              <a:gd name="connsiteY1" fmla="*/ 1480837 h 1480837"/>
+              <a:gd name="connsiteX2" fmla="*/ 1552727 w 2835357"/>
+              <a:gd name="connsiteY2" fmla="*/ 0 h 1480837"/>
+              <a:gd name="connsiteX3" fmla="*/ 2835357 w 2835357"/>
+              <a:gd name="connsiteY3" fmla="*/ 1223245 h 1480837"/>
+            </a:gdLst>
+            <a:ahLst/>
+            <a:cxnLst>
+              <a:cxn ang="0">
+                <a:pos x="connsiteX0" y="connsiteY0"/>
+              </a:cxn>
+              <a:cxn ang="0">
+                <a:pos x="connsiteX1" y="connsiteY1"/>
+              </a:cxn>
+              <a:cxn ang="0">
+                <a:pos x="connsiteX2" y="connsiteY2"/>
+              </a:cxn>
+              <a:cxn ang="0">
+                <a:pos x="connsiteX3" y="connsiteY3"/>
+              </a:cxn>
+            </a:cxnLst>
+            <a:rect l="l" t="t" r="r" b="b"/>
+            <a:pathLst>
+              <a:path w="2835357" h="1480837">
+                <a:moveTo>
+                  <a:pt x="2835357" y="1480837"/>
+                </a:moveTo>
+                <a:lnTo>
+                  <a:pt x="0" y="1480837"/>
+                </a:lnTo>
+                <a:lnTo>
+                  <a:pt x="1552727" y="0"/>
+                </a:lnTo>
+                <a:lnTo>
+                  <a:pt x="2835357" y="1223245"/>
+                </a:lnTo>
+                <a:close/>
+              </a:path>
+            </a:pathLst>
+          </a:custGeom>
+          <a:solidFill>
+            <a:schemeClr val="accent4">
+              <a:alpha val="30000"/>
+            </a:schemeClr>
+          </a:solidFill>
+          <a:ln>
+            <a:noFill/>
+          </a:ln>
+        </p:spPr>
+        <p:style>
+          <a:lnRef idx="2">
+            <a:schemeClr val="accent1">
+              <a:shade val="50000"/>
+            </a:schemeClr>
+          </a:lnRef>
+          <a:fillRef idx="1">
+            <a:schemeClr val="accent1"/>
+          </a:fillRef>
+          <a:effectRef idx="0">
+            <a:schemeClr val="accent1"/>
+          </a:effectRef>
+          <a:fontRef idx="minor">
+            <a:schemeClr val="lt1"/>
+          </a:fontRef>
+        </p:style>
+        <p:txBody>
+          <a:bodyPr wrap="square" rtlCol="0" anchor="ctr">
+            <a:noAutofit/>
+          </a:bodyPr>
+          <a:lstStyle/>
+          <a:p>
+            <a:pPr algn="ctr"/>
+            <a:endParaRPr lang="en-US" dirty="0"/>
+          </a:p>
+        </p:txBody>
+      </p:sp>
+      <p:sp>
+        <p:nvSpPr>
+          <p:cNvPr id="17" name="Isosceles Triangle 16">
+            <a:extLst>
+              <a:ext uri="{FF2B5EF4-FFF2-40B4-BE49-F238E27FC236}">
+                <a16:creationId xmlns:a16="http://schemas.microsoft.com/office/drawing/2014/main" id="{FF9F2414-84E8-453E-B1F3-389FDE8192D9}"/>
+              </a:ext>
+              <a:ext uri="{C183D7F6-B498-43B3-948B-1728B52AA6E4}">
+                <adec:decorative xmlns:adec="http://schemas.microsoft.com/office/drawing/2017/decorative" val="1"/>
+              </a:ext>
+            </a:extLst>
+          </p:cNvPr>
+          <p:cNvSpPr>
+            <a:spLocks noGrp="1" noRot="1" noChangeAspect="1" noMove="1" noResize="1" noEditPoints="1" noAdjustHandles="1" noChangeArrowheads="1" noChangeShapeType="1" noTextEdit="1"/>
+          </p:cNvSpPr>
+          <p:nvPr>
+            <p:extLst>
+              <p:ext uri="{386F3935-93C4-4BCD-93E2-E3B085C9AB24}">
+                <p16:designElem xmlns:p16="http://schemas.microsoft.com/office/powerpoint/2015/main" val="1"/>
+              </p:ext>
+            </p:extLst>
+          </p:nvPr>
+        </p:nvSpPr>
+        <p:spPr>
+          <a:xfrm flipH="1">
+            <a:off x="7976344" y="6115501"/>
+            <a:ext cx="1494513" cy="742499"/>
+          </a:xfrm>
+          <a:prstGeom prst="triangle">
+            <a:avLst/>
+          </a:prstGeom>
+          <a:solidFill>
+            <a:schemeClr val="accent1">
+              <a:alpha val="30000"/>
+            </a:schemeClr>
+          </a:solidFill>
+          <a:ln>
+            <a:noFill/>
+          </a:ln>
+        </p:spPr>
+        <p:style>
+          <a:lnRef idx="2">
+            <a:schemeClr val="accent1">
+              <a:shade val="50000"/>
+            </a:schemeClr>
+          </a:lnRef>
+          <a:fillRef idx="1">
+            <a:schemeClr val="accent1"/>
+          </a:fillRef>
+          <a:effectRef idx="0">
+            <a:schemeClr val="accent1"/>
+          </a:effectRef>
+          <a:fontRef idx="minor">
+            <a:schemeClr val="lt1"/>
+          </a:fontRef>
+        </p:style>
+        <p:txBody>
+          <a:bodyPr rtlCol="0" anchor="ctr"/>
+          <a:lstStyle/>
+          <a:p>
+            <a:pPr algn="ctr"/>
+            <a:endParaRPr lang="en-US"/>
+          </a:p>
+        </p:txBody>
+      </p:sp>
+      <p:pic>
+        <p:nvPicPr>
+          <p:cNvPr id="2" name="Picture 1">
+            <a:extLst>
+              <a:ext uri="{FF2B5EF4-FFF2-40B4-BE49-F238E27FC236}">
+                <a16:creationId xmlns:a16="http://schemas.microsoft.com/office/drawing/2014/main" id="{BC7F080A-9453-B3A8-AEE0-8D3FE3F4CD49}"/>
+              </a:ext>
+            </a:extLst>
+          </p:cNvPr>
+          <p:cNvPicPr>
+            <a:picLocks noChangeAspect="1"/>
+          </p:cNvPicPr>
+          <p:nvPr/>
+        </p:nvPicPr>
+        <p:blipFill>
+          <a:blip r:embed="rId2"/>
+          <a:stretch>
+            <a:fillRect/>
+          </a:stretch>
+        </p:blipFill>
+        <p:spPr>
+          <a:xfrm>
+            <a:off x="2894239" y="643467"/>
+            <a:ext cx="6403522" cy="5571065"/>
+          </a:xfrm>
+          <a:prstGeom prst="rect">
+            <a:avLst/>
+          </a:prstGeom>
+          <a:ln>
+            <a:noFill/>
+          </a:ln>
+        </p:spPr>
+      </p:pic>
+      <p:sp>
+        <p:nvSpPr>
+          <p:cNvPr id="19" name="Isosceles Triangle 18">
+            <a:extLst>
+              <a:ext uri="{FF2B5EF4-FFF2-40B4-BE49-F238E27FC236}">
+                <a16:creationId xmlns:a16="http://schemas.microsoft.com/office/drawing/2014/main" id="{3ECA69A1-7536-43AC-85EF-C7106179F5ED}"/>
+              </a:ext>
+              <a:ext uri="{C183D7F6-B498-43B3-948B-1728B52AA6E4}">
+                <adec:decorative xmlns:adec="http://schemas.microsoft.com/office/drawing/2017/decorative" val="1"/>
+              </a:ext>
+            </a:extLst>
+          </p:cNvPr>
+          <p:cNvSpPr>
+            <a:spLocks noGrp="1" noRot="1" noChangeAspect="1" noMove="1" noResize="1" noEditPoints="1" noAdjustHandles="1" noChangeArrowheads="1" noChangeShapeType="1" noTextEdit="1"/>
+          </p:cNvSpPr>
+          <p:nvPr>
+            <p:extLst>
+              <p:ext uri="{386F3935-93C4-4BCD-93E2-E3B085C9AB24}">
+                <p16:designElem xmlns:p16="http://schemas.microsoft.com/office/powerpoint/2015/main" val="1"/>
+              </p:ext>
+            </p:extLst>
+          </p:nvPr>
+        </p:nvSpPr>
+        <p:spPr>
+          <a:xfrm flipH="1">
+            <a:off x="7604080" y="6453143"/>
+            <a:ext cx="814903" cy="404857"/>
+          </a:xfrm>
+          <a:prstGeom prst="triangle">
+            <a:avLst/>
+          </a:prstGeom>
+          <a:solidFill>
+            <a:schemeClr val="accent1">
+              <a:alpha val="30000"/>
+            </a:schemeClr>
+          </a:solidFill>
+          <a:ln>
+            <a:noFill/>
+          </a:ln>
+        </p:spPr>
+        <p:style>
+          <a:lnRef idx="2">
+            <a:schemeClr val="accent1">
+              <a:shade val="50000"/>
+            </a:schemeClr>
+          </a:lnRef>
+          <a:fillRef idx="1">
+            <a:schemeClr val="accent1"/>
+          </a:fillRef>
+          <a:effectRef idx="0">
+            <a:schemeClr val="accent1"/>
+          </a:effectRef>
+          <a:fontRef idx="minor">
+            <a:schemeClr val="lt1"/>
+          </a:fontRef>
+        </p:style>
+        <p:txBody>
+          <a:bodyPr rtlCol="0" anchor="ctr"/>
+          <a:lstStyle/>
+          <a:p>
+            <a:pPr algn="ctr"/>
+            <a:endParaRPr lang="en-US"/>
           </a:p>
         </p:txBody>
       </p:sp>
     </p:spTree>
+    <p:extLst>
+      <p:ext uri="{BB962C8B-B14F-4D97-AF65-F5344CB8AC3E}">
+        <p14:creationId xmlns:p14="http://schemas.microsoft.com/office/powerpoint/2010/main" val="3267671582"/>
+      </p:ext>
+    </p:extLst>
   </p:cSld>
   <p:clrMapOvr>
     <a:masterClrMapping/>
@@ -6932,13 +4101,192 @@
 </p:sld>
 </file>
 
-<file path=ppt/slides/slide2.xml><?xml version="1.0" encoding="utf-8"?>
+<file path=ppt/slides/slide12.xml><?xml version="1.0" encoding="utf-8"?>
 <p:sld xmlns:a="http://schemas.openxmlformats.org/drawingml/2006/main" xmlns:r="http://schemas.openxmlformats.org/officeDocument/2006/relationships" xmlns:p="http://schemas.openxmlformats.org/presentationml/2006/main">
-  <p:cSld name="Slide 2">
+  <p:cSld>
+    <p:spTree>
+      <p:nvGrpSpPr>
+        <p:cNvPr id="1" name=""/>
+        <p:cNvGrpSpPr/>
+        <p:nvPr/>
+      </p:nvGrpSpPr>
+      <p:grpSpPr>
+        <a:xfrm>
+          <a:off x="0" y="0"/>
+          <a:ext cx="0" cy="0"/>
+          <a:chOff x="0" y="0"/>
+          <a:chExt cx="0" cy="0"/>
+        </a:xfrm>
+      </p:grpSpPr>
+      <p:pic>
+        <p:nvPicPr>
+          <p:cNvPr id="2" name="Picture 1">
+            <a:extLst>
+              <a:ext uri="{FF2B5EF4-FFF2-40B4-BE49-F238E27FC236}">
+                <a16:creationId xmlns:a16="http://schemas.microsoft.com/office/drawing/2014/main" id="{9E42B560-CDB1-CE0D-1E8B-E3F83CD3B6CF}"/>
+              </a:ext>
+            </a:extLst>
+          </p:cNvPr>
+          <p:cNvPicPr>
+            <a:picLocks noChangeAspect="1"/>
+          </p:cNvPicPr>
+          <p:nvPr/>
+        </p:nvPicPr>
+        <p:blipFill>
+          <a:blip r:embed="rId2"/>
+          <a:stretch>
+            <a:fillRect/>
+          </a:stretch>
+        </p:blipFill>
+        <p:spPr>
+          <a:xfrm>
+            <a:off x="2209800" y="9747"/>
+            <a:ext cx="7772400" cy="3080715"/>
+          </a:xfrm>
+          <a:prstGeom prst="rect">
+            <a:avLst/>
+          </a:prstGeom>
+        </p:spPr>
+      </p:pic>
+      <p:pic>
+        <p:nvPicPr>
+          <p:cNvPr id="4" name="Picture 3">
+            <a:extLst>
+              <a:ext uri="{FF2B5EF4-FFF2-40B4-BE49-F238E27FC236}">
+                <a16:creationId xmlns:a16="http://schemas.microsoft.com/office/drawing/2014/main" id="{34852686-00DB-2646-32D4-4114B1D6BAC1}"/>
+              </a:ext>
+            </a:extLst>
+          </p:cNvPr>
+          <p:cNvPicPr>
+            <a:picLocks noChangeAspect="1"/>
+          </p:cNvPicPr>
+          <p:nvPr/>
+        </p:nvPicPr>
+        <p:blipFill>
+          <a:blip r:embed="rId3"/>
+          <a:stretch>
+            <a:fillRect/>
+          </a:stretch>
+        </p:blipFill>
+        <p:spPr>
+          <a:xfrm>
+            <a:off x="2209800" y="3429000"/>
+            <a:ext cx="7772400" cy="3419253"/>
+          </a:xfrm>
+          <a:prstGeom prst="rect">
+            <a:avLst/>
+          </a:prstGeom>
+        </p:spPr>
+      </p:pic>
+      <p:cxnSp>
+        <p:nvCxnSpPr>
+          <p:cNvPr id="6" name="Straight Connector 5">
+            <a:extLst>
+              <a:ext uri="{FF2B5EF4-FFF2-40B4-BE49-F238E27FC236}">
+                <a16:creationId xmlns:a16="http://schemas.microsoft.com/office/drawing/2014/main" id="{C5219B3F-D8A7-2D73-8272-D21537E05A0E}"/>
+              </a:ext>
+            </a:extLst>
+          </p:cNvPr>
+          <p:cNvCxnSpPr>
+            <a:cxnSpLocks/>
+          </p:cNvCxnSpPr>
+          <p:nvPr/>
+        </p:nvCxnSpPr>
+        <p:spPr>
+          <a:xfrm>
+            <a:off x="2209800" y="3265714"/>
+            <a:ext cx="7772400" cy="0"/>
+          </a:xfrm>
+          <a:prstGeom prst="line">
+            <a:avLst/>
+          </a:prstGeom>
+          <a:ln w="38100"/>
+        </p:spPr>
+        <p:style>
+          <a:lnRef idx="1">
+            <a:schemeClr val="accent1"/>
+          </a:lnRef>
+          <a:fillRef idx="0">
+            <a:schemeClr val="accent1"/>
+          </a:fillRef>
+          <a:effectRef idx="0">
+            <a:schemeClr val="accent1"/>
+          </a:effectRef>
+          <a:fontRef idx="minor">
+            <a:schemeClr val="tx1"/>
+          </a:fontRef>
+        </p:style>
+      </p:cxnSp>
+      <p:sp>
+        <p:nvSpPr>
+          <p:cNvPr id="9" name="Frame 8">
+            <a:extLst>
+              <a:ext uri="{FF2B5EF4-FFF2-40B4-BE49-F238E27FC236}">
+                <a16:creationId xmlns:a16="http://schemas.microsoft.com/office/drawing/2014/main" id="{276C0C86-71FE-2B4F-A030-42F66CF7B308}"/>
+              </a:ext>
+            </a:extLst>
+          </p:cNvPr>
+          <p:cNvSpPr/>
+          <p:nvPr/>
+        </p:nvSpPr>
+        <p:spPr>
+          <a:xfrm>
+            <a:off x="2209800" y="3349631"/>
+            <a:ext cx="7772400" cy="643636"/>
+          </a:xfrm>
+          <a:prstGeom prst="frame">
+            <a:avLst/>
+          </a:prstGeom>
+        </p:spPr>
+        <p:style>
+          <a:lnRef idx="2">
+            <a:schemeClr val="accent1">
+              <a:shade val="15000"/>
+            </a:schemeClr>
+          </a:lnRef>
+          <a:fillRef idx="1">
+            <a:schemeClr val="accent1"/>
+          </a:fillRef>
+          <a:effectRef idx="0">
+            <a:schemeClr val="accent1"/>
+          </a:effectRef>
+          <a:fontRef idx="minor">
+            <a:schemeClr val="lt1"/>
+          </a:fontRef>
+        </p:style>
+        <p:txBody>
+          <a:bodyPr rtlCol="0" anchor="ctr"/>
+          <a:lstStyle/>
+          <a:p>
+            <a:pPr algn="ctr"/>
+            <a:endParaRPr lang="en-US">
+              <a:solidFill>
+                <a:schemeClr val="tx1"/>
+              </a:solidFill>
+            </a:endParaRPr>
+          </a:p>
+        </p:txBody>
+      </p:sp>
+    </p:spTree>
+    <p:extLst>
+      <p:ext uri="{BB962C8B-B14F-4D97-AF65-F5344CB8AC3E}">
+        <p14:creationId xmlns:p14="http://schemas.microsoft.com/office/powerpoint/2010/main" val="1455074357"/>
+      </p:ext>
+    </p:extLst>
+  </p:cSld>
+  <p:clrMapOvr>
+    <a:masterClrMapping/>
+  </p:clrMapOvr>
+</p:sld>
+</file>
+
+<file path=ppt/slides/slide13.xml><?xml version="1.0" encoding="utf-8"?>
+<p:sld xmlns:a="http://schemas.openxmlformats.org/drawingml/2006/main" xmlns:r="http://schemas.openxmlformats.org/officeDocument/2006/relationships" xmlns:p="http://schemas.openxmlformats.org/presentationml/2006/main">
+  <p:cSld>
     <p:bg>
       <p:bgPr>
         <a:solidFill>
-          <a:srgbClr val="0F172A"/>
+          <a:schemeClr val="bg1"/>
         </a:solidFill>
         <a:effectLst/>
       </p:bgPr>
@@ -6959,241 +4307,592 @@
       </p:grpSpPr>
       <p:sp>
         <p:nvSpPr>
-          <p:cNvPr id="2" name="Text 0"/>
-          <p:cNvSpPr/>
-          <p:nvPr/>
-        </p:nvSpPr>
-        <p:spPr>
-          <a:xfrm>
-            <a:off x="822960" y="1005840"/>
-            <a:ext cx="10515600" cy="457200"/>
-          </a:xfrm>
-          <a:prstGeom prst="rect">
-            <a:avLst/>
-          </a:prstGeom>
-          <a:noFill/>
-          <a:ln/>
-        </p:spPr>
-        <p:txBody>
-          <a:bodyPr wrap="square" lIns="0" tIns="0" rIns="0" bIns="0" rtlCol="0" anchor="ctr"/>
-          <a:lstStyle/>
-          <a:p>
-            <a:pPr marL="0" indent="0">
-              <a:buNone/>
-            </a:pPr>
-            <a:r>
-              <a:rPr lang="en-US" sz="1600" b="1" dirty="0">
-                <a:solidFill>
-                  <a:srgbClr val="94A3B8"/>
-                </a:solidFill>
-                <a:latin typeface="Calibri" pitchFamily="34" charset="0"/>
-                <a:ea typeface="Calibri" pitchFamily="34" charset="-122"/>
-                <a:cs typeface="Calibri" pitchFamily="34" charset="-120"/>
-              </a:rPr>
-              <a:t>這個專題在回答一個問題</a:t>
-            </a:r>
-            <a:endParaRPr lang="en-US" sz="1600" dirty="0"/>
-          </a:p>
-        </p:txBody>
-      </p:sp>
-      <p:sp>
-        <p:nvSpPr>
-          <p:cNvPr id="3" name="Text 1"/>
-          <p:cNvSpPr/>
-          <p:nvPr/>
-        </p:nvSpPr>
-        <p:spPr>
-          <a:xfrm>
-            <a:off x="822960" y="1691640"/>
-            <a:ext cx="10515600" cy="2377440"/>
-          </a:xfrm>
-          <a:prstGeom prst="rect">
-            <a:avLst/>
-          </a:prstGeom>
-          <a:noFill/>
-          <a:ln/>
-        </p:spPr>
-        <p:txBody>
-          <a:bodyPr wrap="square" lIns="0" tIns="0" rIns="0" bIns="0" rtlCol="0" anchor="ctr"/>
-          <a:lstStyle/>
-          <a:p>
-            <a:pPr marL="0" indent="0">
-              <a:lnSpc>
-                <a:spcPts val="5200"/>
-              </a:lnSpc>
-              <a:buNone/>
-            </a:pPr>
-            <a:r>
-              <a:rPr lang="en-US" sz="4000" b="1" dirty="0">
-                <a:solidFill>
-                  <a:srgbClr val="E2E8F0"/>
-                </a:solidFill>
-                <a:latin typeface="Calibri" pitchFamily="34" charset="0"/>
-                <a:ea typeface="Calibri" pitchFamily="34" charset="-122"/>
-                <a:cs typeface="Calibri" pitchFamily="34" charset="-120"/>
-              </a:rPr>
-              <a:t>工程師改了一行程式碼。</a:t>
-            </a:r>
-            <a:endParaRPr lang="en-US" sz="4000" dirty="0"/>
-          </a:p>
-          <a:p>
-            <a:pPr marL="0" indent="0">
-              <a:lnSpc>
-                <a:spcPts val="5200"/>
-              </a:lnSpc>
-              <a:buNone/>
-            </a:pPr>
-            <a:r>
-              <a:rPr lang="en-US" sz="4000" b="1" dirty="0">
-                <a:solidFill>
-                  <a:srgbClr val="E2E8F0"/>
-                </a:solidFill>
-                <a:latin typeface="Calibri" pitchFamily="34" charset="0"/>
-                <a:ea typeface="Calibri" pitchFamily="34" charset="-122"/>
-                <a:cs typeface="Calibri" pitchFamily="34" charset="-120"/>
-              </a:rPr>
-              <a:t>這行程式碼要怎麼變成</a:t>
-            </a:r>
-            <a:endParaRPr lang="en-US" sz="4000" dirty="0"/>
-          </a:p>
-          <a:p>
-            <a:pPr marL="0" indent="0">
-              <a:lnSpc>
-                <a:spcPts val="5200"/>
-              </a:lnSpc>
-              <a:buNone/>
-            </a:pPr>
-            <a:r>
-              <a:rPr lang="en-US" sz="4000" b="1" dirty="0">
-                <a:solidFill>
-                  <a:srgbClr val="E2E8F0"/>
-                </a:solidFill>
-                <a:latin typeface="Calibri" pitchFamily="34" charset="0"/>
-                <a:ea typeface="Calibri" pitchFamily="34" charset="-122"/>
-                <a:cs typeface="Calibri" pitchFamily="34" charset="-120"/>
-              </a:rPr>
-              <a:t>線上正在跑的網站？</a:t>
-            </a:r>
-            <a:endParaRPr lang="en-US" sz="4000" dirty="0"/>
-          </a:p>
-        </p:txBody>
-      </p:sp>
-      <p:sp>
-        <p:nvSpPr>
-          <p:cNvPr id="4" name="Shape 2"/>
-          <p:cNvSpPr/>
-          <p:nvPr/>
-        </p:nvSpPr>
-        <p:spPr>
-          <a:xfrm>
-            <a:off x="822960" y="4434840"/>
-            <a:ext cx="10515600" cy="1417320"/>
-          </a:xfrm>
-          <a:prstGeom prst="roundRect">
-            <a:avLst>
-              <a:gd name="adj" fmla="val 5161"/>
-            </a:avLst>
+          <p:cNvPr id="7" name="Rectangle 6">
+            <a:extLst>
+              <a:ext uri="{FF2B5EF4-FFF2-40B4-BE49-F238E27FC236}">
+                <a16:creationId xmlns:a16="http://schemas.microsoft.com/office/drawing/2014/main" id="{F3060C83-F051-4F0E-ABAD-AA0DFC48B218}"/>
+              </a:ext>
+              <a:ext uri="{C183D7F6-B498-43B3-948B-1728B52AA6E4}">
+                <adec:decorative xmlns:adec="http://schemas.microsoft.com/office/drawing/2017/decorative" val="1"/>
+              </a:ext>
+            </a:extLst>
+          </p:cNvPr>
+          <p:cNvSpPr>
+            <a:spLocks noGrp="1" noRot="1" noChangeAspect="1" noMove="1" noResize="1" noEditPoints="1" noAdjustHandles="1" noChangeArrowheads="1" noChangeShapeType="1" noTextEdit="1"/>
+          </p:cNvSpPr>
+          <p:nvPr>
+            <p:extLst>
+              <p:ext uri="{386F3935-93C4-4BCD-93E2-E3B085C9AB24}">
+                <p16:designElem xmlns:p16="http://schemas.microsoft.com/office/powerpoint/2015/main" val="1"/>
+              </p:ext>
+            </p:extLst>
+          </p:nvPr>
+        </p:nvSpPr>
+        <p:spPr>
+          <a:xfrm>
+            <a:off x="0" y="0"/>
+            <a:ext cx="12192000" cy="6858000"/>
+          </a:xfrm>
+          <a:prstGeom prst="rect">
+            <a:avLst/>
           </a:prstGeom>
           <a:solidFill>
-            <a:srgbClr val="1E293B"/>
+            <a:schemeClr val="bg1"/>
           </a:solidFill>
-          <a:ln w="12700">
-            <a:solidFill>
-              <a:srgbClr val="334155"/>
-            </a:solidFill>
-            <a:prstDash val="solid"/>
+          <a:ln>
+            <a:noFill/>
           </a:ln>
         </p:spPr>
-        <p:txBody>
-          <a:bodyPr/>
-          <a:lstStyle/>
-          <a:p>
+        <p:style>
+          <a:lnRef idx="2">
+            <a:schemeClr val="accent1">
+              <a:shade val="50000"/>
+            </a:schemeClr>
+          </a:lnRef>
+          <a:fillRef idx="1">
+            <a:schemeClr val="accent1"/>
+          </a:fillRef>
+          <a:effectRef idx="0">
+            <a:schemeClr val="accent1"/>
+          </a:effectRef>
+          <a:fontRef idx="minor">
+            <a:schemeClr val="lt1"/>
+          </a:fontRef>
+        </p:style>
+        <p:txBody>
+          <a:bodyPr rtlCol="0" anchor="ctr"/>
+          <a:lstStyle/>
+          <a:p>
+            <a:pPr algn="ctr"/>
+            <a:endParaRPr lang="en-US" dirty="0"/>
+          </a:p>
+        </p:txBody>
+      </p:sp>
+      <p:sp>
+        <p:nvSpPr>
+          <p:cNvPr id="9" name="Freeform: Shape 8">
+            <a:extLst>
+              <a:ext uri="{FF2B5EF4-FFF2-40B4-BE49-F238E27FC236}">
+                <a16:creationId xmlns:a16="http://schemas.microsoft.com/office/drawing/2014/main" id="{83C98ABE-055B-441F-B07E-44F97F083C39}"/>
+              </a:ext>
+              <a:ext uri="{C183D7F6-B498-43B3-948B-1728B52AA6E4}">
+                <adec:decorative xmlns:adec="http://schemas.microsoft.com/office/drawing/2017/decorative" val="1"/>
+              </a:ext>
+            </a:extLst>
+          </p:cNvPr>
+          <p:cNvSpPr>
+            <a:spLocks noGrp="1" noRot="1" noChangeAspect="1" noMove="1" noResize="1" noEditPoints="1" noAdjustHandles="1" noChangeArrowheads="1" noChangeShapeType="1" noTextEdit="1"/>
+          </p:cNvSpPr>
+          <p:nvPr>
+            <p:extLst>
+              <p:ext uri="{386F3935-93C4-4BCD-93E2-E3B085C9AB24}">
+                <p16:designElem xmlns:p16="http://schemas.microsoft.com/office/powerpoint/2015/main" val="1"/>
+              </p:ext>
+            </p:extLst>
+          </p:nvPr>
+        </p:nvSpPr>
+        <p:spPr>
+          <a:xfrm rot="18900000" flipH="1">
+            <a:off x="-376156" y="-253670"/>
+            <a:ext cx="1827638" cy="1376989"/>
+          </a:xfrm>
+          <a:custGeom>
+            <a:avLst/>
+            <a:gdLst>
+              <a:gd name="connsiteX0" fmla="*/ 0 w 1827638"/>
+              <a:gd name="connsiteY0" fmla="*/ 987379 h 1376989"/>
+              <a:gd name="connsiteX1" fmla="*/ 987379 w 1827638"/>
+              <a:gd name="connsiteY1" fmla="*/ 0 h 1376989"/>
+              <a:gd name="connsiteX2" fmla="*/ 1827638 w 1827638"/>
+              <a:gd name="connsiteY2" fmla="*/ 840260 h 1376989"/>
+              <a:gd name="connsiteX3" fmla="*/ 1827638 w 1827638"/>
+              <a:gd name="connsiteY3" fmla="*/ 1376989 h 1376989"/>
+              <a:gd name="connsiteX4" fmla="*/ 0 w 1827638"/>
+              <a:gd name="connsiteY4" fmla="*/ 1376989 h 1376989"/>
+            </a:gdLst>
+            <a:ahLst/>
+            <a:cxnLst>
+              <a:cxn ang="0">
+                <a:pos x="connsiteX0" y="connsiteY0"/>
+              </a:cxn>
+              <a:cxn ang="0">
+                <a:pos x="connsiteX1" y="connsiteY1"/>
+              </a:cxn>
+              <a:cxn ang="0">
+                <a:pos x="connsiteX2" y="connsiteY2"/>
+              </a:cxn>
+              <a:cxn ang="0">
+                <a:pos x="connsiteX3" y="connsiteY3"/>
+              </a:cxn>
+              <a:cxn ang="0">
+                <a:pos x="connsiteX4" y="connsiteY4"/>
+              </a:cxn>
+            </a:cxnLst>
+            <a:rect l="l" t="t" r="r" b="b"/>
+            <a:pathLst>
+              <a:path w="1827638" h="1376989">
+                <a:moveTo>
+                  <a:pt x="0" y="987379"/>
+                </a:moveTo>
+                <a:lnTo>
+                  <a:pt x="987379" y="0"/>
+                </a:lnTo>
+                <a:lnTo>
+                  <a:pt x="1827638" y="840260"/>
+                </a:lnTo>
+                <a:lnTo>
+                  <a:pt x="1827638" y="1376989"/>
+                </a:lnTo>
+                <a:lnTo>
+                  <a:pt x="0" y="1376989"/>
+                </a:lnTo>
+                <a:close/>
+              </a:path>
+            </a:pathLst>
+          </a:custGeom>
+          <a:solidFill>
+            <a:schemeClr val="accent1">
+              <a:alpha val="30000"/>
+            </a:schemeClr>
+          </a:solidFill>
+          <a:ln>
+            <a:noFill/>
+          </a:ln>
+        </p:spPr>
+        <p:style>
+          <a:lnRef idx="2">
+            <a:schemeClr val="accent1">
+              <a:shade val="50000"/>
+            </a:schemeClr>
+          </a:lnRef>
+          <a:fillRef idx="1">
+            <a:schemeClr val="accent1"/>
+          </a:fillRef>
+          <a:effectRef idx="0">
+            <a:schemeClr val="accent1"/>
+          </a:effectRef>
+          <a:fontRef idx="minor">
+            <a:schemeClr val="lt1"/>
+          </a:fontRef>
+        </p:style>
+        <p:txBody>
+          <a:bodyPr rtlCol="0" anchor="ctr"/>
+          <a:lstStyle/>
+          <a:p>
+            <a:pPr algn="ctr"/>
+            <a:endParaRPr lang="en-US" dirty="0"/>
+          </a:p>
+        </p:txBody>
+      </p:sp>
+      <p:sp>
+        <p:nvSpPr>
+          <p:cNvPr id="11" name="Rectangle 10">
+            <a:extLst>
+              <a:ext uri="{FF2B5EF4-FFF2-40B4-BE49-F238E27FC236}">
+                <a16:creationId xmlns:a16="http://schemas.microsoft.com/office/drawing/2014/main" id="{29FDB030-9B49-4CED-8CCD-4D99382388AC}"/>
+              </a:ext>
+              <a:ext uri="{C183D7F6-B498-43B3-948B-1728B52AA6E4}">
+                <adec:decorative xmlns:adec="http://schemas.microsoft.com/office/drawing/2017/decorative" val="1"/>
+              </a:ext>
+            </a:extLst>
+          </p:cNvPr>
+          <p:cNvSpPr>
+            <a:spLocks noGrp="1" noRot="1" noChangeAspect="1" noMove="1" noResize="1" noEditPoints="1" noAdjustHandles="1" noChangeArrowheads="1" noChangeShapeType="1" noTextEdit="1"/>
+          </p:cNvSpPr>
+          <p:nvPr>
+            <p:extLst>
+              <p:ext uri="{386F3935-93C4-4BCD-93E2-E3B085C9AB24}">
+                <p16:designElem xmlns:p16="http://schemas.microsoft.com/office/powerpoint/2015/main" val="1"/>
+              </p:ext>
+            </p:extLst>
+          </p:nvPr>
+        </p:nvSpPr>
+        <p:spPr>
+          <a:xfrm rot="18900000" flipH="1">
+            <a:off x="891641" y="422146"/>
+            <a:ext cx="645368" cy="645368"/>
+          </a:xfrm>
+          <a:prstGeom prst="rect">
+            <a:avLst/>
+          </a:prstGeom>
+          <a:solidFill>
+            <a:schemeClr val="accent1">
+              <a:alpha val="30000"/>
+            </a:schemeClr>
+          </a:solidFill>
+          <a:ln>
+            <a:noFill/>
+          </a:ln>
+        </p:spPr>
+        <p:style>
+          <a:lnRef idx="2">
+            <a:schemeClr val="accent1">
+              <a:shade val="50000"/>
+            </a:schemeClr>
+          </a:lnRef>
+          <a:fillRef idx="1">
+            <a:schemeClr val="accent1"/>
+          </a:fillRef>
+          <a:effectRef idx="0">
+            <a:schemeClr val="accent1"/>
+          </a:effectRef>
+          <a:fontRef idx="minor">
+            <a:schemeClr val="lt1"/>
+          </a:fontRef>
+        </p:style>
+        <p:txBody>
+          <a:bodyPr rtlCol="0" anchor="ctr"/>
+          <a:lstStyle/>
+          <a:p>
+            <a:pPr algn="ctr"/>
             <a:endParaRPr lang="en-US"/>
           </a:p>
         </p:txBody>
       </p:sp>
       <p:sp>
         <p:nvSpPr>
-          <p:cNvPr id="5" name="Text 3"/>
-          <p:cNvSpPr/>
-          <p:nvPr/>
-        </p:nvSpPr>
-        <p:spPr>
-          <a:xfrm>
-            <a:off x="1188720" y="4663440"/>
-            <a:ext cx="9784080" cy="365760"/>
-          </a:xfrm>
-          <a:prstGeom prst="rect">
-            <a:avLst/>
-          </a:prstGeom>
-          <a:noFill/>
-          <a:ln/>
-        </p:spPr>
-        <p:txBody>
-          <a:bodyPr wrap="square" lIns="0" tIns="0" rIns="0" bIns="0" rtlCol="0" anchor="ctr"/>
-          <a:lstStyle/>
-          <a:p>
-            <a:pPr marL="0" indent="0">
-              <a:buNone/>
-            </a:pPr>
-            <a:r>
-              <a:rPr lang="en-US" sz="1900" b="1" dirty="0">
-                <a:solidFill>
-                  <a:srgbClr val="38BDF8"/>
-                </a:solidFill>
-                <a:latin typeface="Calibri" pitchFamily="34" charset="0"/>
-                <a:ea typeface="Calibri" pitchFamily="34" charset="-122"/>
-                <a:cs typeface="Calibri" pitchFamily="34" charset="-120"/>
-              </a:rPr>
-              <a:t>這個問題有六種答案，一種比一種好。</a:t>
-            </a:r>
-            <a:endParaRPr lang="en-US" sz="1900" dirty="0"/>
-          </a:p>
-        </p:txBody>
-      </p:sp>
-      <p:sp>
-        <p:nvSpPr>
-          <p:cNvPr id="6" name="Text 4"/>
-          <p:cNvSpPr/>
-          <p:nvPr/>
-        </p:nvSpPr>
-        <p:spPr>
-          <a:xfrm>
-            <a:off x="1188720" y="5120640"/>
-            <a:ext cx="9784080" cy="548640"/>
-          </a:xfrm>
-          <a:prstGeom prst="rect">
-            <a:avLst/>
-          </a:prstGeom>
-          <a:noFill/>
-          <a:ln/>
-        </p:spPr>
-        <p:txBody>
-          <a:bodyPr wrap="square" lIns="0" tIns="0" rIns="0" bIns="0" rtlCol="0" anchor="ctr"/>
-          <a:lstStyle/>
-          <a:p>
-            <a:pPr marL="0" indent="0">
-              <a:lnSpc>
-                <a:spcPts val="2200"/>
-              </a:lnSpc>
-              <a:buNone/>
-            </a:pPr>
-            <a:r>
-              <a:rPr lang="en-US" sz="1400" dirty="0">
-                <a:solidFill>
-                  <a:srgbClr val="E2E8F0"/>
-                </a:solidFill>
-                <a:latin typeface="Calibri" pitchFamily="34" charset="0"/>
-                <a:ea typeface="Calibri" pitchFamily="34" charset="-122"/>
-                <a:cs typeface="Calibri" pitchFamily="34" charset="-120"/>
-              </a:rPr>
-              <a:t>本專題把六種都做過一遍，並記錄每一種的步驟數、耗時、失敗次數、是否可追溯——用數字證明自動化的價值，而不是宣稱。</a:t>
-            </a:r>
-            <a:endParaRPr lang="en-US" sz="1400" dirty="0"/>
+          <p:cNvPr id="13" name="Rectangle 12">
+            <a:extLst>
+              <a:ext uri="{FF2B5EF4-FFF2-40B4-BE49-F238E27FC236}">
+                <a16:creationId xmlns:a16="http://schemas.microsoft.com/office/drawing/2014/main" id="{3783CA14-24A1-485C-8B30-D6A5D87987AD}"/>
+              </a:ext>
+              <a:ext uri="{C183D7F6-B498-43B3-948B-1728B52AA6E4}">
+                <adec:decorative xmlns:adec="http://schemas.microsoft.com/office/drawing/2017/decorative" val="1"/>
+              </a:ext>
+            </a:extLst>
+          </p:cNvPr>
+          <p:cNvSpPr>
+            <a:spLocks noGrp="1" noRot="1" noChangeAspect="1" noMove="1" noResize="1" noEditPoints="1" noAdjustHandles="1" noChangeArrowheads="1" noChangeShapeType="1" noTextEdit="1"/>
+          </p:cNvSpPr>
+          <p:nvPr>
+            <p:extLst>
+              <p:ext uri="{386F3935-93C4-4BCD-93E2-E3B085C9AB24}">
+                <p16:designElem xmlns:p16="http://schemas.microsoft.com/office/powerpoint/2015/main" val="1"/>
+              </p:ext>
+            </p:extLst>
+          </p:nvPr>
+        </p:nvSpPr>
+        <p:spPr>
+          <a:xfrm rot="18900000" flipH="1">
+            <a:off x="10043482" y="655140"/>
+            <a:ext cx="687472" cy="687472"/>
+          </a:xfrm>
+          <a:prstGeom prst="rect">
+            <a:avLst/>
+          </a:prstGeom>
+          <a:solidFill>
+            <a:schemeClr val="accent4">
+              <a:alpha val="30000"/>
+            </a:schemeClr>
+          </a:solidFill>
+          <a:ln>
+            <a:noFill/>
+          </a:ln>
+        </p:spPr>
+        <p:style>
+          <a:lnRef idx="2">
+            <a:schemeClr val="accent1">
+              <a:shade val="50000"/>
+            </a:schemeClr>
+          </a:lnRef>
+          <a:fillRef idx="1">
+            <a:schemeClr val="accent1"/>
+          </a:fillRef>
+          <a:effectRef idx="0">
+            <a:schemeClr val="accent1"/>
+          </a:effectRef>
+          <a:fontRef idx="minor">
+            <a:schemeClr val="lt1"/>
+          </a:fontRef>
+        </p:style>
+        <p:txBody>
+          <a:bodyPr rtlCol="0" anchor="ctr"/>
+          <a:lstStyle/>
+          <a:p>
+            <a:pPr algn="ctr"/>
+            <a:endParaRPr lang="en-US"/>
+          </a:p>
+        </p:txBody>
+      </p:sp>
+      <p:sp>
+        <p:nvSpPr>
+          <p:cNvPr id="15" name="Freeform: Shape 14">
+            <a:extLst>
+              <a:ext uri="{FF2B5EF4-FFF2-40B4-BE49-F238E27FC236}">
+                <a16:creationId xmlns:a16="http://schemas.microsoft.com/office/drawing/2014/main" id="{9A97C86A-04D6-40F7-AE84-31AB43E6A846}"/>
+              </a:ext>
+              <a:ext uri="{C183D7F6-B498-43B3-948B-1728B52AA6E4}">
+                <adec:decorative xmlns:adec="http://schemas.microsoft.com/office/drawing/2017/decorative" val="1"/>
+              </a:ext>
+            </a:extLst>
+          </p:cNvPr>
+          <p:cNvSpPr>
+            <a:spLocks noGrp="1" noRot="1" noChangeAspect="1" noMove="1" noResize="1" noEditPoints="1" noAdjustHandles="1" noChangeArrowheads="1" noChangeShapeType="1" noTextEdit="1"/>
+          </p:cNvSpPr>
+          <p:nvPr>
+            <p:extLst>
+              <p:ext uri="{386F3935-93C4-4BCD-93E2-E3B085C9AB24}">
+                <p16:designElem xmlns:p16="http://schemas.microsoft.com/office/powerpoint/2015/main" val="1"/>
+              </p:ext>
+            </p:extLst>
+          </p:nvPr>
+        </p:nvSpPr>
+        <p:spPr>
+          <a:xfrm rot="10800000" flipH="1">
+            <a:off x="9356643" y="0"/>
+            <a:ext cx="2835357" cy="1480837"/>
+          </a:xfrm>
+          <a:custGeom>
+            <a:avLst/>
+            <a:gdLst>
+              <a:gd name="connsiteX0" fmla="*/ 2835357 w 2835357"/>
+              <a:gd name="connsiteY0" fmla="*/ 1480837 h 1480837"/>
+              <a:gd name="connsiteX1" fmla="*/ 0 w 2835357"/>
+              <a:gd name="connsiteY1" fmla="*/ 1480837 h 1480837"/>
+              <a:gd name="connsiteX2" fmla="*/ 1552727 w 2835357"/>
+              <a:gd name="connsiteY2" fmla="*/ 0 h 1480837"/>
+              <a:gd name="connsiteX3" fmla="*/ 2835357 w 2835357"/>
+              <a:gd name="connsiteY3" fmla="*/ 1223245 h 1480837"/>
+            </a:gdLst>
+            <a:ahLst/>
+            <a:cxnLst>
+              <a:cxn ang="0">
+                <a:pos x="connsiteX0" y="connsiteY0"/>
+              </a:cxn>
+              <a:cxn ang="0">
+                <a:pos x="connsiteX1" y="connsiteY1"/>
+              </a:cxn>
+              <a:cxn ang="0">
+                <a:pos x="connsiteX2" y="connsiteY2"/>
+              </a:cxn>
+              <a:cxn ang="0">
+                <a:pos x="connsiteX3" y="connsiteY3"/>
+              </a:cxn>
+            </a:cxnLst>
+            <a:rect l="l" t="t" r="r" b="b"/>
+            <a:pathLst>
+              <a:path w="2835357" h="1480837">
+                <a:moveTo>
+                  <a:pt x="2835357" y="1480837"/>
+                </a:moveTo>
+                <a:lnTo>
+                  <a:pt x="0" y="1480837"/>
+                </a:lnTo>
+                <a:lnTo>
+                  <a:pt x="1552727" y="0"/>
+                </a:lnTo>
+                <a:lnTo>
+                  <a:pt x="2835357" y="1223245"/>
+                </a:lnTo>
+                <a:close/>
+              </a:path>
+            </a:pathLst>
+          </a:custGeom>
+          <a:solidFill>
+            <a:schemeClr val="accent4">
+              <a:alpha val="30000"/>
+            </a:schemeClr>
+          </a:solidFill>
+          <a:ln>
+            <a:noFill/>
+          </a:ln>
+        </p:spPr>
+        <p:style>
+          <a:lnRef idx="2">
+            <a:schemeClr val="accent1">
+              <a:shade val="50000"/>
+            </a:schemeClr>
+          </a:lnRef>
+          <a:fillRef idx="1">
+            <a:schemeClr val="accent1"/>
+          </a:fillRef>
+          <a:effectRef idx="0">
+            <a:schemeClr val="accent1"/>
+          </a:effectRef>
+          <a:fontRef idx="minor">
+            <a:schemeClr val="lt1"/>
+          </a:fontRef>
+        </p:style>
+        <p:txBody>
+          <a:bodyPr wrap="square" rtlCol="0" anchor="ctr">
+            <a:noAutofit/>
+          </a:bodyPr>
+          <a:lstStyle/>
+          <a:p>
+            <a:pPr algn="ctr"/>
+            <a:endParaRPr lang="en-US" dirty="0"/>
+          </a:p>
+        </p:txBody>
+      </p:sp>
+      <p:sp>
+        <p:nvSpPr>
+          <p:cNvPr id="17" name="Isosceles Triangle 16">
+            <a:extLst>
+              <a:ext uri="{FF2B5EF4-FFF2-40B4-BE49-F238E27FC236}">
+                <a16:creationId xmlns:a16="http://schemas.microsoft.com/office/drawing/2014/main" id="{FF9F2414-84E8-453E-B1F3-389FDE8192D9}"/>
+              </a:ext>
+              <a:ext uri="{C183D7F6-B498-43B3-948B-1728B52AA6E4}">
+                <adec:decorative xmlns:adec="http://schemas.microsoft.com/office/drawing/2017/decorative" val="1"/>
+              </a:ext>
+            </a:extLst>
+          </p:cNvPr>
+          <p:cNvSpPr>
+            <a:spLocks noGrp="1" noRot="1" noChangeAspect="1" noMove="1" noResize="1" noEditPoints="1" noAdjustHandles="1" noChangeArrowheads="1" noChangeShapeType="1" noTextEdit="1"/>
+          </p:cNvSpPr>
+          <p:nvPr>
+            <p:extLst>
+              <p:ext uri="{386F3935-93C4-4BCD-93E2-E3B085C9AB24}">
+                <p16:designElem xmlns:p16="http://schemas.microsoft.com/office/powerpoint/2015/main" val="1"/>
+              </p:ext>
+            </p:extLst>
+          </p:nvPr>
+        </p:nvSpPr>
+        <p:spPr>
+          <a:xfrm flipH="1">
+            <a:off x="7976344" y="6115501"/>
+            <a:ext cx="1494513" cy="742499"/>
+          </a:xfrm>
+          <a:prstGeom prst="triangle">
+            <a:avLst/>
+          </a:prstGeom>
+          <a:solidFill>
+            <a:schemeClr val="accent1">
+              <a:alpha val="30000"/>
+            </a:schemeClr>
+          </a:solidFill>
+          <a:ln>
+            <a:noFill/>
+          </a:ln>
+        </p:spPr>
+        <p:style>
+          <a:lnRef idx="2">
+            <a:schemeClr val="accent1">
+              <a:shade val="50000"/>
+            </a:schemeClr>
+          </a:lnRef>
+          <a:fillRef idx="1">
+            <a:schemeClr val="accent1"/>
+          </a:fillRef>
+          <a:effectRef idx="0">
+            <a:schemeClr val="accent1"/>
+          </a:effectRef>
+          <a:fontRef idx="minor">
+            <a:schemeClr val="lt1"/>
+          </a:fontRef>
+        </p:style>
+        <p:txBody>
+          <a:bodyPr rtlCol="0" anchor="ctr"/>
+          <a:lstStyle/>
+          <a:p>
+            <a:pPr algn="ctr"/>
+            <a:endParaRPr lang="en-US"/>
+          </a:p>
+        </p:txBody>
+      </p:sp>
+      <p:pic>
+        <p:nvPicPr>
+          <p:cNvPr id="2" name="Picture 1">
+            <a:extLst>
+              <a:ext uri="{FF2B5EF4-FFF2-40B4-BE49-F238E27FC236}">
+                <a16:creationId xmlns:a16="http://schemas.microsoft.com/office/drawing/2014/main" id="{51144303-4F8A-1378-2C37-49A729C6E747}"/>
+              </a:ext>
+            </a:extLst>
+          </p:cNvPr>
+          <p:cNvPicPr>
+            <a:picLocks noChangeAspect="1"/>
+          </p:cNvPicPr>
+          <p:nvPr/>
+        </p:nvPicPr>
+        <p:blipFill>
+          <a:blip r:embed="rId2"/>
+          <a:stretch>
+            <a:fillRect/>
+          </a:stretch>
+        </p:blipFill>
+        <p:spPr>
+          <a:xfrm>
+            <a:off x="3068247" y="643467"/>
+            <a:ext cx="6055506" cy="5571065"/>
+          </a:xfrm>
+          <a:prstGeom prst="rect">
+            <a:avLst/>
+          </a:prstGeom>
+          <a:ln>
+            <a:noFill/>
+          </a:ln>
+        </p:spPr>
+      </p:pic>
+      <p:sp>
+        <p:nvSpPr>
+          <p:cNvPr id="19" name="Isosceles Triangle 18">
+            <a:extLst>
+              <a:ext uri="{FF2B5EF4-FFF2-40B4-BE49-F238E27FC236}">
+                <a16:creationId xmlns:a16="http://schemas.microsoft.com/office/drawing/2014/main" id="{3ECA69A1-7536-43AC-85EF-C7106179F5ED}"/>
+              </a:ext>
+              <a:ext uri="{C183D7F6-B498-43B3-948B-1728B52AA6E4}">
+                <adec:decorative xmlns:adec="http://schemas.microsoft.com/office/drawing/2017/decorative" val="1"/>
+              </a:ext>
+            </a:extLst>
+          </p:cNvPr>
+          <p:cNvSpPr>
+            <a:spLocks noGrp="1" noRot="1" noChangeAspect="1" noMove="1" noResize="1" noEditPoints="1" noAdjustHandles="1" noChangeArrowheads="1" noChangeShapeType="1" noTextEdit="1"/>
+          </p:cNvSpPr>
+          <p:nvPr>
+            <p:extLst>
+              <p:ext uri="{386F3935-93C4-4BCD-93E2-E3B085C9AB24}">
+                <p16:designElem xmlns:p16="http://schemas.microsoft.com/office/powerpoint/2015/main" val="1"/>
+              </p:ext>
+            </p:extLst>
+          </p:nvPr>
+        </p:nvSpPr>
+        <p:spPr>
+          <a:xfrm flipH="1">
+            <a:off x="7604080" y="6453143"/>
+            <a:ext cx="814903" cy="404857"/>
+          </a:xfrm>
+          <a:prstGeom prst="triangle">
+            <a:avLst/>
+          </a:prstGeom>
+          <a:solidFill>
+            <a:schemeClr val="accent1">
+              <a:alpha val="30000"/>
+            </a:schemeClr>
+          </a:solidFill>
+          <a:ln>
+            <a:noFill/>
+          </a:ln>
+        </p:spPr>
+        <p:style>
+          <a:lnRef idx="2">
+            <a:schemeClr val="accent1">
+              <a:shade val="50000"/>
+            </a:schemeClr>
+          </a:lnRef>
+          <a:fillRef idx="1">
+            <a:schemeClr val="accent1"/>
+          </a:fillRef>
+          <a:effectRef idx="0">
+            <a:schemeClr val="accent1"/>
+          </a:effectRef>
+          <a:fontRef idx="minor">
+            <a:schemeClr val="lt1"/>
+          </a:fontRef>
+        </p:style>
+        <p:txBody>
+          <a:bodyPr rtlCol="0" anchor="ctr"/>
+          <a:lstStyle/>
+          <a:p>
+            <a:pPr algn="ctr"/>
+            <a:endParaRPr lang="en-US"/>
           </a:p>
         </p:txBody>
       </p:sp>
     </p:spTree>
+    <p:extLst>
+      <p:ext uri="{BB962C8B-B14F-4D97-AF65-F5344CB8AC3E}">
+        <p14:creationId xmlns:p14="http://schemas.microsoft.com/office/powerpoint/2010/main" val="991498431"/>
+      </p:ext>
+    </p:extLst>
   </p:cSld>
   <p:clrMapOvr>
     <a:masterClrMapping/>
@@ -7201,7 +4900,7 @@
 </p:sld>
 </file>
 
-<file path=ppt/slides/slide3.xml><?xml version="1.0" encoding="utf-8"?>
+<file path=ppt/slides/slide2.xml><?xml version="1.0" encoding="utf-8"?>
 <p:sld xmlns:a="http://schemas.openxmlformats.org/drawingml/2006/main" xmlns:r="http://schemas.openxmlformats.org/officeDocument/2006/relationships" xmlns:p="http://schemas.openxmlformats.org/presentationml/2006/main">
   <p:cSld name="Slide 3">
     <p:bg>
@@ -8870,7 +6569,7 @@
 </p:sld>
 </file>
 
-<file path=ppt/slides/slide4.xml><?xml version="1.0" encoding="utf-8"?>
+<file path=ppt/slides/slide3.xml><?xml version="1.0" encoding="utf-8"?>
 <p:sld xmlns:a="http://schemas.openxmlformats.org/drawingml/2006/main" xmlns:r="http://schemas.openxmlformats.org/officeDocument/2006/relationships" xmlns:p="http://schemas.openxmlformats.org/presentationml/2006/main">
   <p:cSld name="Slide 4">
     <p:bg>
@@ -9951,7 +7650,7 @@
 </p:sld>
 </file>
 
-<file path=ppt/slides/slide5.xml><?xml version="1.0" encoding="utf-8"?>
+<file path=ppt/slides/slide4.xml><?xml version="1.0" encoding="utf-8"?>
 <p:sld xmlns:a="http://schemas.openxmlformats.org/drawingml/2006/main" xmlns:r="http://schemas.openxmlformats.org/officeDocument/2006/relationships" xmlns:p="http://schemas.openxmlformats.org/presentationml/2006/main">
   <p:cSld name="Slide 5">
     <p:bg>
@@ -11065,7 +8764,7 @@
 </p:sld>
 </file>
 
-<file path=ppt/slides/slide6.xml><?xml version="1.0" encoding="utf-8"?>
+<file path=ppt/slides/slide5.xml><?xml version="1.0" encoding="utf-8"?>
 <p:sld xmlns:a="http://schemas.openxmlformats.org/drawingml/2006/main" xmlns:r="http://schemas.openxmlformats.org/officeDocument/2006/relationships" xmlns:p="http://schemas.openxmlformats.org/presentationml/2006/main">
   <p:cSld name="Slide 6">
     <p:bg>
@@ -12134,7 +9833,7 @@
 </p:sld>
 </file>
 
-<file path=ppt/slides/slide7.xml><?xml version="1.0" encoding="utf-8"?>
+<file path=ppt/slides/slide6.xml><?xml version="1.0" encoding="utf-8"?>
 <p:sld xmlns:a="http://schemas.openxmlformats.org/drawingml/2006/main" xmlns:r="http://schemas.openxmlformats.org/officeDocument/2006/relationships" xmlns:p="http://schemas.openxmlformats.org/presentationml/2006/main">
   <p:cSld name="Slide 7">
     <p:bg>
@@ -12994,7 +10693,7 @@
 </p:sld>
 </file>
 
-<file path=ppt/slides/slide8.xml><?xml version="1.0" encoding="utf-8"?>
+<file path=ppt/slides/slide7.xml><?xml version="1.0" encoding="utf-8"?>
 <p:sld xmlns:a="http://schemas.openxmlformats.org/drawingml/2006/main" xmlns:r="http://schemas.openxmlformats.org/officeDocument/2006/relationships" xmlns:p="http://schemas.openxmlformats.org/presentationml/2006/main">
   <p:cSld name="Slide 8">
     <p:bg>
@@ -13999,7 +11698,7 @@
 </p:sld>
 </file>
 
-<file path=ppt/slides/slide9.xml><?xml version="1.0" encoding="utf-8"?>
+<file path=ppt/slides/slide8.xml><?xml version="1.0" encoding="utf-8"?>
 <p:sld xmlns:a="http://schemas.openxmlformats.org/drawingml/2006/main" xmlns:r="http://schemas.openxmlformats.org/officeDocument/2006/relationships" xmlns:p="http://schemas.openxmlformats.org/presentationml/2006/main">
   <p:cSld name="Slide 9">
     <p:bg>
@@ -14945,6 +12644,927 @@
               <a:t>無</a:t>
             </a:r>
             <a:endParaRPr lang="en-US" sz="1300" dirty="0"/>
+          </a:p>
+        </p:txBody>
+      </p:sp>
+    </p:spTree>
+  </p:cSld>
+  <p:clrMapOvr>
+    <a:masterClrMapping/>
+  </p:clrMapOvr>
+</p:sld>
+</file>
+
+<file path=ppt/slides/slide9.xml><?xml version="1.0" encoding="utf-8"?>
+<p:sld xmlns:a="http://schemas.openxmlformats.org/drawingml/2006/main" xmlns:r="http://schemas.openxmlformats.org/officeDocument/2006/relationships" xmlns:p="http://schemas.openxmlformats.org/presentationml/2006/main">
+  <p:cSld name="Slide 10">
+    <p:bg>
+      <p:bgPr>
+        <a:solidFill>
+          <a:srgbClr val="FFFFFF"/>
+        </a:solidFill>
+        <a:effectLst/>
+      </p:bgPr>
+    </p:bg>
+    <p:spTree>
+      <p:nvGrpSpPr>
+        <p:cNvPr id="1" name=""/>
+        <p:cNvGrpSpPr/>
+        <p:nvPr/>
+      </p:nvGrpSpPr>
+      <p:grpSpPr>
+        <a:xfrm>
+          <a:off x="0" y="0"/>
+          <a:ext cx="0" cy="0"/>
+          <a:chOff x="0" y="0"/>
+          <a:chExt cx="0" cy="0"/>
+        </a:xfrm>
+      </p:grpSpPr>
+      <p:sp>
+        <p:nvSpPr>
+          <p:cNvPr id="2" name="Text 0"/>
+          <p:cNvSpPr/>
+          <p:nvPr/>
+        </p:nvSpPr>
+        <p:spPr>
+          <a:xfrm>
+            <a:off x="548640" y="384048"/>
+            <a:ext cx="7315200" cy="274320"/>
+          </a:xfrm>
+          <a:prstGeom prst="rect">
+            <a:avLst/>
+          </a:prstGeom>
+          <a:noFill/>
+          <a:ln/>
+        </p:spPr>
+        <p:txBody>
+          <a:bodyPr wrap="square" lIns="0" tIns="0" rIns="0" bIns="0" rtlCol="0" anchor="ctr"/>
+          <a:lstStyle/>
+          <a:p>
+            <a:pPr marL="0" indent="0">
+              <a:buNone/>
+            </a:pPr>
+            <a:r>
+              <a:rPr lang="en-US" sz="1200" b="1" kern="0" spc="150" dirty="0">
+                <a:solidFill>
+                  <a:srgbClr val="38BDF8"/>
+                </a:solidFill>
+                <a:latin typeface="Calibri" pitchFamily="34" charset="0"/>
+                <a:ea typeface="Calibri" pitchFamily="34" charset="-122"/>
+                <a:cs typeface="Calibri" pitchFamily="34" charset="-120"/>
+              </a:rPr>
+              <a:t>評分維度③</a:t>
+            </a:r>
+            <a:endParaRPr lang="en-US" sz="1200" dirty="0"/>
+          </a:p>
+        </p:txBody>
+      </p:sp>
+      <p:sp>
+        <p:nvSpPr>
+          <p:cNvPr id="3" name="Text 1"/>
+          <p:cNvSpPr/>
+          <p:nvPr/>
+        </p:nvSpPr>
+        <p:spPr>
+          <a:xfrm>
+            <a:off x="548640" y="658368"/>
+            <a:ext cx="11064240" cy="640080"/>
+          </a:xfrm>
+          <a:prstGeom prst="rect">
+            <a:avLst/>
+          </a:prstGeom>
+          <a:noFill/>
+          <a:ln/>
+        </p:spPr>
+        <p:txBody>
+          <a:bodyPr wrap="square" lIns="0" tIns="0" rIns="0" bIns="0" rtlCol="0" anchor="ctr"/>
+          <a:lstStyle/>
+          <a:p>
+            <a:pPr marL="0" indent="0">
+              <a:buNone/>
+            </a:pPr>
+            <a:r>
+              <a:rPr lang="en-US" sz="3400" b="1" dirty="0">
+                <a:solidFill>
+                  <a:srgbClr val="1E293B"/>
+                </a:solidFill>
+                <a:latin typeface="Calibri" pitchFamily="34" charset="0"/>
+                <a:ea typeface="Calibri" pitchFamily="34" charset="-122"/>
+                <a:cs typeface="Calibri" pitchFamily="34" charset="-120"/>
+              </a:rPr>
+              <a:t>安全設計：整條流水線零長期憑證</a:t>
+            </a:r>
+            <a:endParaRPr lang="en-US" sz="3400" dirty="0"/>
+          </a:p>
+        </p:txBody>
+      </p:sp>
+      <p:sp>
+        <p:nvSpPr>
+          <p:cNvPr id="4" name="Shape 2"/>
+          <p:cNvSpPr/>
+          <p:nvPr/>
+        </p:nvSpPr>
+        <p:spPr>
+          <a:xfrm>
+            <a:off x="548640" y="1645920"/>
+            <a:ext cx="11064240" cy="2331720"/>
+          </a:xfrm>
+          <a:prstGeom prst="roundRect">
+            <a:avLst>
+              <a:gd name="adj" fmla="val 3137"/>
+            </a:avLst>
+          </a:prstGeom>
+          <a:solidFill>
+            <a:srgbClr val="F8FAFC"/>
+          </a:solidFill>
+          <a:ln w="12700">
+            <a:solidFill>
+              <a:srgbClr val="E2E8F0"/>
+            </a:solidFill>
+            <a:prstDash val="solid"/>
+          </a:ln>
+        </p:spPr>
+        <p:txBody>
+          <a:bodyPr/>
+          <a:lstStyle/>
+          <a:p>
+            <a:endParaRPr lang="en-US"/>
+          </a:p>
+        </p:txBody>
+      </p:sp>
+      <p:sp>
+        <p:nvSpPr>
+          <p:cNvPr id="5" name="Text 3"/>
+          <p:cNvSpPr/>
+          <p:nvPr/>
+        </p:nvSpPr>
+        <p:spPr>
+          <a:xfrm>
+            <a:off x="914400" y="1828800"/>
+            <a:ext cx="3291840" cy="274320"/>
+          </a:xfrm>
+          <a:prstGeom prst="rect">
+            <a:avLst/>
+          </a:prstGeom>
+          <a:noFill/>
+          <a:ln/>
+        </p:spPr>
+        <p:txBody>
+          <a:bodyPr wrap="square" lIns="0" tIns="0" rIns="0" bIns="0" rtlCol="0" anchor="ctr"/>
+          <a:lstStyle/>
+          <a:p>
+            <a:pPr marL="0" indent="0">
+              <a:buNone/>
+            </a:pPr>
+            <a:r>
+              <a:rPr lang="en-US" sz="1100" b="1" dirty="0">
+                <a:solidFill>
+                  <a:srgbClr val="94A3B8"/>
+                </a:solidFill>
+                <a:latin typeface="Calibri" pitchFamily="34" charset="0"/>
+                <a:ea typeface="Calibri" pitchFamily="34" charset="-122"/>
+                <a:cs typeface="Calibri" pitchFamily="34" charset="-120"/>
+              </a:rPr>
+              <a:t>環節</a:t>
+            </a:r>
+            <a:endParaRPr lang="en-US" sz="1100" dirty="0"/>
+          </a:p>
+        </p:txBody>
+      </p:sp>
+      <p:sp>
+        <p:nvSpPr>
+          <p:cNvPr id="6" name="Text 4"/>
+          <p:cNvSpPr/>
+          <p:nvPr/>
+        </p:nvSpPr>
+        <p:spPr>
+          <a:xfrm>
+            <a:off x="4389120" y="1828800"/>
+            <a:ext cx="4754880" cy="274320"/>
+          </a:xfrm>
+          <a:prstGeom prst="rect">
+            <a:avLst/>
+          </a:prstGeom>
+          <a:noFill/>
+          <a:ln/>
+        </p:spPr>
+        <p:txBody>
+          <a:bodyPr wrap="square" lIns="0" tIns="0" rIns="0" bIns="0" rtlCol="0" anchor="ctr"/>
+          <a:lstStyle/>
+          <a:p>
+            <a:pPr marL="0" indent="0">
+              <a:buNone/>
+            </a:pPr>
+            <a:r>
+              <a:rPr lang="en-US" sz="1100" b="1" dirty="0">
+                <a:solidFill>
+                  <a:srgbClr val="94A3B8"/>
+                </a:solidFill>
+                <a:latin typeface="Calibri" pitchFamily="34" charset="0"/>
+                <a:ea typeface="Calibri" pitchFamily="34" charset="-122"/>
+                <a:cs typeface="Calibri" pitchFamily="34" charset="-120"/>
+              </a:rPr>
+              <a:t>認證方式</a:t>
+            </a:r>
+            <a:endParaRPr lang="en-US" sz="1100" dirty="0"/>
+          </a:p>
+        </p:txBody>
+      </p:sp>
+      <p:sp>
+        <p:nvSpPr>
+          <p:cNvPr id="7" name="Text 5"/>
+          <p:cNvSpPr/>
+          <p:nvPr/>
+        </p:nvSpPr>
+        <p:spPr>
+          <a:xfrm>
+            <a:off x="9326880" y="1828800"/>
+            <a:ext cx="2011680" cy="274320"/>
+          </a:xfrm>
+          <a:prstGeom prst="rect">
+            <a:avLst/>
+          </a:prstGeom>
+          <a:noFill/>
+          <a:ln/>
+        </p:spPr>
+        <p:txBody>
+          <a:bodyPr wrap="square" lIns="0" tIns="0" rIns="0" bIns="0" rtlCol="0" anchor="ctr"/>
+          <a:lstStyle/>
+          <a:p>
+            <a:pPr marL="0" indent="0">
+              <a:buNone/>
+            </a:pPr>
+            <a:r>
+              <a:rPr lang="en-US" sz="1100" b="1" dirty="0">
+                <a:solidFill>
+                  <a:srgbClr val="94A3B8"/>
+                </a:solidFill>
+                <a:latin typeface="Calibri" pitchFamily="34" charset="0"/>
+                <a:ea typeface="Calibri" pitchFamily="34" charset="-122"/>
+                <a:cs typeface="Calibri" pitchFamily="34" charset="-120"/>
+              </a:rPr>
+              <a:t>有效期</a:t>
+            </a:r>
+            <a:endParaRPr lang="en-US" sz="1100" dirty="0"/>
+          </a:p>
+        </p:txBody>
+      </p:sp>
+      <p:sp>
+        <p:nvSpPr>
+          <p:cNvPr id="8" name="Text 6"/>
+          <p:cNvSpPr/>
+          <p:nvPr/>
+        </p:nvSpPr>
+        <p:spPr>
+          <a:xfrm>
+            <a:off x="914400" y="2176272"/>
+            <a:ext cx="3291840" cy="320040"/>
+          </a:xfrm>
+          <a:prstGeom prst="rect">
+            <a:avLst/>
+          </a:prstGeom>
+          <a:noFill/>
+          <a:ln/>
+        </p:spPr>
+        <p:txBody>
+          <a:bodyPr wrap="square" lIns="0" tIns="0" rIns="0" bIns="0" rtlCol="0" anchor="ctr"/>
+          <a:lstStyle/>
+          <a:p>
+            <a:pPr marL="0" indent="0">
+              <a:buNone/>
+            </a:pPr>
+            <a:r>
+              <a:rPr lang="en-US" sz="1250" b="1" dirty="0">
+                <a:solidFill>
+                  <a:srgbClr val="1E293B"/>
+                </a:solidFill>
+                <a:latin typeface="Calibri" pitchFamily="34" charset="0"/>
+                <a:ea typeface="Calibri" pitchFamily="34" charset="-122"/>
+                <a:cs typeface="Calibri" pitchFamily="34" charset="-120"/>
+              </a:rPr>
+              <a:t>GitHub Actions → AWS</a:t>
+            </a:r>
+            <a:endParaRPr lang="en-US" sz="1250" dirty="0"/>
+          </a:p>
+        </p:txBody>
+      </p:sp>
+      <p:sp>
+        <p:nvSpPr>
+          <p:cNvPr id="9" name="Text 7"/>
+          <p:cNvSpPr/>
+          <p:nvPr/>
+        </p:nvSpPr>
+        <p:spPr>
+          <a:xfrm>
+            <a:off x="4389120" y="2176272"/>
+            <a:ext cx="4754880" cy="320040"/>
+          </a:xfrm>
+          <a:prstGeom prst="rect">
+            <a:avLst/>
+          </a:prstGeom>
+          <a:noFill/>
+          <a:ln/>
+        </p:spPr>
+        <p:txBody>
+          <a:bodyPr wrap="square" lIns="0" tIns="0" rIns="0" bIns="0" rtlCol="0" anchor="ctr"/>
+          <a:lstStyle/>
+          <a:p>
+            <a:pPr marL="0" indent="0">
+              <a:buNone/>
+            </a:pPr>
+            <a:r>
+              <a:rPr lang="en-US" sz="1250" dirty="0">
+                <a:solidFill>
+                  <a:srgbClr val="1E293B"/>
+                </a:solidFill>
+                <a:latin typeface="Calibri" pitchFamily="34" charset="0"/>
+                <a:ea typeface="Calibri" pitchFamily="34" charset="-122"/>
+                <a:cs typeface="Calibri" pitchFamily="34" charset="-120"/>
+              </a:rPr>
+              <a:t>OIDC 換取臨時憑證</a:t>
+            </a:r>
+            <a:endParaRPr lang="en-US" sz="1250" dirty="0"/>
+          </a:p>
+        </p:txBody>
+      </p:sp>
+      <p:sp>
+        <p:nvSpPr>
+          <p:cNvPr id="10" name="Text 8"/>
+          <p:cNvSpPr/>
+          <p:nvPr/>
+        </p:nvSpPr>
+        <p:spPr>
+          <a:xfrm>
+            <a:off x="9326880" y="2176272"/>
+            <a:ext cx="2011680" cy="320040"/>
+          </a:xfrm>
+          <a:prstGeom prst="rect">
+            <a:avLst/>
+          </a:prstGeom>
+          <a:noFill/>
+          <a:ln/>
+        </p:spPr>
+        <p:txBody>
+          <a:bodyPr wrap="square" lIns="0" tIns="0" rIns="0" bIns="0" rtlCol="0" anchor="ctr"/>
+          <a:lstStyle/>
+          <a:p>
+            <a:pPr marL="0" indent="0">
+              <a:buNone/>
+            </a:pPr>
+            <a:r>
+              <a:rPr lang="en-US" sz="1250" b="1" dirty="0">
+                <a:solidFill>
+                  <a:srgbClr val="38BDF8"/>
+                </a:solidFill>
+                <a:latin typeface="Calibri" pitchFamily="34" charset="0"/>
+                <a:ea typeface="Calibri" pitchFamily="34" charset="-122"/>
+                <a:cs typeface="Calibri" pitchFamily="34" charset="-120"/>
+              </a:rPr>
+              <a:t>1 小時</a:t>
+            </a:r>
+            <a:endParaRPr lang="en-US" sz="1250" dirty="0"/>
+          </a:p>
+        </p:txBody>
+      </p:sp>
+      <p:sp>
+        <p:nvSpPr>
+          <p:cNvPr id="11" name="Text 9"/>
+          <p:cNvSpPr/>
+          <p:nvPr/>
+        </p:nvSpPr>
+        <p:spPr>
+          <a:xfrm>
+            <a:off x="914400" y="2606040"/>
+            <a:ext cx="3291840" cy="320040"/>
+          </a:xfrm>
+          <a:prstGeom prst="rect">
+            <a:avLst/>
+          </a:prstGeom>
+          <a:noFill/>
+          <a:ln/>
+        </p:spPr>
+        <p:txBody>
+          <a:bodyPr wrap="square" lIns="0" tIns="0" rIns="0" bIns="0" rtlCol="0" anchor="ctr"/>
+          <a:lstStyle/>
+          <a:p>
+            <a:pPr marL="0" indent="0">
+              <a:buNone/>
+            </a:pPr>
+            <a:r>
+              <a:rPr lang="en-US" sz="1250" b="1" dirty="0">
+                <a:solidFill>
+                  <a:srgbClr val="1E293B"/>
+                </a:solidFill>
+                <a:latin typeface="Calibri" pitchFamily="34" charset="0"/>
+                <a:ea typeface="Calibri" pitchFamily="34" charset="-122"/>
+                <a:cs typeface="Calibri" pitchFamily="34" charset="-120"/>
+              </a:rPr>
+              <a:t>Actions → ECR</a:t>
+            </a:r>
+            <a:endParaRPr lang="en-US" sz="1250" dirty="0"/>
+          </a:p>
+        </p:txBody>
+      </p:sp>
+      <p:sp>
+        <p:nvSpPr>
+          <p:cNvPr id="12" name="Text 10"/>
+          <p:cNvSpPr/>
+          <p:nvPr/>
+        </p:nvSpPr>
+        <p:spPr>
+          <a:xfrm>
+            <a:off x="4389120" y="2606040"/>
+            <a:ext cx="4754880" cy="320040"/>
+          </a:xfrm>
+          <a:prstGeom prst="rect">
+            <a:avLst/>
+          </a:prstGeom>
+          <a:noFill/>
+          <a:ln/>
+        </p:spPr>
+        <p:txBody>
+          <a:bodyPr wrap="square" lIns="0" tIns="0" rIns="0" bIns="0" rtlCol="0" anchor="ctr"/>
+          <a:lstStyle/>
+          <a:p>
+            <a:pPr marL="0" indent="0">
+              <a:buNone/>
+            </a:pPr>
+            <a:r>
+              <a:rPr lang="en-US" sz="1250" dirty="0">
+                <a:solidFill>
+                  <a:srgbClr val="1E293B"/>
+                </a:solidFill>
+                <a:latin typeface="Calibri" pitchFamily="34" charset="0"/>
+                <a:ea typeface="Calibri" pitchFamily="34" charset="-122"/>
+                <a:cs typeface="Calibri" pitchFamily="34" charset="-120"/>
+              </a:rPr>
+              <a:t>以臨時憑證換取推送權杖</a:t>
+            </a:r>
+            <a:endParaRPr lang="en-US" sz="1250" dirty="0"/>
+          </a:p>
+        </p:txBody>
+      </p:sp>
+      <p:sp>
+        <p:nvSpPr>
+          <p:cNvPr id="13" name="Text 11"/>
+          <p:cNvSpPr/>
+          <p:nvPr/>
+        </p:nvSpPr>
+        <p:spPr>
+          <a:xfrm>
+            <a:off x="9326880" y="2606040"/>
+            <a:ext cx="2011680" cy="320040"/>
+          </a:xfrm>
+          <a:prstGeom prst="rect">
+            <a:avLst/>
+          </a:prstGeom>
+          <a:noFill/>
+          <a:ln/>
+        </p:spPr>
+        <p:txBody>
+          <a:bodyPr wrap="square" lIns="0" tIns="0" rIns="0" bIns="0" rtlCol="0" anchor="ctr"/>
+          <a:lstStyle/>
+          <a:p>
+            <a:pPr marL="0" indent="0">
+              <a:buNone/>
+            </a:pPr>
+            <a:r>
+              <a:rPr lang="en-US" sz="1250" b="1" dirty="0">
+                <a:solidFill>
+                  <a:srgbClr val="38BDF8"/>
+                </a:solidFill>
+                <a:latin typeface="Calibri" pitchFamily="34" charset="0"/>
+                <a:ea typeface="Calibri" pitchFamily="34" charset="-122"/>
+                <a:cs typeface="Calibri" pitchFamily="34" charset="-120"/>
+              </a:rPr>
+              <a:t>12 小時</a:t>
+            </a:r>
+            <a:endParaRPr lang="en-US" sz="1250" dirty="0"/>
+          </a:p>
+        </p:txBody>
+      </p:sp>
+      <p:sp>
+        <p:nvSpPr>
+          <p:cNvPr id="14" name="Text 12"/>
+          <p:cNvSpPr/>
+          <p:nvPr/>
+        </p:nvSpPr>
+        <p:spPr>
+          <a:xfrm>
+            <a:off x="914400" y="3035808"/>
+            <a:ext cx="3291840" cy="320040"/>
+          </a:xfrm>
+          <a:prstGeom prst="rect">
+            <a:avLst/>
+          </a:prstGeom>
+          <a:noFill/>
+          <a:ln/>
+        </p:spPr>
+        <p:txBody>
+          <a:bodyPr wrap="square" lIns="0" tIns="0" rIns="0" bIns="0" rtlCol="0" anchor="ctr"/>
+          <a:lstStyle/>
+          <a:p>
+            <a:pPr marL="0" indent="0">
+              <a:buNone/>
+            </a:pPr>
+            <a:r>
+              <a:rPr lang="en-US" sz="1250" b="1" dirty="0">
+                <a:solidFill>
+                  <a:srgbClr val="1E293B"/>
+                </a:solidFill>
+                <a:latin typeface="Calibri" pitchFamily="34" charset="0"/>
+                <a:ea typeface="Calibri" pitchFamily="34" charset="-122"/>
+                <a:cs typeface="Calibri" pitchFamily="34" charset="-120"/>
+              </a:rPr>
+              <a:t>Actions → EC2</a:t>
+            </a:r>
+            <a:endParaRPr lang="en-US" sz="1250" dirty="0"/>
+          </a:p>
+        </p:txBody>
+      </p:sp>
+      <p:sp>
+        <p:nvSpPr>
+          <p:cNvPr id="15" name="Text 13"/>
+          <p:cNvSpPr/>
+          <p:nvPr/>
+        </p:nvSpPr>
+        <p:spPr>
+          <a:xfrm>
+            <a:off x="4389120" y="3035808"/>
+            <a:ext cx="4754880" cy="320040"/>
+          </a:xfrm>
+          <a:prstGeom prst="rect">
+            <a:avLst/>
+          </a:prstGeom>
+          <a:noFill/>
+          <a:ln/>
+        </p:spPr>
+        <p:txBody>
+          <a:bodyPr wrap="square" lIns="0" tIns="0" rIns="0" bIns="0" rtlCol="0" anchor="ctr"/>
+          <a:lstStyle/>
+          <a:p>
+            <a:pPr marL="0" indent="0">
+              <a:buNone/>
+            </a:pPr>
+            <a:r>
+              <a:rPr lang="en-US" sz="1250" dirty="0">
+                <a:solidFill>
+                  <a:srgbClr val="1E293B"/>
+                </a:solidFill>
+                <a:latin typeface="Calibri" pitchFamily="34" charset="0"/>
+                <a:ea typeface="Calibri" pitchFamily="34" charset="-122"/>
+                <a:cs typeface="Calibri" pitchFamily="34" charset="-120"/>
+              </a:rPr>
+              <a:t>SSM Run Command（不經 SSH）</a:t>
+            </a:r>
+            <a:endParaRPr lang="en-US" sz="1250" dirty="0"/>
+          </a:p>
+        </p:txBody>
+      </p:sp>
+      <p:sp>
+        <p:nvSpPr>
+          <p:cNvPr id="16" name="Text 14"/>
+          <p:cNvSpPr/>
+          <p:nvPr/>
+        </p:nvSpPr>
+        <p:spPr>
+          <a:xfrm>
+            <a:off x="9326880" y="3035808"/>
+            <a:ext cx="2011680" cy="320040"/>
+          </a:xfrm>
+          <a:prstGeom prst="rect">
+            <a:avLst/>
+          </a:prstGeom>
+          <a:noFill/>
+          <a:ln/>
+        </p:spPr>
+        <p:txBody>
+          <a:bodyPr wrap="square" lIns="0" tIns="0" rIns="0" bIns="0" rtlCol="0" anchor="ctr"/>
+          <a:lstStyle/>
+          <a:p>
+            <a:pPr marL="0" indent="0">
+              <a:buNone/>
+            </a:pPr>
+            <a:r>
+              <a:rPr lang="en-US" sz="1250" b="1" dirty="0">
+                <a:solidFill>
+                  <a:srgbClr val="38BDF8"/>
+                </a:solidFill>
+                <a:latin typeface="Calibri" pitchFamily="34" charset="0"/>
+                <a:ea typeface="Calibri" pitchFamily="34" charset="-122"/>
+                <a:cs typeface="Calibri" pitchFamily="34" charset="-120"/>
+              </a:rPr>
+              <a:t>單次</a:t>
+            </a:r>
+            <a:endParaRPr lang="en-US" sz="1250" dirty="0"/>
+          </a:p>
+        </p:txBody>
+      </p:sp>
+      <p:sp>
+        <p:nvSpPr>
+          <p:cNvPr id="17" name="Text 15"/>
+          <p:cNvSpPr/>
+          <p:nvPr/>
+        </p:nvSpPr>
+        <p:spPr>
+          <a:xfrm>
+            <a:off x="914400" y="3465576"/>
+            <a:ext cx="3291840" cy="320040"/>
+          </a:xfrm>
+          <a:prstGeom prst="rect">
+            <a:avLst/>
+          </a:prstGeom>
+          <a:noFill/>
+          <a:ln/>
+        </p:spPr>
+        <p:txBody>
+          <a:bodyPr wrap="square" lIns="0" tIns="0" rIns="0" bIns="0" rtlCol="0" anchor="ctr"/>
+          <a:lstStyle/>
+          <a:p>
+            <a:pPr marL="0" indent="0">
+              <a:buNone/>
+            </a:pPr>
+            <a:r>
+              <a:rPr lang="en-US" sz="1250" b="1" dirty="0">
+                <a:solidFill>
+                  <a:srgbClr val="1E293B"/>
+                </a:solidFill>
+                <a:latin typeface="Calibri" pitchFamily="34" charset="0"/>
+                <a:ea typeface="Calibri" pitchFamily="34" charset="-122"/>
+                <a:cs typeface="Calibri" pitchFamily="34" charset="-120"/>
+              </a:rPr>
+              <a:t>EC2 → ECR</a:t>
+            </a:r>
+            <a:endParaRPr lang="en-US" sz="1250" dirty="0"/>
+          </a:p>
+        </p:txBody>
+      </p:sp>
+      <p:sp>
+        <p:nvSpPr>
+          <p:cNvPr id="18" name="Text 16"/>
+          <p:cNvSpPr/>
+          <p:nvPr/>
+        </p:nvSpPr>
+        <p:spPr>
+          <a:xfrm>
+            <a:off x="4389120" y="3465576"/>
+            <a:ext cx="4754880" cy="320040"/>
+          </a:xfrm>
+          <a:prstGeom prst="rect">
+            <a:avLst/>
+          </a:prstGeom>
+          <a:noFill/>
+          <a:ln/>
+        </p:spPr>
+        <p:txBody>
+          <a:bodyPr wrap="square" lIns="0" tIns="0" rIns="0" bIns="0" rtlCol="0" anchor="ctr"/>
+          <a:lstStyle/>
+          <a:p>
+            <a:pPr marL="0" indent="0">
+              <a:buNone/>
+            </a:pPr>
+            <a:r>
+              <a:rPr lang="en-US" sz="1250" dirty="0">
+                <a:solidFill>
+                  <a:srgbClr val="1E293B"/>
+                </a:solidFill>
+                <a:latin typeface="Calibri" pitchFamily="34" charset="0"/>
+                <a:ea typeface="Calibri" pitchFamily="34" charset="-122"/>
+                <a:cs typeface="Calibri" pitchFamily="34" charset="-120"/>
+              </a:rPr>
+              <a:t>EC2 IAM Role 換取權杖</a:t>
+            </a:r>
+            <a:endParaRPr lang="en-US" sz="1250" dirty="0"/>
+          </a:p>
+        </p:txBody>
+      </p:sp>
+      <p:sp>
+        <p:nvSpPr>
+          <p:cNvPr id="19" name="Text 17"/>
+          <p:cNvSpPr/>
+          <p:nvPr/>
+        </p:nvSpPr>
+        <p:spPr>
+          <a:xfrm>
+            <a:off x="9326880" y="3465576"/>
+            <a:ext cx="2011680" cy="320040"/>
+          </a:xfrm>
+          <a:prstGeom prst="rect">
+            <a:avLst/>
+          </a:prstGeom>
+          <a:noFill/>
+          <a:ln/>
+        </p:spPr>
+        <p:txBody>
+          <a:bodyPr wrap="square" lIns="0" tIns="0" rIns="0" bIns="0" rtlCol="0" anchor="ctr"/>
+          <a:lstStyle/>
+          <a:p>
+            <a:pPr marL="0" indent="0">
+              <a:buNone/>
+            </a:pPr>
+            <a:r>
+              <a:rPr lang="en-US" sz="1250" b="1" dirty="0">
+                <a:solidFill>
+                  <a:srgbClr val="38BDF8"/>
+                </a:solidFill>
+                <a:latin typeface="Calibri" pitchFamily="34" charset="0"/>
+                <a:ea typeface="Calibri" pitchFamily="34" charset="-122"/>
+                <a:cs typeface="Calibri" pitchFamily="34" charset="-120"/>
+              </a:rPr>
+              <a:t>12 小時</a:t>
+            </a:r>
+            <a:endParaRPr lang="en-US" sz="1250" dirty="0"/>
+          </a:p>
+        </p:txBody>
+      </p:sp>
+      <p:sp>
+        <p:nvSpPr>
+          <p:cNvPr id="20" name="Shape 18"/>
+          <p:cNvSpPr/>
+          <p:nvPr/>
+        </p:nvSpPr>
+        <p:spPr>
+          <a:xfrm>
+            <a:off x="548640" y="4206240"/>
+            <a:ext cx="11064240" cy="1965960"/>
+          </a:xfrm>
+          <a:prstGeom prst="roundRect">
+            <a:avLst>
+              <a:gd name="adj" fmla="val 3721"/>
+            </a:avLst>
+          </a:prstGeom>
+          <a:solidFill>
+            <a:srgbClr val="F0F9FF"/>
+          </a:solidFill>
+          <a:ln w="12700">
+            <a:solidFill>
+              <a:srgbClr val="E2E8F0"/>
+            </a:solidFill>
+            <a:prstDash val="solid"/>
+          </a:ln>
+        </p:spPr>
+        <p:txBody>
+          <a:bodyPr/>
+          <a:lstStyle/>
+          <a:p>
+            <a:endParaRPr lang="en-US"/>
+          </a:p>
+        </p:txBody>
+      </p:sp>
+      <p:sp>
+        <p:nvSpPr>
+          <p:cNvPr id="21" name="Text 19"/>
+          <p:cNvSpPr/>
+          <p:nvPr/>
+        </p:nvSpPr>
+        <p:spPr>
+          <a:xfrm>
+            <a:off x="914400" y="4389120"/>
+            <a:ext cx="10332720" cy="274320"/>
+          </a:xfrm>
+          <a:prstGeom prst="rect">
+            <a:avLst/>
+          </a:prstGeom>
+          <a:noFill/>
+          <a:ln/>
+        </p:spPr>
+        <p:txBody>
+          <a:bodyPr wrap="square" lIns="0" tIns="0" rIns="0" bIns="0" rtlCol="0" anchor="ctr"/>
+          <a:lstStyle/>
+          <a:p>
+            <a:pPr marL="0" indent="0">
+              <a:buNone/>
+            </a:pPr>
+            <a:r>
+              <a:rPr lang="en-US" sz="1400" b="1" dirty="0">
+                <a:solidFill>
+                  <a:srgbClr val="0369A1"/>
+                </a:solidFill>
+                <a:latin typeface="Calibri" pitchFamily="34" charset="0"/>
+                <a:ea typeface="Calibri" pitchFamily="34" charset="-122"/>
+                <a:cs typeface="Calibri" pitchFamily="34" charset="-120"/>
+              </a:rPr>
+              <a:t>其他措施</a:t>
+            </a:r>
+            <a:endParaRPr lang="en-US" sz="1400" dirty="0"/>
+          </a:p>
+        </p:txBody>
+      </p:sp>
+      <p:sp>
+        <p:nvSpPr>
+          <p:cNvPr id="22" name="Text 20"/>
+          <p:cNvSpPr/>
+          <p:nvPr/>
+        </p:nvSpPr>
+        <p:spPr>
+          <a:xfrm>
+            <a:off x="914400" y="4736592"/>
+            <a:ext cx="10332720" cy="1280160"/>
+          </a:xfrm>
+          <a:prstGeom prst="rect">
+            <a:avLst/>
+          </a:prstGeom>
+          <a:noFill/>
+          <a:ln/>
+        </p:spPr>
+        <p:txBody>
+          <a:bodyPr wrap="square" lIns="0" tIns="0" rIns="0" bIns="0" rtlCol="0" anchor="ctr"/>
+          <a:lstStyle/>
+          <a:p>
+            <a:pPr marL="342900" indent="-342900">
+              <a:lnSpc>
+                <a:spcPts val="1800"/>
+              </a:lnSpc>
+              <a:spcAft>
+                <a:spcPts val="600"/>
+              </a:spcAft>
+              <a:buSzPct val="100000"/>
+              <a:buChar char="•"/>
+            </a:pPr>
+            <a:r>
+              <a:rPr lang="en-US" sz="1250" dirty="0">
+                <a:solidFill>
+                  <a:srgbClr val="1E293B"/>
+                </a:solidFill>
+                <a:latin typeface="Calibri" pitchFamily="34" charset="0"/>
+                <a:ea typeface="Calibri" pitchFamily="34" charset="-122"/>
+                <a:cs typeface="Calibri" pitchFamily="34" charset="-120"/>
+              </a:rPr>
+              <a:t>不開 22 port，且主機內 sshd 已停用（縱深防禦，不依賴單一控制點）</a:t>
+            </a:r>
+            <a:endParaRPr lang="en-US" sz="1250" dirty="0"/>
+          </a:p>
+          <a:p>
+            <a:pPr marL="342900" indent="-342900">
+              <a:lnSpc>
+                <a:spcPts val="1800"/>
+              </a:lnSpc>
+              <a:spcAft>
+                <a:spcPts val="600"/>
+              </a:spcAft>
+              <a:buSzPct val="100000"/>
+              <a:buChar char="•"/>
+            </a:pPr>
+            <a:r>
+              <a:rPr lang="en-US" sz="1250" dirty="0">
+                <a:solidFill>
+                  <a:srgbClr val="1E293B"/>
+                </a:solidFill>
+                <a:latin typeface="Calibri" pitchFamily="34" charset="0"/>
+                <a:ea typeface="Calibri" pitchFamily="34" charset="-122"/>
+                <a:cs typeface="Calibri" pitchFamily="34" charset="-120"/>
+              </a:rPr>
+              <a:t>容器以非 root 使用者執行；ECR 私有倉庫並啟用推送掃描，實際掃出 CRITICAL 4 / HIGH 8</a:t>
+            </a:r>
+            <a:endParaRPr lang="en-US" sz="1250" dirty="0"/>
+          </a:p>
+          <a:p>
+            <a:pPr marL="342900" indent="-342900">
+              <a:lnSpc>
+                <a:spcPts val="1800"/>
+              </a:lnSpc>
+              <a:spcAft>
+                <a:spcPts val="600"/>
+              </a:spcAft>
+              <a:buSzPct val="100000"/>
+              <a:buChar char="•"/>
+            </a:pPr>
+            <a:r>
+              <a:rPr lang="en-US" sz="1250" dirty="0">
+                <a:solidFill>
+                  <a:srgbClr val="1E293B"/>
+                </a:solidFill>
+                <a:latin typeface="Calibri" pitchFamily="34" charset="0"/>
+                <a:ea typeface="Calibri" pitchFamily="34" charset="-122"/>
+                <a:cs typeface="Calibri" pitchFamily="34" charset="-120"/>
+              </a:rPr>
+              <a:t>IAM 權限精確到單一資源：只能推特定倉庫、只能對特定主機下指令、只能更新特定服務</a:t>
+            </a:r>
+            <a:endParaRPr lang="en-US" sz="1250" dirty="0"/>
+          </a:p>
+          <a:p>
+            <a:pPr marL="342900" indent="-342900">
+              <a:lnSpc>
+                <a:spcPts val="1800"/>
+              </a:lnSpc>
+              <a:spcAft>
+                <a:spcPts val="600"/>
+              </a:spcAft>
+              <a:buSzPct val="100000"/>
+              <a:buChar char="•"/>
+            </a:pPr>
+            <a:r>
+              <a:rPr lang="en-US" sz="1250" dirty="0">
+                <a:solidFill>
+                  <a:srgbClr val="1E293B"/>
+                </a:solidFill>
+                <a:latin typeface="Calibri" pitchFamily="34" charset="0"/>
+                <a:ea typeface="Calibri" pitchFamily="34" charset="-122"/>
+                <a:cs typeface="Calibri" pitchFamily="34" charset="-120"/>
+              </a:rPr>
+              <a:t>私有子網使用獨立路由表且無對外路由——「出不去」由路由層保證，非倚賴防火牆規則</a:t>
+            </a:r>
+            <a:endParaRPr lang="en-US" sz="1250" dirty="0"/>
           </a:p>
         </p:txBody>
       </p:sp>
